--- a/МРиПЭ/Защита.pptx
+++ b/МРиПЭ/Защита.pptx
@@ -10,15 +10,15 @@
   <p:sldIdLst>
     <p:sldId id="256" r:id="rId2"/>
     <p:sldId id="257" r:id="rId3"/>
-    <p:sldId id="265" r:id="rId4"/>
-    <p:sldId id="266" r:id="rId5"/>
-    <p:sldId id="267" r:id="rId6"/>
-    <p:sldId id="268" r:id="rId7"/>
-    <p:sldId id="272" r:id="rId8"/>
-    <p:sldId id="269" r:id="rId9"/>
-    <p:sldId id="273" r:id="rId10"/>
-    <p:sldId id="270" r:id="rId11"/>
-    <p:sldId id="271" r:id="rId12"/>
+    <p:sldId id="259" r:id="rId4"/>
+    <p:sldId id="260" r:id="rId5"/>
+    <p:sldId id="262" r:id="rId6"/>
+    <p:sldId id="263" r:id="rId7"/>
+    <p:sldId id="264" r:id="rId8"/>
+    <p:sldId id="265" r:id="rId9"/>
+    <p:sldId id="266" r:id="rId10"/>
+    <p:sldId id="267" r:id="rId11"/>
+    <p:sldId id="268" r:id="rId12"/>
   </p:sldIdLst>
   <p:sldSz cx="12192000" cy="6858000"/>
   <p:notesSz cx="6858000" cy="9144000"/>
@@ -207,7 +207,7 @@
           <a:p>
             <a:fld id="{1CDB33AD-5C05-4723-B389-E1E81ABFFAD3}" type="datetimeFigureOut">
               <a:rPr lang="ru-RU" smtClean="0"/>
-              <a:t>05.04.2026</a:t>
+              <a:t>05.05.2026</a:t>
             </a:fld>
             <a:endParaRPr lang="ru-RU"/>
           </a:p>
@@ -474,90 +474,6 @@
 </p:notesMaster>
 </file>
 
-<file path=ppt/notesSlides/notesSlide1.xml><?xml version="1.0" encoding="utf-8"?>
-<p:notes xmlns:a="http://schemas.openxmlformats.org/drawingml/2006/main" xmlns:r="http://schemas.openxmlformats.org/officeDocument/2006/relationships" xmlns:p="http://schemas.openxmlformats.org/presentationml/2006/main">
-  <p:cSld>
-    <p:spTree>
-      <p:nvGrpSpPr>
-        <p:cNvPr id="1" name=""/>
-        <p:cNvGrpSpPr/>
-        <p:nvPr/>
-      </p:nvGrpSpPr>
-      <p:grpSpPr>
-        <a:xfrm>
-          <a:off x="0" y="0"/>
-          <a:ext cx="0" cy="0"/>
-          <a:chOff x="0" y="0"/>
-          <a:chExt cx="0" cy="0"/>
-        </a:xfrm>
-      </p:grpSpPr>
-      <p:sp>
-        <p:nvSpPr>
-          <p:cNvPr id="2" name="Образ слайда 1"/>
-          <p:cNvSpPr>
-            <a:spLocks noGrp="1" noRot="1" noChangeAspect="1"/>
-          </p:cNvSpPr>
-          <p:nvPr>
-            <p:ph type="sldImg"/>
-          </p:nvPr>
-        </p:nvSpPr>
-        <p:spPr/>
-      </p:sp>
-      <p:sp>
-        <p:nvSpPr>
-          <p:cNvPr id="3" name="Заметки 2"/>
-          <p:cNvSpPr>
-            <a:spLocks noGrp="1"/>
-          </p:cNvSpPr>
-          <p:nvPr>
-            <p:ph type="body" idx="1"/>
-          </p:nvPr>
-        </p:nvSpPr>
-        <p:spPr/>
-        <p:txBody>
-          <a:bodyPr/>
-          <a:lstStyle/>
-          <a:p>
-            <a:endParaRPr lang="ru-RU" dirty="0"/>
-          </a:p>
-        </p:txBody>
-      </p:sp>
-      <p:sp>
-        <p:nvSpPr>
-          <p:cNvPr id="4" name="Номер слайда 3"/>
-          <p:cNvSpPr>
-            <a:spLocks noGrp="1"/>
-          </p:cNvSpPr>
-          <p:nvPr>
-            <p:ph type="sldNum" sz="quarter" idx="5"/>
-          </p:nvPr>
-        </p:nvSpPr>
-        <p:spPr/>
-        <p:txBody>
-          <a:bodyPr/>
-          <a:lstStyle/>
-          <a:p>
-            <a:fld id="{F9E90A88-05AC-4B7C-96D7-DFBC6C1323A1}" type="slidenum">
-              <a:rPr lang="ru-RU" smtClean="0"/>
-              <a:t>6</a:t>
-            </a:fld>
-            <a:endParaRPr lang="ru-RU"/>
-          </a:p>
-        </p:txBody>
-      </p:sp>
-    </p:spTree>
-    <p:extLst>
-      <p:ext uri="{BB962C8B-B14F-4D97-AF65-F5344CB8AC3E}">
-        <p14:creationId xmlns:p14="http://schemas.microsoft.com/office/powerpoint/2010/main" val="3101896823"/>
-      </p:ext>
-    </p:extLst>
-  </p:cSld>
-  <p:clrMapOvr>
-    <a:masterClrMapping/>
-  </p:clrMapOvr>
-</p:notes>
-</file>
-
 <file path=ppt/slideLayouts/slideLayout1.xml><?xml version="1.0" encoding="utf-8"?>
 <p:sldLayout xmlns:a="http://schemas.openxmlformats.org/drawingml/2006/main" xmlns:r="http://schemas.openxmlformats.org/officeDocument/2006/relationships" xmlns:p="http://schemas.openxmlformats.org/presentationml/2006/main" type="title" preserve="1">
   <p:cSld name="Титульный слайд">
@@ -705,7 +621,7 @@
           <a:p>
             <a:fld id="{EE7FD824-9642-443D-A094-80DC1BD911E3}" type="datetimeFigureOut">
               <a:rPr lang="ru-RU" smtClean="0"/>
-              <a:t>05.04.2026</a:t>
+              <a:t>05.05.2026</a:t>
             </a:fld>
             <a:endParaRPr lang="ru-RU"/>
           </a:p>
@@ -903,7 +819,7 @@
           <a:p>
             <a:fld id="{EE7FD824-9642-443D-A094-80DC1BD911E3}" type="datetimeFigureOut">
               <a:rPr lang="ru-RU" smtClean="0"/>
-              <a:t>05.04.2026</a:t>
+              <a:t>05.05.2026</a:t>
             </a:fld>
             <a:endParaRPr lang="ru-RU"/>
           </a:p>
@@ -1111,7 +1027,7 @@
           <a:p>
             <a:fld id="{EE7FD824-9642-443D-A094-80DC1BD911E3}" type="datetimeFigureOut">
               <a:rPr lang="ru-RU" smtClean="0"/>
-              <a:t>05.04.2026</a:t>
+              <a:t>05.05.2026</a:t>
             </a:fld>
             <a:endParaRPr lang="ru-RU"/>
           </a:p>
@@ -1309,7 +1225,7 @@
           <a:p>
             <a:fld id="{EE7FD824-9642-443D-A094-80DC1BD911E3}" type="datetimeFigureOut">
               <a:rPr lang="ru-RU" smtClean="0"/>
-              <a:t>05.04.2026</a:t>
+              <a:t>05.05.2026</a:t>
             </a:fld>
             <a:endParaRPr lang="ru-RU"/>
           </a:p>
@@ -1584,7 +1500,7 @@
           <a:p>
             <a:fld id="{EE7FD824-9642-443D-A094-80DC1BD911E3}" type="datetimeFigureOut">
               <a:rPr lang="ru-RU" smtClean="0"/>
-              <a:t>05.04.2026</a:t>
+              <a:t>05.05.2026</a:t>
             </a:fld>
             <a:endParaRPr lang="ru-RU"/>
           </a:p>
@@ -1849,7 +1765,7 @@
           <a:p>
             <a:fld id="{EE7FD824-9642-443D-A094-80DC1BD911E3}" type="datetimeFigureOut">
               <a:rPr lang="ru-RU" smtClean="0"/>
-              <a:t>05.04.2026</a:t>
+              <a:t>05.05.2026</a:t>
             </a:fld>
             <a:endParaRPr lang="ru-RU"/>
           </a:p>
@@ -2261,7 +2177,7 @@
           <a:p>
             <a:fld id="{EE7FD824-9642-443D-A094-80DC1BD911E3}" type="datetimeFigureOut">
               <a:rPr lang="ru-RU" smtClean="0"/>
-              <a:t>05.04.2026</a:t>
+              <a:t>05.05.2026</a:t>
             </a:fld>
             <a:endParaRPr lang="ru-RU"/>
           </a:p>
@@ -2402,7 +2318,7 @@
           <a:p>
             <a:fld id="{EE7FD824-9642-443D-A094-80DC1BD911E3}" type="datetimeFigureOut">
               <a:rPr lang="ru-RU" smtClean="0"/>
-              <a:t>05.04.2026</a:t>
+              <a:t>05.05.2026</a:t>
             </a:fld>
             <a:endParaRPr lang="ru-RU"/>
           </a:p>
@@ -2515,7 +2431,7 @@
           <a:p>
             <a:fld id="{EE7FD824-9642-443D-A094-80DC1BD911E3}" type="datetimeFigureOut">
               <a:rPr lang="ru-RU" smtClean="0"/>
-              <a:t>05.04.2026</a:t>
+              <a:t>05.05.2026</a:t>
             </a:fld>
             <a:endParaRPr lang="ru-RU"/>
           </a:p>
@@ -2826,7 +2742,7 @@
           <a:p>
             <a:fld id="{EE7FD824-9642-443D-A094-80DC1BD911E3}" type="datetimeFigureOut">
               <a:rPr lang="ru-RU" smtClean="0"/>
-              <a:t>05.04.2026</a:t>
+              <a:t>05.05.2026</a:t>
             </a:fld>
             <a:endParaRPr lang="ru-RU"/>
           </a:p>
@@ -3114,7 +3030,7 @@
           <a:p>
             <a:fld id="{EE7FD824-9642-443D-A094-80DC1BD911E3}" type="datetimeFigureOut">
               <a:rPr lang="ru-RU" smtClean="0"/>
-              <a:t>05.04.2026</a:t>
+              <a:t>05.05.2026</a:t>
             </a:fld>
             <a:endParaRPr lang="ru-RU"/>
           </a:p>
@@ -3355,7 +3271,7 @@
           <a:p>
             <a:fld id="{EE7FD824-9642-443D-A094-80DC1BD911E3}" type="datetimeFigureOut">
               <a:rPr lang="ru-RU" smtClean="0"/>
-              <a:t>05.04.2026</a:t>
+              <a:t>05.05.2026</a:t>
             </a:fld>
             <a:endParaRPr lang="ru-RU"/>
           </a:p>
@@ -3847,8 +3763,8 @@
         </p:nvSpPr>
         <p:spPr>
           <a:xfrm>
-            <a:off x="463432" y="1458686"/>
-            <a:ext cx="9241971" cy="1820901"/>
+            <a:off x="463432" y="1404257"/>
+            <a:ext cx="9241971" cy="2226431"/>
           </a:xfrm>
         </p:spPr>
         <p:txBody>
@@ -3859,12 +3775,42 @@
           <a:p>
             <a:pPr algn="l"/>
             <a:r>
-              <a:rPr lang="ru-RU" b="1" dirty="0">
+              <a:rPr lang="ru-RU" sz="5000" b="1" dirty="0">
                 <a:solidFill>
                   <a:schemeClr val="bg1"/>
                 </a:solidFill>
               </a:rPr>
-              <a:t>ТЕХНОЛОГИИ МОНТАЖА ПЕЧАТНЫХ ПЛАТ</a:t>
+              <a:t>ГЛАВНАЯ ПЕРЕДАЧА</a:t>
+            </a:r>
+            <a:br>
+              <a:rPr lang="ru-RU" sz="5000" b="1" dirty="0">
+                <a:solidFill>
+                  <a:schemeClr val="bg1"/>
+                </a:solidFill>
+              </a:rPr>
+            </a:br>
+            <a:r>
+              <a:rPr lang="ru-RU" sz="5000" b="1" dirty="0">
+                <a:solidFill>
+                  <a:schemeClr val="bg1"/>
+                </a:solidFill>
+              </a:rPr>
+              <a:t>ПЕРЕДНЕПРИВОДНОГО</a:t>
+            </a:r>
+            <a:br>
+              <a:rPr lang="ru-RU" sz="5000" b="1" dirty="0">
+                <a:solidFill>
+                  <a:schemeClr val="bg1"/>
+                </a:solidFill>
+              </a:rPr>
+            </a:br>
+            <a:r>
+              <a:rPr lang="ru-RU" sz="5000" b="1" dirty="0">
+                <a:solidFill>
+                  <a:schemeClr val="bg1"/>
+                </a:solidFill>
+              </a:rPr>
+              <a:t>ЛЕГКОВОГО АВТОМОБИЛЯ</a:t>
             </a:r>
           </a:p>
         </p:txBody>
@@ -4048,7 +3994,7 @@
         <p:cNvPr id="1" name="">
           <a:extLst>
             <a:ext uri="{FF2B5EF4-FFF2-40B4-BE49-F238E27FC236}">
-              <a16:creationId xmlns:a16="http://schemas.microsoft.com/office/drawing/2014/main" id="{30D7BEBA-CB27-D129-62A4-0E2B8A4C009B}"/>
+              <a16:creationId xmlns:a16="http://schemas.microsoft.com/office/drawing/2014/main" id="{F542707A-3312-7252-1714-6B46CABFE3F7}"/>
             </a:ext>
           </a:extLst>
         </p:cNvPr>
@@ -4063,63 +4009,12 @@
           <a:chExt cx="0" cy="0"/>
         </a:xfrm>
       </p:grpSpPr>
-      <p:sp>
-        <p:nvSpPr>
-          <p:cNvPr id="3" name="Заголовок 2">
-            <a:extLst>
-              <a:ext uri="{FF2B5EF4-FFF2-40B4-BE49-F238E27FC236}">
-                <a16:creationId xmlns:a16="http://schemas.microsoft.com/office/drawing/2014/main" id="{6695B1A5-320A-F857-734E-C141E36D436D}"/>
-              </a:ext>
-            </a:extLst>
-          </p:cNvPr>
-          <p:cNvSpPr>
-            <a:spLocks noGrp="1"/>
-          </p:cNvSpPr>
-          <p:nvPr>
-            <p:ph type="title"/>
-          </p:nvPr>
-        </p:nvSpPr>
-        <p:spPr>
-          <a:xfrm>
-            <a:off x="896483" y="319424"/>
-            <a:ext cx="10399032" cy="1030404"/>
-          </a:xfrm>
-        </p:spPr>
-        <p:txBody>
-          <a:bodyPr>
-            <a:noAutofit/>
-          </a:bodyPr>
-          <a:lstStyle/>
-          <a:p>
-            <a:r>
-              <a:rPr lang="ru-RU" sz="3000" dirty="0">
-                <a:latin typeface="+mn-lt"/>
-              </a:rPr>
-              <a:t>Пример линии автоматического монтажа</a:t>
-            </a:r>
-            <a:br>
-              <a:rPr lang="ru-RU" sz="3000" dirty="0">
-                <a:latin typeface="+mn-lt"/>
-              </a:rPr>
-            </a:br>
-            <a:r>
-              <a:rPr lang="en-US" sz="3000" dirty="0">
-                <a:latin typeface="+mn-lt"/>
-              </a:rPr>
-              <a:t>SMT – Surface-Mount Technology</a:t>
-            </a:r>
-            <a:endParaRPr lang="ru-RU" sz="3000" dirty="0">
-              <a:latin typeface="+mn-lt"/>
-            </a:endParaRPr>
-          </a:p>
-        </p:txBody>
-      </p:sp>
       <p:pic>
         <p:nvPicPr>
-          <p:cNvPr id="5" name="Рисунок 4">
-            <a:extLst>
-              <a:ext uri="{FF2B5EF4-FFF2-40B4-BE49-F238E27FC236}">
-                <a16:creationId xmlns:a16="http://schemas.microsoft.com/office/drawing/2014/main" id="{93FE1600-BF78-F455-E81B-553328F07E43}"/>
+          <p:cNvPr id="8" name="Рисунок 7">
+            <a:extLst>
+              <a:ext uri="{FF2B5EF4-FFF2-40B4-BE49-F238E27FC236}">
+                <a16:creationId xmlns:a16="http://schemas.microsoft.com/office/drawing/2014/main" id="{86587F1B-2651-4077-B380-C4DB707D6329}"/>
               </a:ext>
             </a:extLst>
           </p:cNvPr>
@@ -4136,592 +4031,20 @@
         </p:blipFill>
         <p:spPr>
           <a:xfrm>
-            <a:off x="896483" y="1527737"/>
-            <a:ext cx="9945488" cy="4934639"/>
+            <a:off x="4722861" y="2072849"/>
+            <a:ext cx="7344800" cy="3467584"/>
           </a:xfrm>
           <a:prstGeom prst="rect">
             <a:avLst/>
           </a:prstGeom>
         </p:spPr>
       </p:pic>
-    </p:spTree>
-    <p:extLst>
-      <p:ext uri="{BB962C8B-B14F-4D97-AF65-F5344CB8AC3E}">
-        <p14:creationId xmlns:p14="http://schemas.microsoft.com/office/powerpoint/2010/main" val="2740589282"/>
-      </p:ext>
-    </p:extLst>
-  </p:cSld>
-  <p:clrMapOvr>
-    <a:masterClrMapping/>
-  </p:clrMapOvr>
-</p:sld>
-</file>
-
-<file path=ppt/slides/slide11.xml><?xml version="1.0" encoding="utf-8"?>
-<p:sld xmlns:a="http://schemas.openxmlformats.org/drawingml/2006/main" xmlns:r="http://schemas.openxmlformats.org/officeDocument/2006/relationships" xmlns:p="http://schemas.openxmlformats.org/presentationml/2006/main">
-  <p:cSld>
-    <p:spTree>
-      <p:nvGrpSpPr>
-        <p:cNvPr id="1" name="">
-          <a:extLst>
-            <a:ext uri="{FF2B5EF4-FFF2-40B4-BE49-F238E27FC236}">
-              <a16:creationId xmlns:a16="http://schemas.microsoft.com/office/drawing/2014/main" id="{A8281840-E213-3E86-E054-A5D8D0EDE14B}"/>
-            </a:ext>
-          </a:extLst>
-        </p:cNvPr>
-        <p:cNvGrpSpPr/>
-        <p:nvPr/>
-      </p:nvGrpSpPr>
-      <p:grpSpPr>
-        <a:xfrm>
-          <a:off x="0" y="0"/>
-          <a:ext cx="0" cy="0"/>
-          <a:chOff x="0" y="0"/>
-          <a:chExt cx="0" cy="0"/>
-        </a:xfrm>
-      </p:grpSpPr>
-      <p:graphicFrame>
-        <p:nvGraphicFramePr>
-          <p:cNvPr id="4" name="Таблица 3">
-            <a:extLst>
-              <a:ext uri="{FF2B5EF4-FFF2-40B4-BE49-F238E27FC236}">
-                <a16:creationId xmlns:a16="http://schemas.microsoft.com/office/drawing/2014/main" id="{25856331-C837-B3BE-411D-AC81FBB981D5}"/>
-              </a:ext>
-            </a:extLst>
-          </p:cNvPr>
-          <p:cNvGraphicFramePr>
-            <a:graphicFrameLocks noGrp="1"/>
-          </p:cNvGraphicFramePr>
-          <p:nvPr>
-            <p:extLst>
-              <p:ext uri="{D42A27DB-BD31-4B8C-83A1-F6EECF244321}">
-                <p14:modId xmlns:p14="http://schemas.microsoft.com/office/powerpoint/2010/main" val="3724326174"/>
-              </p:ext>
-            </p:extLst>
-          </p:nvPr>
-        </p:nvGraphicFramePr>
-        <p:xfrm>
-          <a:off x="366938" y="2088075"/>
-          <a:ext cx="11458122" cy="4155323"/>
-        </p:xfrm>
-        <a:graphic>
-          <a:graphicData uri="http://schemas.openxmlformats.org/drawingml/2006/table">
-            <a:tbl>
-              <a:tblPr firstRow="1" bandRow="1">
-                <a:tableStyleId>{5C22544A-7EE6-4342-B048-85BDC9FD1C3A}</a:tableStyleId>
-              </a:tblPr>
-              <a:tblGrid>
-                <a:gridCol w="2416628">
-                  <a:extLst>
-                    <a:ext uri="{9D8B030D-6E8A-4147-A177-3AD203B41FA5}">
-                      <a16:colId xmlns:a16="http://schemas.microsoft.com/office/drawing/2014/main" val="3992901743"/>
-                    </a:ext>
-                  </a:extLst>
-                </a:gridCol>
-                <a:gridCol w="2253343">
-                  <a:extLst>
-                    <a:ext uri="{9D8B030D-6E8A-4147-A177-3AD203B41FA5}">
-                      <a16:colId xmlns:a16="http://schemas.microsoft.com/office/drawing/2014/main" val="2121142170"/>
-                    </a:ext>
-                  </a:extLst>
-                </a:gridCol>
-                <a:gridCol w="1959429">
-                  <a:extLst>
-                    <a:ext uri="{9D8B030D-6E8A-4147-A177-3AD203B41FA5}">
-                      <a16:colId xmlns:a16="http://schemas.microsoft.com/office/drawing/2014/main" val="532106785"/>
-                    </a:ext>
-                  </a:extLst>
-                </a:gridCol>
-                <a:gridCol w="2057400">
-                  <a:extLst>
-                    <a:ext uri="{9D8B030D-6E8A-4147-A177-3AD203B41FA5}">
-                      <a16:colId xmlns:a16="http://schemas.microsoft.com/office/drawing/2014/main" val="1489420291"/>
-                    </a:ext>
-                  </a:extLst>
-                </a:gridCol>
-                <a:gridCol w="2771322">
-                  <a:extLst>
-                    <a:ext uri="{9D8B030D-6E8A-4147-A177-3AD203B41FA5}">
-                      <a16:colId xmlns:a16="http://schemas.microsoft.com/office/drawing/2014/main" val="1612559850"/>
-                    </a:ext>
-                  </a:extLst>
-                </a:gridCol>
-              </a:tblGrid>
-              <a:tr h="1132115">
-                <a:tc>
-                  <a:txBody>
-                    <a:bodyPr/>
-                    <a:lstStyle/>
-                    <a:p>
-                      <a:pPr algn="ctr"/>
-                      <a:r>
-                        <a:rPr lang="ru-RU" dirty="0"/>
-                        <a:t>Технологии</a:t>
-                      </a:r>
-                    </a:p>
-                  </a:txBody>
-                  <a:tcPr anchor="ctr"/>
-                </a:tc>
-                <a:tc>
-                  <a:txBody>
-                    <a:bodyPr/>
-                    <a:lstStyle/>
-                    <a:p>
-                      <a:pPr algn="ctr"/>
-                      <a:r>
-                        <a:rPr lang="ru-RU" dirty="0"/>
-                        <a:t>Стоимость оборудования</a:t>
-                      </a:r>
-                    </a:p>
-                  </a:txBody>
-                  <a:tcPr anchor="ctr"/>
-                </a:tc>
-                <a:tc>
-                  <a:txBody>
-                    <a:bodyPr/>
-                    <a:lstStyle/>
-                    <a:p>
-                      <a:pPr algn="ctr"/>
-                      <a:r>
-                        <a:rPr lang="ru-RU" dirty="0"/>
-                        <a:t>Время на один экземпляр</a:t>
-                      </a:r>
-                    </a:p>
-                  </a:txBody>
-                  <a:tcPr anchor="ctr"/>
-                </a:tc>
-                <a:tc>
-                  <a:txBody>
-                    <a:bodyPr/>
-                    <a:lstStyle/>
-                    <a:p>
-                      <a:pPr marL="0" marR="0" lvl="0" indent="0" algn="ctr" defTabSz="914400" rtl="0" eaLnBrk="1" fontAlgn="auto" latinLnBrk="0" hangingPunct="1">
-                        <a:lnSpc>
-                          <a:spcPct val="100000"/>
-                        </a:lnSpc>
-                        <a:spcBef>
-                          <a:spcPts val="0"/>
-                        </a:spcBef>
-                        <a:spcAft>
-                          <a:spcPts val="0"/>
-                        </a:spcAft>
-                        <a:buClrTx/>
-                        <a:buSzTx/>
-                        <a:buFontTx/>
-                        <a:buNone/>
-                        <a:tabLst/>
-                        <a:defRPr/>
-                      </a:pPr>
-                      <a:r>
-                        <a:rPr lang="ru-RU" dirty="0"/>
-                        <a:t>Качество продукции</a:t>
-                      </a:r>
-                    </a:p>
-                  </a:txBody>
-                  <a:tcPr anchor="ctr"/>
-                </a:tc>
-                <a:tc>
-                  <a:txBody>
-                    <a:bodyPr/>
-                    <a:lstStyle/>
-                    <a:p>
-                      <a:pPr algn="ctr"/>
-                      <a:r>
-                        <a:rPr lang="ru-RU" dirty="0"/>
-                        <a:t>Применение</a:t>
-                      </a:r>
-                    </a:p>
-                  </a:txBody>
-                  <a:tcPr anchor="ctr"/>
-                </a:tc>
-                <a:extLst>
-                  <a:ext uri="{0D108BD9-81ED-4DB2-BD59-A6C34878D82A}">
-                    <a16:rowId xmlns:a16="http://schemas.microsoft.com/office/drawing/2014/main" val="3806889049"/>
-                  </a:ext>
-                </a:extLst>
-              </a:tr>
-              <a:tr h="755802">
-                <a:tc>
-                  <a:txBody>
-                    <a:bodyPr/>
-                    <a:lstStyle/>
-                    <a:p>
-                      <a:pPr marL="0" marR="0" lvl="0" indent="0" algn="ctr" defTabSz="914400" rtl="0" eaLnBrk="1" fontAlgn="auto" latinLnBrk="0" hangingPunct="1">
-                        <a:lnSpc>
-                          <a:spcPct val="100000"/>
-                        </a:lnSpc>
-                        <a:spcBef>
-                          <a:spcPts val="0"/>
-                        </a:spcBef>
-                        <a:spcAft>
-                          <a:spcPts val="0"/>
-                        </a:spcAft>
-                        <a:buClrTx/>
-                        <a:buSzTx/>
-                        <a:buFontTx/>
-                        <a:buNone/>
-                        <a:tabLst/>
-                        <a:defRPr/>
-                      </a:pPr>
-                      <a:r>
-                        <a:rPr lang="ru-RU" dirty="0"/>
-                        <a:t>Ручной монтаж</a:t>
-                      </a:r>
-                    </a:p>
-                  </a:txBody>
-                  <a:tcPr anchor="ctr"/>
-                </a:tc>
-                <a:tc>
-                  <a:txBody>
-                    <a:bodyPr/>
-                    <a:lstStyle/>
-                    <a:p>
-                      <a:pPr algn="ctr"/>
-                      <a:r>
-                        <a:rPr lang="ru-RU" dirty="0"/>
-                        <a:t>Очень низкая</a:t>
-                      </a:r>
-                    </a:p>
-                  </a:txBody>
-                  <a:tcPr anchor="ctr"/>
-                </a:tc>
-                <a:tc>
-                  <a:txBody>
-                    <a:bodyPr/>
-                    <a:lstStyle/>
-                    <a:p>
-                      <a:pPr algn="ctr"/>
-                      <a:r>
-                        <a:rPr lang="ru-RU" dirty="0"/>
-                        <a:t>Долго</a:t>
-                      </a:r>
-                    </a:p>
-                  </a:txBody>
-                  <a:tcPr anchor="ctr"/>
-                </a:tc>
-                <a:tc>
-                  <a:txBody>
-                    <a:bodyPr/>
-                    <a:lstStyle/>
-                    <a:p>
-                      <a:pPr algn="ctr"/>
-                      <a:r>
-                        <a:rPr lang="ru-RU" dirty="0"/>
-                        <a:t>Низкое</a:t>
-                      </a:r>
-                    </a:p>
-                  </a:txBody>
-                  <a:tcPr anchor="ctr"/>
-                </a:tc>
-                <a:tc>
-                  <a:txBody>
-                    <a:bodyPr/>
-                    <a:lstStyle/>
-                    <a:p>
-                      <a:pPr algn="ctr"/>
-                      <a:r>
-                        <a:rPr lang="ru-RU" dirty="0"/>
-                        <a:t>Прототипирование</a:t>
-                      </a:r>
-                    </a:p>
-                  </a:txBody>
-                  <a:tcPr anchor="ctr"/>
-                </a:tc>
-                <a:extLst>
-                  <a:ext uri="{0D108BD9-81ED-4DB2-BD59-A6C34878D82A}">
-                    <a16:rowId xmlns:a16="http://schemas.microsoft.com/office/drawing/2014/main" val="448258795"/>
-                  </a:ext>
-                </a:extLst>
-              </a:tr>
-              <a:tr h="755802">
-                <a:tc>
-                  <a:txBody>
-                    <a:bodyPr/>
-                    <a:lstStyle/>
-                    <a:p>
-                      <a:pPr marL="0" marR="0" lvl="0" indent="0" algn="ctr" defTabSz="914400" rtl="0" eaLnBrk="1" fontAlgn="auto" latinLnBrk="0" hangingPunct="1">
-                        <a:lnSpc>
-                          <a:spcPct val="100000"/>
-                        </a:lnSpc>
-                        <a:spcBef>
-                          <a:spcPts val="0"/>
-                        </a:spcBef>
-                        <a:spcAft>
-                          <a:spcPts val="0"/>
-                        </a:spcAft>
-                        <a:buClrTx/>
-                        <a:buSzTx/>
-                        <a:buFontTx/>
-                        <a:buNone/>
-                        <a:tabLst/>
-                        <a:defRPr/>
-                      </a:pPr>
-                      <a:r>
-                        <a:rPr lang="ru-RU" dirty="0"/>
-                        <a:t>+ Трафарет</a:t>
-                      </a:r>
-                    </a:p>
-                  </a:txBody>
-                  <a:tcPr anchor="ctr"/>
-                </a:tc>
-                <a:tc>
-                  <a:txBody>
-                    <a:bodyPr/>
-                    <a:lstStyle/>
-                    <a:p>
-                      <a:pPr algn="ctr"/>
-                      <a:r>
-                        <a:rPr lang="ru-RU" dirty="0"/>
-                        <a:t>Низкая</a:t>
-                      </a:r>
-                    </a:p>
-                  </a:txBody>
-                  <a:tcPr anchor="ctr"/>
-                </a:tc>
-                <a:tc>
-                  <a:txBody>
-                    <a:bodyPr/>
-                    <a:lstStyle/>
-                    <a:p>
-                      <a:pPr algn="ctr"/>
-                      <a:r>
-                        <a:rPr lang="ru-RU" dirty="0"/>
-                        <a:t>Средне</a:t>
-                      </a:r>
-                    </a:p>
-                  </a:txBody>
-                  <a:tcPr anchor="ctr"/>
-                </a:tc>
-                <a:tc>
-                  <a:txBody>
-                    <a:bodyPr/>
-                    <a:lstStyle/>
-                    <a:p>
-                      <a:pPr algn="ctr"/>
-                      <a:r>
-                        <a:rPr lang="ru-RU" dirty="0"/>
-                        <a:t>Среднее</a:t>
-                      </a:r>
-                    </a:p>
-                  </a:txBody>
-                  <a:tcPr anchor="ctr"/>
-                </a:tc>
-                <a:tc>
-                  <a:txBody>
-                    <a:bodyPr/>
-                    <a:lstStyle/>
-                    <a:p>
-                      <a:pPr algn="ctr"/>
-                      <a:r>
-                        <a:rPr lang="ru-RU" dirty="0"/>
-                        <a:t>Мелкое производство</a:t>
-                      </a:r>
-                    </a:p>
-                  </a:txBody>
-                  <a:tcPr anchor="ctr"/>
-                </a:tc>
-                <a:extLst>
-                  <a:ext uri="{0D108BD9-81ED-4DB2-BD59-A6C34878D82A}">
-                    <a16:rowId xmlns:a16="http://schemas.microsoft.com/office/drawing/2014/main" val="549093758"/>
-                  </a:ext>
-                </a:extLst>
-              </a:tr>
-              <a:tr h="755802">
-                <a:tc>
-                  <a:txBody>
-                    <a:bodyPr/>
-                    <a:lstStyle/>
-                    <a:p>
-                      <a:pPr marL="0" marR="0" lvl="0" indent="0" algn="ctr" defTabSz="914400" rtl="0" eaLnBrk="1" fontAlgn="auto" latinLnBrk="0" hangingPunct="1">
-                        <a:lnSpc>
-                          <a:spcPct val="100000"/>
-                        </a:lnSpc>
-                        <a:spcBef>
-                          <a:spcPts val="0"/>
-                        </a:spcBef>
-                        <a:spcAft>
-                          <a:spcPts val="0"/>
-                        </a:spcAft>
-                        <a:buClrTx/>
-                        <a:buSzTx/>
-                        <a:buFontTx/>
-                        <a:buNone/>
-                        <a:tabLst/>
-                        <a:defRPr/>
-                      </a:pPr>
-                      <a:r>
-                        <a:rPr lang="ru-RU" dirty="0"/>
-                        <a:t>+ Печь/Ванна</a:t>
-                      </a:r>
-                    </a:p>
-                  </a:txBody>
-                  <a:tcPr anchor="ctr"/>
-                </a:tc>
-                <a:tc>
-                  <a:txBody>
-                    <a:bodyPr/>
-                    <a:lstStyle/>
-                    <a:p>
-                      <a:pPr algn="ctr"/>
-                      <a:r>
-                        <a:rPr lang="ru-RU" dirty="0"/>
-                        <a:t>Средняя</a:t>
-                      </a:r>
-                    </a:p>
-                  </a:txBody>
-                  <a:tcPr anchor="ctr"/>
-                </a:tc>
-                <a:tc>
-                  <a:txBody>
-                    <a:bodyPr/>
-                    <a:lstStyle/>
-                    <a:p>
-                      <a:pPr algn="ctr"/>
-                      <a:r>
-                        <a:rPr lang="ru-RU" dirty="0"/>
-                        <a:t>Средне</a:t>
-                      </a:r>
-                    </a:p>
-                  </a:txBody>
-                  <a:tcPr anchor="ctr"/>
-                </a:tc>
-                <a:tc>
-                  <a:txBody>
-                    <a:bodyPr/>
-                    <a:lstStyle/>
-                    <a:p>
-                      <a:pPr algn="ctr"/>
-                      <a:r>
-                        <a:rPr lang="ru-RU" dirty="0"/>
-                        <a:t>Высокое</a:t>
-                      </a:r>
-                    </a:p>
-                  </a:txBody>
-                  <a:tcPr anchor="ctr"/>
-                </a:tc>
-                <a:tc>
-                  <a:txBody>
-                    <a:bodyPr/>
-                    <a:lstStyle/>
-                    <a:p>
-                      <a:pPr algn="ctr"/>
-                      <a:r>
-                        <a:rPr lang="ru-RU" dirty="0"/>
-                        <a:t>Среднее производство</a:t>
-                      </a:r>
-                    </a:p>
-                  </a:txBody>
-                  <a:tcPr anchor="ctr"/>
-                </a:tc>
-                <a:extLst>
-                  <a:ext uri="{0D108BD9-81ED-4DB2-BD59-A6C34878D82A}">
-                    <a16:rowId xmlns:a16="http://schemas.microsoft.com/office/drawing/2014/main" val="375541728"/>
-                  </a:ext>
-                </a:extLst>
-              </a:tr>
-              <a:tr h="755802">
-                <a:tc>
-                  <a:txBody>
-                    <a:bodyPr/>
-                    <a:lstStyle/>
-                    <a:p>
-                      <a:pPr marL="0" marR="0" lvl="0" indent="0" algn="ctr" defTabSz="914400" rtl="0" eaLnBrk="1" fontAlgn="auto" latinLnBrk="0" hangingPunct="1">
-                        <a:lnSpc>
-                          <a:spcPct val="100000"/>
-                        </a:lnSpc>
-                        <a:spcBef>
-                          <a:spcPts val="0"/>
-                        </a:spcBef>
-                        <a:spcAft>
-                          <a:spcPts val="0"/>
-                        </a:spcAft>
-                        <a:buClrTx/>
-                        <a:buSzTx/>
-                        <a:buFontTx/>
-                        <a:buNone/>
-                        <a:tabLst/>
-                        <a:defRPr/>
-                      </a:pPr>
-                      <a:r>
-                        <a:rPr lang="ru-RU" dirty="0"/>
-                        <a:t>+ Робот-установщик</a:t>
-                      </a:r>
-                    </a:p>
-                  </a:txBody>
-                  <a:tcPr anchor="ctr"/>
-                </a:tc>
-                <a:tc>
-                  <a:txBody>
-                    <a:bodyPr/>
-                    <a:lstStyle/>
-                    <a:p>
-                      <a:pPr algn="ctr"/>
-                      <a:r>
-                        <a:rPr lang="ru-RU" dirty="0"/>
-                        <a:t>Высокая</a:t>
-                      </a:r>
-                    </a:p>
-                  </a:txBody>
-                  <a:tcPr anchor="ctr"/>
-                </a:tc>
-                <a:tc>
-                  <a:txBody>
-                    <a:bodyPr/>
-                    <a:lstStyle/>
-                    <a:p>
-                      <a:pPr algn="ctr"/>
-                      <a:r>
-                        <a:rPr lang="ru-RU" dirty="0"/>
-                        <a:t>Быстро</a:t>
-                      </a:r>
-                    </a:p>
-                  </a:txBody>
-                  <a:tcPr anchor="ctr"/>
-                </a:tc>
-                <a:tc>
-                  <a:txBody>
-                    <a:bodyPr/>
-                    <a:lstStyle/>
-                    <a:p>
-                      <a:pPr algn="ctr"/>
-                      <a:r>
-                        <a:rPr lang="ru-RU" dirty="0"/>
-                        <a:t>Очень высокое</a:t>
-                      </a:r>
-                    </a:p>
-                  </a:txBody>
-                  <a:tcPr anchor="ctr"/>
-                </a:tc>
-                <a:tc>
-                  <a:txBody>
-                    <a:bodyPr/>
-                    <a:lstStyle/>
-                    <a:p>
-                      <a:pPr algn="ctr"/>
-                      <a:r>
-                        <a:rPr lang="ru-RU" dirty="0"/>
-                        <a:t>Массовое производство</a:t>
-                      </a:r>
-                    </a:p>
-                  </a:txBody>
-                  <a:tcPr anchor="ctr"/>
-                </a:tc>
-                <a:extLst>
-                  <a:ext uri="{0D108BD9-81ED-4DB2-BD59-A6C34878D82A}">
-                    <a16:rowId xmlns:a16="http://schemas.microsoft.com/office/drawing/2014/main" val="582446120"/>
-                  </a:ext>
-                </a:extLst>
-              </a:tr>
-            </a:tbl>
-          </a:graphicData>
-        </a:graphic>
-      </p:graphicFrame>
-      <p:sp>
-        <p:nvSpPr>
-          <p:cNvPr id="8" name="Прямоугольник 7">
-            <a:extLst>
-              <a:ext uri="{FF2B5EF4-FFF2-40B4-BE49-F238E27FC236}">
-                <a16:creationId xmlns:a16="http://schemas.microsoft.com/office/drawing/2014/main" id="{7C75F240-27A4-A27E-2F6B-AA3C155B4DA6}"/>
+      <p:sp>
+        <p:nvSpPr>
+          <p:cNvPr id="4" name="Прямоугольник 3">
+            <a:extLst>
+              <a:ext uri="{FF2B5EF4-FFF2-40B4-BE49-F238E27FC236}">
+                <a16:creationId xmlns:a16="http://schemas.microsoft.com/office/drawing/2014/main" id="{979E901E-2944-00C6-6256-CEDCD8AB07C2}"/>
               </a:ext>
             </a:extLst>
           </p:cNvPr>
@@ -4731,7 +4054,7 @@
         <p:spPr>
           <a:xfrm>
             <a:off x="0" y="1"/>
-            <a:ext cx="12191999" cy="1500188"/>
+            <a:ext cx="12192000" cy="1240970"/>
           </a:xfrm>
           <a:prstGeom prst="rect">
             <a:avLst/>
@@ -4773,7 +4096,7 @@
           <p:cNvPr id="3" name="Заголовок 2">
             <a:extLst>
               <a:ext uri="{FF2B5EF4-FFF2-40B4-BE49-F238E27FC236}">
-                <a16:creationId xmlns:a16="http://schemas.microsoft.com/office/drawing/2014/main" id="{68FE16F8-641B-42A0-3F78-8F94210CA3F0}"/>
+                <a16:creationId xmlns:a16="http://schemas.microsoft.com/office/drawing/2014/main" id="{6F9B8EF3-D646-261B-A4A3-EC93686A3138}"/>
               </a:ext>
             </a:extLst>
           </p:cNvPr>
@@ -4786,8 +4109,260 @@
         </p:nvSpPr>
         <p:spPr>
           <a:xfrm>
-            <a:off x="527049" y="587887"/>
-            <a:ext cx="11458122" cy="912302"/>
+            <a:off x="519477" y="380263"/>
+            <a:ext cx="11095580" cy="1424696"/>
+          </a:xfrm>
+        </p:spPr>
+        <p:txBody>
+          <a:bodyPr anchor="t">
+            <a:noAutofit/>
+          </a:bodyPr>
+          <a:lstStyle/>
+          <a:p>
+            <a:pPr>
+              <a:lnSpc>
+                <a:spcPct val="100000"/>
+              </a:lnSpc>
+            </a:pPr>
+            <a:r>
+              <a:rPr lang="ru-RU" sz="5000" dirty="0">
+                <a:solidFill>
+                  <a:schemeClr val="bg1"/>
+                </a:solidFill>
+              </a:rPr>
+              <a:t>Расчет МКЭ корпуса дифференциала</a:t>
+            </a:r>
+            <a:endParaRPr lang="ru-RU" sz="5000" dirty="0">
+              <a:solidFill>
+                <a:srgbClr val="006CDC"/>
+              </a:solidFill>
+            </a:endParaRPr>
+          </a:p>
+        </p:txBody>
+      </p:sp>
+      <p:sp>
+        <p:nvSpPr>
+          <p:cNvPr id="16" name="TextBox 15">
+            <a:extLst>
+              <a:ext uri="{FF2B5EF4-FFF2-40B4-BE49-F238E27FC236}">
+                <a16:creationId xmlns:a16="http://schemas.microsoft.com/office/drawing/2014/main" id="{1DE7BF54-D02F-E398-D290-2F92529C90E2}"/>
+              </a:ext>
+            </a:extLst>
+          </p:cNvPr>
+          <p:cNvSpPr txBox="1"/>
+          <p:nvPr/>
+        </p:nvSpPr>
+        <p:spPr>
+          <a:xfrm>
+            <a:off x="874039" y="5615963"/>
+            <a:ext cx="3052439" cy="861774"/>
+          </a:xfrm>
+          <a:prstGeom prst="rect">
+            <a:avLst/>
+          </a:prstGeom>
+          <a:noFill/>
+        </p:spPr>
+        <p:txBody>
+          <a:bodyPr wrap="none" rtlCol="0">
+            <a:spAutoFit/>
+          </a:bodyPr>
+          <a:lstStyle/>
+          <a:p>
+            <a:pPr algn="ctr"/>
+            <a:r>
+              <a:rPr lang="ru-RU" sz="2500" dirty="0"/>
+              <a:t>Установка</a:t>
+            </a:r>
+          </a:p>
+          <a:p>
+            <a:pPr algn="ctr"/>
+            <a:r>
+              <a:rPr lang="ru-RU" sz="2500" dirty="0"/>
+              <a:t>граничных условий</a:t>
+            </a:r>
+          </a:p>
+        </p:txBody>
+      </p:sp>
+      <p:sp>
+        <p:nvSpPr>
+          <p:cNvPr id="13" name="TextBox 12">
+            <a:extLst>
+              <a:ext uri="{FF2B5EF4-FFF2-40B4-BE49-F238E27FC236}">
+                <a16:creationId xmlns:a16="http://schemas.microsoft.com/office/drawing/2014/main" id="{9B7044CA-8B25-FCE5-1898-8FFE6CB06337}"/>
+              </a:ext>
+            </a:extLst>
+          </p:cNvPr>
+          <p:cNvSpPr txBox="1"/>
+          <p:nvPr/>
+        </p:nvSpPr>
+        <p:spPr>
+          <a:xfrm>
+            <a:off x="5566476" y="5808323"/>
+            <a:ext cx="5418086" cy="477054"/>
+          </a:xfrm>
+          <a:prstGeom prst="rect">
+            <a:avLst/>
+          </a:prstGeom>
+          <a:noFill/>
+        </p:spPr>
+        <p:txBody>
+          <a:bodyPr wrap="none" rtlCol="0">
+            <a:spAutoFit/>
+          </a:bodyPr>
+          <a:lstStyle/>
+          <a:p>
+            <a:pPr algn="ctr"/>
+            <a:r>
+              <a:rPr lang="ru-RU" sz="2500" dirty="0"/>
+              <a:t>Эпюры напряжений и деформации</a:t>
+            </a:r>
+          </a:p>
+        </p:txBody>
+      </p:sp>
+      <p:pic>
+        <p:nvPicPr>
+          <p:cNvPr id="5" name="Рисунок 4">
+            <a:extLst>
+              <a:ext uri="{FF2B5EF4-FFF2-40B4-BE49-F238E27FC236}">
+                <a16:creationId xmlns:a16="http://schemas.microsoft.com/office/drawing/2014/main" id="{F25D1F3E-4041-1662-FB58-F49661A7E799}"/>
+              </a:ext>
+            </a:extLst>
+          </p:cNvPr>
+          <p:cNvPicPr>
+            <a:picLocks noChangeAspect="1"/>
+          </p:cNvPicPr>
+          <p:nvPr/>
+        </p:nvPicPr>
+        <p:blipFill>
+          <a:blip r:embed="rId3"/>
+          <a:srcRect r="2032"/>
+          <a:stretch>
+            <a:fillRect/>
+          </a:stretch>
+        </p:blipFill>
+        <p:spPr>
+          <a:xfrm>
+            <a:off x="244080" y="2180899"/>
+            <a:ext cx="4312358" cy="3059124"/>
+          </a:xfrm>
+          <a:prstGeom prst="rect">
+            <a:avLst/>
+          </a:prstGeom>
+        </p:spPr>
+      </p:pic>
+    </p:spTree>
+    <p:extLst>
+      <p:ext uri="{BB962C8B-B14F-4D97-AF65-F5344CB8AC3E}">
+        <p14:creationId xmlns:p14="http://schemas.microsoft.com/office/powerpoint/2010/main" val="1259732582"/>
+      </p:ext>
+    </p:extLst>
+  </p:cSld>
+  <p:clrMapOvr>
+    <a:masterClrMapping/>
+  </p:clrMapOvr>
+</p:sld>
+</file>
+
+<file path=ppt/slides/slide11.xml><?xml version="1.0" encoding="utf-8"?>
+<p:sld xmlns:a="http://schemas.openxmlformats.org/drawingml/2006/main" xmlns:r="http://schemas.openxmlformats.org/officeDocument/2006/relationships" xmlns:p="http://schemas.openxmlformats.org/presentationml/2006/main">
+  <p:cSld>
+    <p:bg>
+      <p:bgPr>
+        <a:solidFill>
+          <a:srgbClr val="006CDC"/>
+        </a:solidFill>
+        <a:effectLst/>
+      </p:bgPr>
+    </p:bg>
+    <p:spTree>
+      <p:nvGrpSpPr>
+        <p:cNvPr id="1" name="">
+          <a:extLst>
+            <a:ext uri="{FF2B5EF4-FFF2-40B4-BE49-F238E27FC236}">
+              <a16:creationId xmlns:a16="http://schemas.microsoft.com/office/drawing/2014/main" id="{0263C3A7-8952-8DBA-B83B-0FD9927F61B9}"/>
+            </a:ext>
+          </a:extLst>
+        </p:cNvPr>
+        <p:cNvGrpSpPr/>
+        <p:nvPr/>
+      </p:nvGrpSpPr>
+      <p:grpSpPr>
+        <a:xfrm>
+          <a:off x="0" y="0"/>
+          <a:ext cx="0" cy="0"/>
+          <a:chOff x="0" y="0"/>
+          <a:chExt cx="0" cy="0"/>
+        </a:xfrm>
+      </p:grpSpPr>
+      <p:pic>
+        <p:nvPicPr>
+          <p:cNvPr id="1026" name="Picture 2" descr="Picture background">
+            <a:extLst>
+              <a:ext uri="{FF2B5EF4-FFF2-40B4-BE49-F238E27FC236}">
+                <a16:creationId xmlns:a16="http://schemas.microsoft.com/office/drawing/2014/main" id="{92EBC7C7-B43F-20BD-0D92-463D1164F269}"/>
+              </a:ext>
+            </a:extLst>
+          </p:cNvPr>
+          <p:cNvPicPr>
+            <a:picLocks noChangeAspect="1" noChangeArrowheads="1"/>
+          </p:cNvPicPr>
+          <p:nvPr/>
+        </p:nvPicPr>
+        <p:blipFill>
+          <a:blip r:embed="rId2">
+            <a:lum bright="70000" contrast="-70000"/>
+            <a:alphaModFix amt="50000"/>
+            <a:extLst>
+              <a:ext uri="{28A0092B-C50C-407E-A947-70E740481C1C}">
+                <a14:useLocalDpi xmlns:a14="http://schemas.microsoft.com/office/drawing/2010/main" val="0"/>
+              </a:ext>
+            </a:extLst>
+          </a:blip>
+          <a:srcRect/>
+          <a:stretch>
+            <a:fillRect/>
+          </a:stretch>
+        </p:blipFill>
+        <p:spPr bwMode="auto">
+          <a:xfrm>
+            <a:off x="8164287" y="2369136"/>
+            <a:ext cx="5246913" cy="5246913"/>
+          </a:xfrm>
+          <a:prstGeom prst="rect">
+            <a:avLst/>
+          </a:prstGeom>
+          <a:noFill/>
+          <a:extLst>
+            <a:ext uri="{909E8E84-426E-40DD-AFC4-6F175D3DCCD1}">
+              <a14:hiddenFill xmlns:a14="http://schemas.microsoft.com/office/drawing/2010/main">
+                <a:solidFill>
+                  <a:srgbClr val="FFFFFF"/>
+                </a:solidFill>
+              </a14:hiddenFill>
+            </a:ext>
+          </a:extLst>
+        </p:spPr>
+      </p:pic>
+      <p:sp>
+        <p:nvSpPr>
+          <p:cNvPr id="2" name="Заголовок 1">
+            <a:extLst>
+              <a:ext uri="{FF2B5EF4-FFF2-40B4-BE49-F238E27FC236}">
+                <a16:creationId xmlns:a16="http://schemas.microsoft.com/office/drawing/2014/main" id="{297886D9-893B-FB6F-63E9-F4CC04C52787}"/>
+              </a:ext>
+            </a:extLst>
+          </p:cNvPr>
+          <p:cNvSpPr>
+            <a:spLocks noGrp="1"/>
+          </p:cNvSpPr>
+          <p:nvPr>
+            <p:ph type="ctrTitle"/>
+          </p:nvPr>
+        </p:nvSpPr>
+        <p:spPr>
+          <a:xfrm>
+            <a:off x="463432" y="1404257"/>
+            <a:ext cx="9241971" cy="2226431"/>
           </a:xfrm>
         </p:spPr>
         <p:txBody>
@@ -4796,14 +4371,14 @@
           </a:bodyPr>
           <a:lstStyle/>
           <a:p>
-            <a:r>
-              <a:rPr lang="ru-RU" dirty="0">
+            <a:pPr algn="l"/>
+            <a:r>
+              <a:rPr lang="ru-RU" sz="5000" b="1" dirty="0">
                 <a:solidFill>
                   <a:schemeClr val="bg1"/>
                 </a:solidFill>
-                <a:latin typeface="+mn-lt"/>
               </a:rPr>
-              <a:t>Сравнение технологий</a:t>
+              <a:t>СПАСИБО ЗА ВНИМАНИЕ!</a:t>
             </a:r>
           </a:p>
         </p:txBody>
@@ -4811,7 +4386,7 @@
     </p:spTree>
     <p:extLst>
       <p:ext uri="{BB962C8B-B14F-4D97-AF65-F5344CB8AC3E}">
-        <p14:creationId xmlns:p14="http://schemas.microsoft.com/office/powerpoint/2010/main" val="695733607"/>
+        <p14:creationId xmlns:p14="http://schemas.microsoft.com/office/powerpoint/2010/main" val="2990436160"/>
       </p:ext>
     </p:extLst>
   </p:cSld>
@@ -4838,12 +4413,72 @@
           <a:chExt cx="0" cy="0"/>
         </a:xfrm>
       </p:grpSpPr>
-      <p:sp>
-        <p:nvSpPr>
-          <p:cNvPr id="8" name="Прямоугольник 7">
-            <a:extLst>
-              <a:ext uri="{FF2B5EF4-FFF2-40B4-BE49-F238E27FC236}">
-                <a16:creationId xmlns:a16="http://schemas.microsoft.com/office/drawing/2014/main" id="{56C37A99-8E1F-67E2-F9D9-C769B11DAE93}"/>
+      <p:pic>
+        <p:nvPicPr>
+          <p:cNvPr id="5" name="Рисунок 4">
+            <a:extLst>
+              <a:ext uri="{FF2B5EF4-FFF2-40B4-BE49-F238E27FC236}">
+                <a16:creationId xmlns:a16="http://schemas.microsoft.com/office/drawing/2014/main" id="{50D93DC2-E224-FA15-A103-A953D62CEF9E}"/>
+              </a:ext>
+            </a:extLst>
+          </p:cNvPr>
+          <p:cNvPicPr>
+            <a:picLocks noChangeAspect="1"/>
+          </p:cNvPicPr>
+          <p:nvPr/>
+        </p:nvPicPr>
+        <p:blipFill>
+          <a:blip r:embed="rId2"/>
+          <a:stretch>
+            <a:fillRect/>
+          </a:stretch>
+        </p:blipFill>
+        <p:spPr>
+          <a:xfrm>
+            <a:off x="7624717" y="1969343"/>
+            <a:ext cx="3191320" cy="3943900"/>
+          </a:xfrm>
+          <a:prstGeom prst="rect">
+            <a:avLst/>
+          </a:prstGeom>
+        </p:spPr>
+      </p:pic>
+      <p:pic>
+        <p:nvPicPr>
+          <p:cNvPr id="7" name="Рисунок 6">
+            <a:extLst>
+              <a:ext uri="{FF2B5EF4-FFF2-40B4-BE49-F238E27FC236}">
+                <a16:creationId xmlns:a16="http://schemas.microsoft.com/office/drawing/2014/main" id="{826A20C0-32B5-65AF-1154-557DE024AA7F}"/>
+              </a:ext>
+            </a:extLst>
+          </p:cNvPr>
+          <p:cNvPicPr>
+            <a:picLocks noChangeAspect="1"/>
+          </p:cNvPicPr>
+          <p:nvPr/>
+        </p:nvPicPr>
+        <p:blipFill>
+          <a:blip r:embed="rId3"/>
+          <a:stretch>
+            <a:fillRect/>
+          </a:stretch>
+        </p:blipFill>
+        <p:spPr>
+          <a:xfrm>
+            <a:off x="1362670" y="2289921"/>
+            <a:ext cx="4327521" cy="3787706"/>
+          </a:xfrm>
+          <a:prstGeom prst="rect">
+            <a:avLst/>
+          </a:prstGeom>
+        </p:spPr>
+      </p:pic>
+      <p:sp>
+        <p:nvSpPr>
+          <p:cNvPr id="4" name="Прямоугольник 3">
+            <a:extLst>
+              <a:ext uri="{FF2B5EF4-FFF2-40B4-BE49-F238E27FC236}">
+                <a16:creationId xmlns:a16="http://schemas.microsoft.com/office/drawing/2014/main" id="{F0DA9DD9-A5D6-097A-5E8E-F09EF29B4AC5}"/>
               </a:ext>
             </a:extLst>
           </p:cNvPr>
@@ -4853,7 +4488,7 @@
         <p:spPr>
           <a:xfrm>
             <a:off x="0" y="1"/>
-            <a:ext cx="12191999" cy="1500188"/>
+            <a:ext cx="12192000" cy="1240970"/>
           </a:xfrm>
           <a:prstGeom prst="rect">
             <a:avLst/>
@@ -4908,32 +4543,43 @@
         </p:nvSpPr>
         <p:spPr>
           <a:xfrm>
-            <a:off x="527050" y="587887"/>
-            <a:ext cx="10515600" cy="1824604"/>
-          </a:xfrm>
-        </p:spPr>
-        <p:txBody>
-          <a:bodyPr/>
-          <a:lstStyle/>
-          <a:p>
-            <a:r>
-              <a:rPr lang="ru-RU" dirty="0">
+            <a:off x="519477" y="380263"/>
+            <a:ext cx="10515600" cy="1424696"/>
+          </a:xfrm>
+        </p:spPr>
+        <p:txBody>
+          <a:bodyPr anchor="t">
+            <a:noAutofit/>
+          </a:bodyPr>
+          <a:lstStyle/>
+          <a:p>
+            <a:pPr>
+              <a:lnSpc>
+                <a:spcPct val="100000"/>
+              </a:lnSpc>
+            </a:pPr>
+            <a:r>
+              <a:rPr lang="ru-RU" sz="5000" dirty="0">
                 <a:solidFill>
                   <a:schemeClr val="bg1"/>
                 </a:solidFill>
               </a:rPr>
-              <a:t>Типы компонентов</a:t>
+              <a:t>Конструкция главной передачи</a:t>
             </a:r>
             <a:br>
-              <a:rPr lang="ru-RU" dirty="0">
+              <a:rPr lang="ru-RU" sz="5000" dirty="0">
                 <a:solidFill>
                   <a:schemeClr val="bg1"/>
                 </a:solidFill>
               </a:rPr>
             </a:br>
             <a:r>
-              <a:rPr lang="ru-RU" dirty="0"/>
-              <a:t>на печатных платах</a:t>
+              <a:rPr lang="ru-RU" sz="5000" dirty="0">
+                <a:solidFill>
+                  <a:srgbClr val="006CDC"/>
+                </a:solidFill>
+              </a:rPr>
+              <a:t>зубчатое звено</a:t>
             </a:r>
           </a:p>
         </p:txBody>
@@ -4952,8 +4598,8 @@
         </p:nvSpPr>
         <p:spPr>
           <a:xfrm>
-            <a:off x="527050" y="2615265"/>
-            <a:ext cx="4590937" cy="461665"/>
+            <a:off x="1772953" y="6077627"/>
+            <a:ext cx="2695353" cy="477054"/>
           </a:xfrm>
           <a:prstGeom prst="rect">
             <a:avLst/>
@@ -4966,11 +4612,11 @@
           </a:bodyPr>
           <a:lstStyle/>
           <a:p>
-            <a:r>
-              <a:rPr lang="en-US" sz="2400" dirty="0"/>
-              <a:t>THT (Through-Hole Technology)</a:t>
-            </a:r>
-            <a:endParaRPr lang="ru-RU" sz="2400" dirty="0"/>
+            <a:pPr algn="ctr"/>
+            <a:r>
+              <a:rPr lang="ru-RU" sz="2500" dirty="0"/>
+              <a:t>Цилиндрическое</a:t>
+            </a:r>
           </a:p>
         </p:txBody>
       </p:sp>
@@ -4988,8 +4634,8 @@
         </p:nvSpPr>
         <p:spPr>
           <a:xfrm>
-            <a:off x="6853683" y="2615264"/>
-            <a:ext cx="4188967" cy="461665"/>
+            <a:off x="7783736" y="6081025"/>
+            <a:ext cx="3032301" cy="477054"/>
           </a:xfrm>
           <a:prstGeom prst="rect">
             <a:avLst/>
@@ -4997,113 +4643,19 @@
           <a:noFill/>
         </p:spPr>
         <p:txBody>
-          <a:bodyPr wrap="none" rtlCol="0">
+          <a:bodyPr wrap="square" rtlCol="0">
             <a:spAutoFit/>
           </a:bodyPr>
           <a:lstStyle/>
           <a:p>
-            <a:r>
-              <a:rPr lang="en-US" sz="2400" dirty="0"/>
-              <a:t>SMD (Surface-Mount Device)</a:t>
-            </a:r>
-            <a:endParaRPr lang="ru-RU" sz="2400" dirty="0"/>
-          </a:p>
-        </p:txBody>
-      </p:sp>
-      <p:pic>
-        <p:nvPicPr>
-          <p:cNvPr id="2052" name="Picture 4" descr="Picture background">
-            <a:extLst>
-              <a:ext uri="{FF2B5EF4-FFF2-40B4-BE49-F238E27FC236}">
-                <a16:creationId xmlns:a16="http://schemas.microsoft.com/office/drawing/2014/main" id="{A4B67F7D-8588-EAD4-A646-FDBF56789C24}"/>
-              </a:ext>
-            </a:extLst>
-          </p:cNvPr>
-          <p:cNvPicPr>
-            <a:picLocks noChangeAspect="1" noChangeArrowheads="1"/>
-          </p:cNvPicPr>
-          <p:nvPr/>
-        </p:nvPicPr>
-        <p:blipFill>
-          <a:blip r:embed="rId2">
-            <a:extLst>
-              <a:ext uri="{28A0092B-C50C-407E-A947-70E740481C1C}">
-                <a14:useLocalDpi xmlns:a14="http://schemas.microsoft.com/office/drawing/2010/main" val="0"/>
-              </a:ext>
-            </a:extLst>
-          </a:blip>
-          <a:srcRect/>
-          <a:stretch>
-            <a:fillRect/>
-          </a:stretch>
-        </p:blipFill>
-        <p:spPr bwMode="auto">
-          <a:xfrm>
-            <a:off x="723304" y="3408194"/>
-            <a:ext cx="4198428" cy="3068902"/>
-          </a:xfrm>
-          <a:prstGeom prst="rect">
-            <a:avLst/>
-          </a:prstGeom>
-          <a:noFill/>
-          <a:extLst>
-            <a:ext uri="{909E8E84-426E-40DD-AFC4-6F175D3DCCD1}">
-              <a14:hiddenFill xmlns:a14="http://schemas.microsoft.com/office/drawing/2010/main">
-                <a:solidFill>
-                  <a:srgbClr val="FFFFFF"/>
-                </a:solidFill>
-              </a14:hiddenFill>
-            </a:ext>
-          </a:extLst>
-        </p:spPr>
-      </p:pic>
-      <p:pic>
-        <p:nvPicPr>
-          <p:cNvPr id="2054" name="Picture 6" descr="Picture background">
-            <a:extLst>
-              <a:ext uri="{FF2B5EF4-FFF2-40B4-BE49-F238E27FC236}">
-                <a16:creationId xmlns:a16="http://schemas.microsoft.com/office/drawing/2014/main" id="{F0829D3B-2EA3-BB57-C37F-3C6598FD6B17}"/>
-              </a:ext>
-            </a:extLst>
-          </p:cNvPr>
-          <p:cNvPicPr>
-            <a:picLocks noChangeAspect="1" noChangeArrowheads="1"/>
-          </p:cNvPicPr>
-          <p:nvPr/>
-        </p:nvPicPr>
-        <p:blipFill>
-          <a:blip r:embed="rId3">
-            <a:extLst>
-              <a:ext uri="{28A0092B-C50C-407E-A947-70E740481C1C}">
-                <a14:useLocalDpi xmlns:a14="http://schemas.microsoft.com/office/drawing/2010/main" val="0"/>
-              </a:ext>
-            </a:extLst>
-          </a:blip>
-          <a:srcRect/>
-          <a:stretch>
-            <a:fillRect/>
-          </a:stretch>
-        </p:blipFill>
-        <p:spPr bwMode="auto">
-          <a:xfrm>
-            <a:off x="6702707" y="3581401"/>
-            <a:ext cx="4426934" cy="2800036"/>
-          </a:xfrm>
-          <a:prstGeom prst="rect">
-            <a:avLst/>
-          </a:prstGeom>
-          <a:noFill/>
-          <a:extLst>
-            <a:ext uri="{909E8E84-426E-40DD-AFC4-6F175D3DCCD1}">
-              <a14:hiddenFill xmlns:a14="http://schemas.microsoft.com/office/drawing/2010/main">
-                <a:solidFill>
-                  <a:srgbClr val="FFFFFF"/>
-                </a:solidFill>
-              </a14:hiddenFill>
-            </a:ext>
-          </a:extLst>
-        </p:spPr>
-      </p:pic>
+            <a:pPr algn="ctr"/>
+            <a:r>
+              <a:rPr lang="ru-RU" sz="2500" dirty="0"/>
+              <a:t>Коническое</a:t>
+            </a:r>
+          </a:p>
+        </p:txBody>
+      </p:sp>
     </p:spTree>
     <p:extLst>
       <p:ext uri="{BB962C8B-B14F-4D97-AF65-F5344CB8AC3E}">
@@ -5125,7 +4677,7 @@
         <p:cNvPr id="1" name="">
           <a:extLst>
             <a:ext uri="{FF2B5EF4-FFF2-40B4-BE49-F238E27FC236}">
-              <a16:creationId xmlns:a16="http://schemas.microsoft.com/office/drawing/2014/main" id="{F18D77BD-75CF-85F5-516E-3A08A5356048}"/>
+              <a16:creationId xmlns:a16="http://schemas.microsoft.com/office/drawing/2014/main" id="{1F8196A4-1C37-68E7-C17A-46E8D4694266}"/>
             </a:ext>
           </a:extLst>
         </p:cNvPr>
@@ -5142,10 +4694,10 @@
       </p:grpSpPr>
       <p:sp>
         <p:nvSpPr>
-          <p:cNvPr id="8" name="Прямоугольник 7">
-            <a:extLst>
-              <a:ext uri="{FF2B5EF4-FFF2-40B4-BE49-F238E27FC236}">
-                <a16:creationId xmlns:a16="http://schemas.microsoft.com/office/drawing/2014/main" id="{44D854C4-5BBF-8067-6C08-F9EE88F96A5A}"/>
+          <p:cNvPr id="4" name="Прямоугольник 3">
+            <a:extLst>
+              <a:ext uri="{FF2B5EF4-FFF2-40B4-BE49-F238E27FC236}">
+                <a16:creationId xmlns:a16="http://schemas.microsoft.com/office/drawing/2014/main" id="{4D3E1DE1-8ABE-C684-630B-5C09DC3076B8}"/>
               </a:ext>
             </a:extLst>
           </p:cNvPr>
@@ -5155,7 +4707,7 @@
         <p:spPr>
           <a:xfrm>
             <a:off x="0" y="1"/>
-            <a:ext cx="12192000" cy="1500188"/>
+            <a:ext cx="12192000" cy="1240970"/>
           </a:xfrm>
           <a:prstGeom prst="rect">
             <a:avLst/>
@@ -5197,7 +4749,7 @@
           <p:cNvPr id="3" name="Заголовок 2">
             <a:extLst>
               <a:ext uri="{FF2B5EF4-FFF2-40B4-BE49-F238E27FC236}">
-                <a16:creationId xmlns:a16="http://schemas.microsoft.com/office/drawing/2014/main" id="{BCB1E1FC-2A92-355F-C919-733D01BEE5C1}"/>
+                <a16:creationId xmlns:a16="http://schemas.microsoft.com/office/drawing/2014/main" id="{007CAA73-2E3E-9C12-81AE-98EFEBCBFF33}"/>
               </a:ext>
             </a:extLst>
           </p:cNvPr>
@@ -5210,35 +4762,53 @@
         </p:nvSpPr>
         <p:spPr>
           <a:xfrm>
-            <a:off x="527050" y="587887"/>
-            <a:ext cx="10515600" cy="1824604"/>
-          </a:xfrm>
-        </p:spPr>
-        <p:txBody>
-          <a:bodyPr/>
-          <a:lstStyle/>
-          <a:p>
-            <a:r>
-              <a:rPr lang="ru-RU" dirty="0">
+            <a:off x="519477" y="380263"/>
+            <a:ext cx="10515600" cy="1424696"/>
+          </a:xfrm>
+        </p:spPr>
+        <p:txBody>
+          <a:bodyPr anchor="t">
+            <a:noAutofit/>
+          </a:bodyPr>
+          <a:lstStyle/>
+          <a:p>
+            <a:pPr>
+              <a:lnSpc>
+                <a:spcPct val="100000"/>
+              </a:lnSpc>
+            </a:pPr>
+            <a:r>
+              <a:rPr lang="ru-RU" sz="5000" dirty="0">
                 <a:solidFill>
                   <a:schemeClr val="bg1"/>
                 </a:solidFill>
               </a:rPr>
-              <a:t>Технологический процесс </a:t>
-            </a:r>
-            <a:r>
-              <a:rPr lang="ru-RU" dirty="0"/>
-              <a:t>монтажа печатных плат</a:t>
-            </a:r>
-          </a:p>
-        </p:txBody>
-      </p:sp>
-      <p:sp>
-        <p:nvSpPr>
-          <p:cNvPr id="10" name="TextBox 9">
-            <a:extLst>
-              <a:ext uri="{FF2B5EF4-FFF2-40B4-BE49-F238E27FC236}">
-                <a16:creationId xmlns:a16="http://schemas.microsoft.com/office/drawing/2014/main" id="{2441C77C-E28C-DDD4-8E34-1A03A72DD2DC}"/>
+              <a:t>Конструкция главной передачи</a:t>
+            </a:r>
+            <a:br>
+              <a:rPr lang="ru-RU" sz="5000" dirty="0">
+                <a:solidFill>
+                  <a:schemeClr val="bg1"/>
+                </a:solidFill>
+              </a:rPr>
+            </a:br>
+            <a:r>
+              <a:rPr lang="ru-RU" sz="5000" dirty="0">
+                <a:solidFill>
+                  <a:srgbClr val="006CDC"/>
+                </a:solidFill>
+              </a:rPr>
+              <a:t>сателлиты</a:t>
+            </a:r>
+          </a:p>
+        </p:txBody>
+      </p:sp>
+      <p:sp>
+        <p:nvSpPr>
+          <p:cNvPr id="9" name="TextBox 8">
+            <a:extLst>
+              <a:ext uri="{FF2B5EF4-FFF2-40B4-BE49-F238E27FC236}">
+                <a16:creationId xmlns:a16="http://schemas.microsoft.com/office/drawing/2014/main" id="{1B513D5E-9046-55DB-0FE5-1FC8D904CF04}"/>
               </a:ext>
             </a:extLst>
           </p:cNvPr>
@@ -5247,8 +4817,8 @@
         </p:nvSpPr>
         <p:spPr>
           <a:xfrm>
-            <a:off x="527050" y="3000377"/>
-            <a:ext cx="11426846" cy="3046988"/>
+            <a:off x="978850" y="5798525"/>
+            <a:ext cx="2693366" cy="477054"/>
           </a:xfrm>
           <a:prstGeom prst="rect">
             <a:avLst/>
@@ -5261,70 +4831,172 @@
           </a:bodyPr>
           <a:lstStyle/>
           <a:p>
-            <a:pPr>
-              <a:lnSpc>
-                <a:spcPct val="150000"/>
-              </a:lnSpc>
-            </a:pPr>
-            <a:r>
-              <a:rPr lang="ru-RU" sz="2400" dirty="0"/>
-              <a:t>Состоит из технологических этапов:</a:t>
-            </a:r>
-          </a:p>
-          <a:p>
-            <a:pPr marL="342900" indent="-342900">
-              <a:lnSpc>
-                <a:spcPct val="150000"/>
-              </a:lnSpc>
-              <a:buFont typeface="Wingdings" panose="05000000000000000000" pitchFamily="2" charset="2"/>
-              <a:buChar char="ü"/>
-            </a:pPr>
-            <a:r>
-              <a:rPr lang="ru-RU" sz="2400" dirty="0"/>
-              <a:t>Нанесение припоя на площадки (для </a:t>
-            </a:r>
-            <a:r>
-              <a:rPr lang="en-US" sz="2400" dirty="0"/>
-              <a:t>SMD</a:t>
-            </a:r>
-            <a:r>
-              <a:rPr lang="ru-RU" sz="2400" dirty="0"/>
-              <a:t>)</a:t>
-            </a:r>
-          </a:p>
-          <a:p>
-            <a:pPr marL="342900" indent="-342900">
-              <a:lnSpc>
-                <a:spcPct val="150000"/>
-              </a:lnSpc>
-              <a:buFont typeface="Wingdings" panose="05000000000000000000" pitchFamily="2" charset="2"/>
-              <a:buChar char="ü"/>
-            </a:pPr>
-            <a:r>
-              <a:rPr lang="ru-RU" sz="2400" dirty="0"/>
-              <a:t>Установка компонентов</a:t>
-            </a:r>
-          </a:p>
-          <a:p>
-            <a:pPr marL="342900" indent="-342900">
-              <a:lnSpc>
-                <a:spcPct val="150000"/>
-              </a:lnSpc>
-              <a:buFont typeface="Wingdings" panose="05000000000000000000" pitchFamily="2" charset="2"/>
-              <a:buChar char="ü"/>
-            </a:pPr>
-            <a:r>
-              <a:rPr lang="ru-RU" sz="2400" dirty="0"/>
-              <a:t>Сплавление соединения</a:t>
-            </a:r>
-          </a:p>
-          <a:p>
-            <a:endParaRPr lang="ru-RU" sz="2400" dirty="0"/>
-          </a:p>
-          <a:p>
-            <a:r>
-              <a:rPr lang="ru-RU" sz="2400" dirty="0"/>
-              <a:t>От уровня автоматизации и типа компонентов различают технологии монтажа</a:t>
+            <a:pPr algn="ctr"/>
+            <a:r>
+              <a:rPr lang="ru-RU" sz="2500" dirty="0"/>
+              <a:t>Цилиндрические</a:t>
+            </a:r>
+          </a:p>
+        </p:txBody>
+      </p:sp>
+      <p:sp>
+        <p:nvSpPr>
+          <p:cNvPr id="10" name="TextBox 9">
+            <a:extLst>
+              <a:ext uri="{FF2B5EF4-FFF2-40B4-BE49-F238E27FC236}">
+                <a16:creationId xmlns:a16="http://schemas.microsoft.com/office/drawing/2014/main" id="{252DC70F-3D13-2D8A-D5D4-F1E269CC6D16}"/>
+              </a:ext>
+            </a:extLst>
+          </p:cNvPr>
+          <p:cNvSpPr txBox="1"/>
+          <p:nvPr/>
+        </p:nvSpPr>
+        <p:spPr>
+          <a:xfrm>
+            <a:off x="4579848" y="5798525"/>
+            <a:ext cx="3032301" cy="477054"/>
+          </a:xfrm>
+          <a:prstGeom prst="rect">
+            <a:avLst/>
+          </a:prstGeom>
+          <a:noFill/>
+        </p:spPr>
+        <p:txBody>
+          <a:bodyPr wrap="square" rtlCol="0">
+            <a:spAutoFit/>
+          </a:bodyPr>
+          <a:lstStyle/>
+          <a:p>
+            <a:pPr algn="ctr"/>
+            <a:r>
+              <a:rPr lang="ru-RU" sz="2500" dirty="0"/>
+              <a:t>Конические</a:t>
+            </a:r>
+          </a:p>
+        </p:txBody>
+      </p:sp>
+      <p:pic>
+        <p:nvPicPr>
+          <p:cNvPr id="11" name="Рисунок 10">
+            <a:extLst>
+              <a:ext uri="{FF2B5EF4-FFF2-40B4-BE49-F238E27FC236}">
+                <a16:creationId xmlns:a16="http://schemas.microsoft.com/office/drawing/2014/main" id="{B49A2C8B-5A42-78F9-2524-787E13F7342C}"/>
+              </a:ext>
+            </a:extLst>
+          </p:cNvPr>
+          <p:cNvPicPr>
+            <a:picLocks noChangeAspect="1"/>
+          </p:cNvPicPr>
+          <p:nvPr/>
+        </p:nvPicPr>
+        <p:blipFill>
+          <a:blip r:embed="rId2"/>
+          <a:stretch>
+            <a:fillRect/>
+          </a:stretch>
+        </p:blipFill>
+        <p:spPr>
+          <a:xfrm>
+            <a:off x="519477" y="2583287"/>
+            <a:ext cx="3339046" cy="2913964"/>
+          </a:xfrm>
+          <a:prstGeom prst="rect">
+            <a:avLst/>
+          </a:prstGeom>
+        </p:spPr>
+      </p:pic>
+      <p:pic>
+        <p:nvPicPr>
+          <p:cNvPr id="13" name="Рисунок 12">
+            <a:extLst>
+              <a:ext uri="{FF2B5EF4-FFF2-40B4-BE49-F238E27FC236}">
+                <a16:creationId xmlns:a16="http://schemas.microsoft.com/office/drawing/2014/main" id="{9A8BCF30-FA08-AD2B-3D64-D97E25B043FA}"/>
+              </a:ext>
+            </a:extLst>
+          </p:cNvPr>
+          <p:cNvPicPr>
+            <a:picLocks noChangeAspect="1"/>
+          </p:cNvPicPr>
+          <p:nvPr/>
+        </p:nvPicPr>
+        <p:blipFill>
+          <a:blip r:embed="rId3"/>
+          <a:stretch>
+            <a:fillRect/>
+          </a:stretch>
+        </p:blipFill>
+        <p:spPr>
+          <a:xfrm>
+            <a:off x="4279667" y="2444516"/>
+            <a:ext cx="3632665" cy="3191506"/>
+          </a:xfrm>
+          <a:prstGeom prst="rect">
+            <a:avLst/>
+          </a:prstGeom>
+        </p:spPr>
+      </p:pic>
+      <p:pic>
+        <p:nvPicPr>
+          <p:cNvPr id="6" name="Рисунок 5">
+            <a:extLst>
+              <a:ext uri="{FF2B5EF4-FFF2-40B4-BE49-F238E27FC236}">
+                <a16:creationId xmlns:a16="http://schemas.microsoft.com/office/drawing/2014/main" id="{B5618EAE-54FF-82D4-EEF5-DEBE4F0A179E}"/>
+              </a:ext>
+            </a:extLst>
+          </p:cNvPr>
+          <p:cNvPicPr>
+            <a:picLocks noChangeAspect="1"/>
+          </p:cNvPicPr>
+          <p:nvPr/>
+        </p:nvPicPr>
+        <p:blipFill>
+          <a:blip r:embed="rId4"/>
+          <a:stretch>
+            <a:fillRect/>
+          </a:stretch>
+        </p:blipFill>
+        <p:spPr>
+          <a:xfrm>
+            <a:off x="8333476" y="2444516"/>
+            <a:ext cx="3144225" cy="3191507"/>
+          </a:xfrm>
+          <a:prstGeom prst="rect">
+            <a:avLst/>
+          </a:prstGeom>
+        </p:spPr>
+      </p:pic>
+      <p:sp>
+        <p:nvSpPr>
+          <p:cNvPr id="2" name="TextBox 1">
+            <a:extLst>
+              <a:ext uri="{FF2B5EF4-FFF2-40B4-BE49-F238E27FC236}">
+                <a16:creationId xmlns:a16="http://schemas.microsoft.com/office/drawing/2014/main" id="{634FE6C3-086E-70B1-4035-9587174E11A1}"/>
+              </a:ext>
+            </a:extLst>
+          </p:cNvPr>
+          <p:cNvSpPr txBox="1"/>
+          <p:nvPr/>
+        </p:nvSpPr>
+        <p:spPr>
+          <a:xfrm>
+            <a:off x="8519781" y="5798525"/>
+            <a:ext cx="3032301" cy="477054"/>
+          </a:xfrm>
+          <a:prstGeom prst="rect">
+            <a:avLst/>
+          </a:prstGeom>
+          <a:noFill/>
+        </p:spPr>
+        <p:txBody>
+          <a:bodyPr wrap="square" rtlCol="0">
+            <a:spAutoFit/>
+          </a:bodyPr>
+          <a:lstStyle/>
+          <a:p>
+            <a:pPr algn="ctr"/>
+            <a:r>
+              <a:rPr lang="ru-RU" sz="2500" dirty="0"/>
+              <a:t>Червячные</a:t>
             </a:r>
           </a:p>
         </p:txBody>
@@ -5332,7 +5004,7 @@
     </p:spTree>
     <p:extLst>
       <p:ext uri="{BB962C8B-B14F-4D97-AF65-F5344CB8AC3E}">
-        <p14:creationId xmlns:p14="http://schemas.microsoft.com/office/powerpoint/2010/main" val="3925251648"/>
+        <p14:creationId xmlns:p14="http://schemas.microsoft.com/office/powerpoint/2010/main" val="4025458612"/>
       </p:ext>
     </p:extLst>
   </p:cSld>
@@ -5350,7 +5022,7 @@
         <p:cNvPr id="1" name="">
           <a:extLst>
             <a:ext uri="{FF2B5EF4-FFF2-40B4-BE49-F238E27FC236}">
-              <a16:creationId xmlns:a16="http://schemas.microsoft.com/office/drawing/2014/main" id="{39BD9B52-C373-D7EC-AB6C-03CF7011BAB3}"/>
+              <a16:creationId xmlns:a16="http://schemas.microsoft.com/office/drawing/2014/main" id="{ADA3217A-D594-F8C8-02C0-128BCE2CD528}"/>
             </a:ext>
           </a:extLst>
         </p:cNvPr>
@@ -5367,10 +5039,10 @@
       </p:grpSpPr>
       <p:sp>
         <p:nvSpPr>
-          <p:cNvPr id="8" name="Прямоугольник 7">
-            <a:extLst>
-              <a:ext uri="{FF2B5EF4-FFF2-40B4-BE49-F238E27FC236}">
-                <a16:creationId xmlns:a16="http://schemas.microsoft.com/office/drawing/2014/main" id="{6095651B-BC42-FEB7-AB7B-2193E0DA297F}"/>
+          <p:cNvPr id="4" name="Прямоугольник 3">
+            <a:extLst>
+              <a:ext uri="{FF2B5EF4-FFF2-40B4-BE49-F238E27FC236}">
+                <a16:creationId xmlns:a16="http://schemas.microsoft.com/office/drawing/2014/main" id="{94ABFABF-F0E8-15AF-5A73-D55E406E4087}"/>
               </a:ext>
             </a:extLst>
           </p:cNvPr>
@@ -5380,7 +5052,7 @@
         <p:spPr>
           <a:xfrm>
             <a:off x="0" y="1"/>
-            <a:ext cx="12191999" cy="1500188"/>
+            <a:ext cx="12192000" cy="1240970"/>
           </a:xfrm>
           <a:prstGeom prst="rect">
             <a:avLst/>
@@ -5422,7 +5094,7 @@
           <p:cNvPr id="3" name="Заголовок 2">
             <a:extLst>
               <a:ext uri="{FF2B5EF4-FFF2-40B4-BE49-F238E27FC236}">
-                <a16:creationId xmlns:a16="http://schemas.microsoft.com/office/drawing/2014/main" id="{0753712C-204C-CFE7-4E78-DBBA65CE9CB7}"/>
+                <a16:creationId xmlns:a16="http://schemas.microsoft.com/office/drawing/2014/main" id="{0236B36E-2B49-F2A3-DE64-BCA02E3B9888}"/>
               </a:ext>
             </a:extLst>
           </p:cNvPr>
@@ -5435,36 +5107,53 @@
         </p:nvSpPr>
         <p:spPr>
           <a:xfrm>
-            <a:off x="527050" y="587887"/>
-            <a:ext cx="10515600" cy="912302"/>
-          </a:xfrm>
-        </p:spPr>
-        <p:txBody>
-          <a:bodyPr>
+            <a:off x="519477" y="380263"/>
+            <a:ext cx="10515600" cy="1424696"/>
+          </a:xfrm>
+        </p:spPr>
+        <p:txBody>
+          <a:bodyPr anchor="t">
             <a:noAutofit/>
           </a:bodyPr>
           <a:lstStyle/>
           <a:p>
-            <a:r>
-              <a:rPr lang="ru-RU" dirty="0">
+            <a:pPr>
+              <a:lnSpc>
+                <a:spcPct val="100000"/>
+              </a:lnSpc>
+            </a:pPr>
+            <a:r>
+              <a:rPr lang="ru-RU" sz="5000" dirty="0">
                 <a:solidFill>
                   <a:schemeClr val="bg1"/>
                 </a:solidFill>
               </a:rPr>
-              <a:t>Ручной монтаж</a:t>
-            </a:r>
-            <a:endParaRPr lang="ru-RU" dirty="0">
-              <a:latin typeface="+mn-lt"/>
-            </a:endParaRPr>
-          </a:p>
-        </p:txBody>
-      </p:sp>
-      <p:sp>
-        <p:nvSpPr>
-          <p:cNvPr id="10" name="TextBox 9">
-            <a:extLst>
-              <a:ext uri="{FF2B5EF4-FFF2-40B4-BE49-F238E27FC236}">
-                <a16:creationId xmlns:a16="http://schemas.microsoft.com/office/drawing/2014/main" id="{8980A7A0-3844-9E0B-6704-ADEF186D2FE7}"/>
+              <a:t>Конструкция главной передачи</a:t>
+            </a:r>
+            <a:br>
+              <a:rPr lang="ru-RU" sz="5000" dirty="0">
+                <a:solidFill>
+                  <a:schemeClr val="bg1"/>
+                </a:solidFill>
+              </a:rPr>
+            </a:br>
+            <a:r>
+              <a:rPr lang="ru-RU" sz="5000" dirty="0">
+                <a:solidFill>
+                  <a:srgbClr val="006CDC"/>
+                </a:solidFill>
+              </a:rPr>
+              <a:t>блокировки дифференциала</a:t>
+            </a:r>
+          </a:p>
+        </p:txBody>
+      </p:sp>
+      <p:sp>
+        <p:nvSpPr>
+          <p:cNvPr id="9" name="TextBox 8">
+            <a:extLst>
+              <a:ext uri="{FF2B5EF4-FFF2-40B4-BE49-F238E27FC236}">
+                <a16:creationId xmlns:a16="http://schemas.microsoft.com/office/drawing/2014/main" id="{D64182F3-72F7-9548-9943-21A20AC5D903}"/>
               </a:ext>
             </a:extLst>
           </p:cNvPr>
@@ -5473,8 +5162,8 @@
         </p:nvSpPr>
         <p:spPr>
           <a:xfrm>
-            <a:off x="527050" y="2088075"/>
-            <a:ext cx="10861500" cy="4154984"/>
+            <a:off x="350539" y="2455416"/>
+            <a:ext cx="3369192" cy="477054"/>
           </a:xfrm>
           <a:prstGeom prst="rect">
             <a:avLst/>
@@ -5487,178 +5176,312 @@
           </a:bodyPr>
           <a:lstStyle/>
           <a:p>
-            <a:pPr marL="342900" indent="-342900">
-              <a:lnSpc>
-                <a:spcPct val="150000"/>
-              </a:lnSpc>
-              <a:buBlip>
-                <a:blip>
-                  <a:extLst>
-                    <a:ext uri="{96DAC541-7B7A-43D3-8B79-37D633B846F1}">
-                      <asvg:svgBlip xmlns:asvg="http://schemas.microsoft.com/office/drawing/2016/SVG/main" r:embed="rId2"/>
-                    </a:ext>
-                  </a:extLst>
-                </a:blip>
-              </a:buBlip>
-            </a:pPr>
-            <a:r>
-              <a:rPr lang="ru-RU" sz="2400" dirty="0"/>
-              <a:t>Установка компонентов</a:t>
-            </a:r>
-            <a:r>
-              <a:rPr lang="en-US" sz="2400" dirty="0"/>
-              <a:t> </a:t>
-            </a:r>
-            <a:r>
-              <a:rPr lang="ru-RU" sz="2400" dirty="0"/>
-              <a:t>(вручную)</a:t>
-            </a:r>
-          </a:p>
-          <a:p>
-            <a:pPr marL="342900" indent="-342900">
-              <a:lnSpc>
-                <a:spcPct val="150000"/>
-              </a:lnSpc>
-              <a:buBlip>
-                <a:blip>
-                  <a:extLst>
-                    <a:ext uri="{96DAC541-7B7A-43D3-8B79-37D633B846F1}">
-                      <asvg:svgBlip xmlns:asvg="http://schemas.microsoft.com/office/drawing/2016/SVG/main" r:embed="rId2"/>
-                    </a:ext>
-                  </a:extLst>
-                </a:blip>
-              </a:buBlip>
-            </a:pPr>
-            <a:r>
-              <a:rPr lang="ru-RU" sz="2400" dirty="0"/>
-              <a:t>Сплавление соединения (вручную)</a:t>
-            </a:r>
-          </a:p>
-          <a:p>
-            <a:endParaRPr lang="ru-RU" sz="2400" dirty="0"/>
-          </a:p>
-          <a:p>
-            <a:r>
-              <a:rPr lang="ru-RU" sz="2400" dirty="0"/>
-              <a:t>Минимальный набор инструментов:</a:t>
-            </a:r>
-            <a:br>
-              <a:rPr lang="ru-RU" sz="2400" dirty="0"/>
-            </a:br>
-            <a:r>
-              <a:rPr lang="ru-RU" sz="2400" dirty="0"/>
-              <a:t>паяльная станция, припой, флюс</a:t>
-            </a:r>
-          </a:p>
-          <a:p>
-            <a:endParaRPr lang="ru-RU" sz="2400" dirty="0"/>
-          </a:p>
-          <a:p>
-            <a:r>
-              <a:rPr lang="ru-RU" sz="2400" dirty="0"/>
-              <a:t>Время работы высокое</a:t>
-            </a:r>
-          </a:p>
-          <a:p>
-            <a:r>
-              <a:rPr lang="ru-RU" sz="2400" dirty="0"/>
-              <a:t>Качество относительно низкое</a:t>
-            </a:r>
-          </a:p>
-          <a:p>
-            <a:endParaRPr lang="ru-RU" sz="2400" dirty="0"/>
-          </a:p>
-          <a:p>
-            <a:r>
-              <a:rPr lang="ru-RU" sz="2400" dirty="0"/>
-              <a:t>Применение: изготовление опытных устройств или ремонт существующих</a:t>
+            <a:pPr algn="ctr"/>
+            <a:r>
+              <a:rPr lang="ru-RU" sz="2500" dirty="0"/>
+              <a:t>Повышенного трения</a:t>
+            </a:r>
+          </a:p>
+        </p:txBody>
+      </p:sp>
+      <p:sp>
+        <p:nvSpPr>
+          <p:cNvPr id="10" name="TextBox 9">
+            <a:extLst>
+              <a:ext uri="{FF2B5EF4-FFF2-40B4-BE49-F238E27FC236}">
+                <a16:creationId xmlns:a16="http://schemas.microsoft.com/office/drawing/2014/main" id="{57DD20CD-3652-C852-1B01-4CF733414AB2}"/>
+              </a:ext>
+            </a:extLst>
+          </p:cNvPr>
+          <p:cNvSpPr txBox="1"/>
+          <p:nvPr/>
+        </p:nvSpPr>
+        <p:spPr>
+          <a:xfrm>
+            <a:off x="2414071" y="6017679"/>
+            <a:ext cx="3369191" cy="477054"/>
+          </a:xfrm>
+          <a:prstGeom prst="rect">
+            <a:avLst/>
+          </a:prstGeom>
+          <a:noFill/>
+        </p:spPr>
+        <p:txBody>
+          <a:bodyPr wrap="square" rtlCol="0">
+            <a:spAutoFit/>
+          </a:bodyPr>
+          <a:lstStyle/>
+          <a:p>
+            <a:pPr algn="ctr"/>
+            <a:r>
+              <a:rPr lang="ru-RU" sz="2500" dirty="0"/>
+              <a:t>Самоблокирующийся</a:t>
+            </a:r>
+          </a:p>
+        </p:txBody>
+      </p:sp>
+      <p:sp>
+        <p:nvSpPr>
+          <p:cNvPr id="2" name="TextBox 1">
+            <a:extLst>
+              <a:ext uri="{FF2B5EF4-FFF2-40B4-BE49-F238E27FC236}">
+                <a16:creationId xmlns:a16="http://schemas.microsoft.com/office/drawing/2014/main" id="{3F60CF28-0287-5DA7-5E8B-8B617F67A1AA}"/>
+              </a:ext>
+            </a:extLst>
+          </p:cNvPr>
+          <p:cNvSpPr txBox="1"/>
+          <p:nvPr/>
+        </p:nvSpPr>
+        <p:spPr>
+          <a:xfrm>
+            <a:off x="4247066" y="2455416"/>
+            <a:ext cx="4082878" cy="477054"/>
+          </a:xfrm>
+          <a:prstGeom prst="rect">
+            <a:avLst/>
+          </a:prstGeom>
+          <a:noFill/>
+        </p:spPr>
+        <p:txBody>
+          <a:bodyPr wrap="square" rtlCol="0">
+            <a:spAutoFit/>
+          </a:bodyPr>
+          <a:lstStyle/>
+          <a:p>
+            <a:pPr algn="ctr"/>
+            <a:r>
+              <a:rPr lang="ru-RU" sz="2500" dirty="0"/>
+              <a:t>Саморазблокирующийся</a:t>
             </a:r>
           </a:p>
         </p:txBody>
       </p:sp>
       <p:pic>
         <p:nvPicPr>
-          <p:cNvPr id="3074" name="Picture 2" descr="Picture background">
-            <a:extLst>
-              <a:ext uri="{FF2B5EF4-FFF2-40B4-BE49-F238E27FC236}">
-                <a16:creationId xmlns:a16="http://schemas.microsoft.com/office/drawing/2014/main" id="{02EAECF7-B6D1-85F9-5EE1-DB203CF25D75}"/>
+          <p:cNvPr id="7" name="Рисунок 6">
+            <a:extLst>
+              <a:ext uri="{FF2B5EF4-FFF2-40B4-BE49-F238E27FC236}">
+                <a16:creationId xmlns:a16="http://schemas.microsoft.com/office/drawing/2014/main" id="{1B464327-1ECC-651D-C8B5-49B64C49836B}"/>
               </a:ext>
             </a:extLst>
           </p:cNvPr>
           <p:cNvPicPr>
-            <a:picLocks noChangeAspect="1" noChangeArrowheads="1"/>
+            <a:picLocks noChangeAspect="1"/>
           </p:cNvPicPr>
           <p:nvPr/>
         </p:nvPicPr>
-        <p:blipFill rotWithShape="1">
-          <a:blip r:embed="rId3">
-            <a:extLst>
-              <a:ext uri="{BEBA8EAE-BF5A-486C-A8C5-ECC9F3942E4B}">
-                <a14:imgProps xmlns:a14="http://schemas.microsoft.com/office/drawing/2010/main">
-                  <a14:imgLayer r:embed="rId4">
-                    <a14:imgEffect>
-                      <a14:backgroundRemoval t="9968" b="93462" l="536" r="99464">
-                        <a14:foregroundMark x1="9562" y1="58521" x2="6792" y2="56806"/>
-                        <a14:foregroundMark x1="70420" y1="88960" x2="68633" y2="93462"/>
-                        <a14:foregroundMark x1="89723" y1="60343" x2="91153" y2="60343"/>
-                        <a14:foregroundMark x1="85433" y1="70632" x2="96962" y2="73312"/>
-                        <a14:foregroundMark x1="78374" y1="73848" x2="98660" y2="79314"/>
-                        <a14:foregroundMark x1="81680" y1="66345" x2="99464" y2="69989"/>
-                        <a14:foregroundMark x1="15282" y1="29153" x2="16243" y2="32553"/>
-                        <a14:foregroundMark x1="18588" y1="44480" x2="17738" y2="42540"/>
-                        <a14:foregroundMark x1="536" y1="93140" x2="34584" y2="77492"/>
-                        <a14:foregroundMark x1="67113" y1="47481" x2="68186" y2="39979"/>
-                        <a14:foregroundMark x1="56836" y1="43837" x2="56122" y2="34834"/>
-                        <a14:foregroundMark x1="47632" y1="27653" x2="47632" y2="40514"/>
-                        <a14:foregroundMark x1="42091" y1="30654" x2="40572" y2="37513"/>
-                        <a14:foregroundMark x1="28329" y1="21972" x2="29848" y2="31511"/>
-                        <a14:foregroundMark x1="25022" y1="21329" x2="23592" y2="36013"/>
-                        <a14:foregroundMark x1="17277" y1="35763" x2="18052" y2="44802"/>
-                        <a14:foregroundMark x1="81680" y1="75134" x2="85702" y2="75991"/>
-                        <a14:foregroundMark x1="78374" y1="77170" x2="86953" y2="76313"/>
-                        <a14:foregroundMark x1="15818" y1="32476" x2="16533" y2="36334"/>
-                        <a14:backgroundMark x1="14835" y1="37835" x2="14835" y2="41158"/>
-                        <a14:backgroundMark x1="15366" y1="40198" x2="15282" y2="42337"/>
-                        <a14:backgroundMark x1="15013" y1="36977" x2="15550" y2="43837"/>
-                      </a14:backgroundRemoval>
-                    </a14:imgEffect>
-                  </a14:imgLayer>
-                </a14:imgProps>
-              </a:ext>
-              <a:ext uri="{28A0092B-C50C-407E-A947-70E740481C1C}">
-                <a14:useLocalDpi xmlns:a14="http://schemas.microsoft.com/office/drawing/2010/main" val="0"/>
-              </a:ext>
-            </a:extLst>
-          </a:blip>
-          <a:srcRect t="16554"/>
+        <p:blipFill>
+          <a:blip r:embed="rId2"/>
           <a:stretch>
             <a:fillRect/>
           </a:stretch>
         </p:blipFill>
-        <p:spPr bwMode="auto">
-          <a:xfrm>
-            <a:off x="6757910" y="1500189"/>
-            <a:ext cx="5434090" cy="3780937"/>
+        <p:spPr>
+          <a:xfrm>
+            <a:off x="1149650" y="3175428"/>
+            <a:ext cx="1505160" cy="1590897"/>
+          </a:xfrm>
+          <a:prstGeom prst="rect">
+            <a:avLst/>
+          </a:prstGeom>
+        </p:spPr>
+      </p:pic>
+      <p:pic>
+        <p:nvPicPr>
+          <p:cNvPr id="12" name="Рисунок 11">
+            <a:extLst>
+              <a:ext uri="{FF2B5EF4-FFF2-40B4-BE49-F238E27FC236}">
+                <a16:creationId xmlns:a16="http://schemas.microsoft.com/office/drawing/2014/main" id="{AF7C7498-5A74-803B-9B6D-38B7246A390C}"/>
+              </a:ext>
+            </a:extLst>
+          </p:cNvPr>
+          <p:cNvPicPr>
+            <a:picLocks noChangeAspect="1"/>
+          </p:cNvPicPr>
+          <p:nvPr/>
+        </p:nvPicPr>
+        <p:blipFill>
+          <a:blip r:embed="rId3"/>
+          <a:stretch>
+            <a:fillRect/>
+          </a:stretch>
+        </p:blipFill>
+        <p:spPr>
+          <a:xfrm>
+            <a:off x="3114214" y="4326180"/>
+            <a:ext cx="1771897" cy="1609950"/>
+          </a:xfrm>
+          <a:prstGeom prst="rect">
+            <a:avLst/>
+          </a:prstGeom>
+        </p:spPr>
+      </p:pic>
+      <p:pic>
+        <p:nvPicPr>
+          <p:cNvPr id="15" name="Рисунок 14">
+            <a:extLst>
+              <a:ext uri="{FF2B5EF4-FFF2-40B4-BE49-F238E27FC236}">
+                <a16:creationId xmlns:a16="http://schemas.microsoft.com/office/drawing/2014/main" id="{C4B15CB6-DB7D-91A2-5B26-60AD5D078730}"/>
+              </a:ext>
+            </a:extLst>
+          </p:cNvPr>
+          <p:cNvPicPr>
+            <a:picLocks noChangeAspect="1"/>
+          </p:cNvPicPr>
+          <p:nvPr/>
+        </p:nvPicPr>
+        <p:blipFill>
+          <a:blip r:embed="rId4"/>
+          <a:stretch>
+            <a:fillRect/>
+          </a:stretch>
+        </p:blipFill>
+        <p:spPr>
+          <a:xfrm>
+            <a:off x="5339571" y="3189886"/>
+            <a:ext cx="1810003" cy="1752845"/>
+          </a:xfrm>
+          <a:prstGeom prst="rect">
+            <a:avLst/>
+          </a:prstGeom>
+        </p:spPr>
+      </p:pic>
+      <p:pic>
+        <p:nvPicPr>
+          <p:cNvPr id="17" name="Рисунок 16">
+            <a:extLst>
+              <a:ext uri="{FF2B5EF4-FFF2-40B4-BE49-F238E27FC236}">
+                <a16:creationId xmlns:a16="http://schemas.microsoft.com/office/drawing/2014/main" id="{3464F3BC-0195-B9E3-388C-FB0F066187A2}"/>
+              </a:ext>
+            </a:extLst>
+          </p:cNvPr>
+          <p:cNvPicPr>
+            <a:picLocks noChangeAspect="1"/>
+          </p:cNvPicPr>
+          <p:nvPr/>
+        </p:nvPicPr>
+        <p:blipFill>
+          <a:blip r:embed="rId5"/>
+          <a:stretch>
+            <a:fillRect/>
+          </a:stretch>
+        </p:blipFill>
+        <p:spPr>
+          <a:xfrm>
+            <a:off x="8068382" y="4131694"/>
+            <a:ext cx="1362265" cy="1771897"/>
+          </a:xfrm>
+          <a:prstGeom prst="rect">
+            <a:avLst/>
+          </a:prstGeom>
+        </p:spPr>
+      </p:pic>
+      <p:pic>
+        <p:nvPicPr>
+          <p:cNvPr id="19" name="Рисунок 18">
+            <a:extLst>
+              <a:ext uri="{FF2B5EF4-FFF2-40B4-BE49-F238E27FC236}">
+                <a16:creationId xmlns:a16="http://schemas.microsoft.com/office/drawing/2014/main" id="{70B019E8-32C6-DBD7-DE04-52E402F1B9D3}"/>
+              </a:ext>
+            </a:extLst>
+          </p:cNvPr>
+          <p:cNvPicPr>
+            <a:picLocks noChangeAspect="1"/>
+          </p:cNvPicPr>
+          <p:nvPr/>
+        </p:nvPicPr>
+        <p:blipFill>
+          <a:blip r:embed="rId6"/>
+          <a:stretch>
+            <a:fillRect/>
+          </a:stretch>
+        </p:blipFill>
+        <p:spPr>
+          <a:xfrm>
+            <a:off x="9953793" y="3051586"/>
+            <a:ext cx="1562318" cy="1838582"/>
+          </a:xfrm>
+          <a:prstGeom prst="rect">
+            <a:avLst/>
+          </a:prstGeom>
+        </p:spPr>
+      </p:pic>
+      <p:sp>
+        <p:nvSpPr>
+          <p:cNvPr id="20" name="TextBox 19">
+            <a:extLst>
+              <a:ext uri="{FF2B5EF4-FFF2-40B4-BE49-F238E27FC236}">
+                <a16:creationId xmlns:a16="http://schemas.microsoft.com/office/drawing/2014/main" id="{07A31097-2F75-FC40-6E82-548CCA510B54}"/>
+              </a:ext>
+            </a:extLst>
+          </p:cNvPr>
+          <p:cNvSpPr txBox="1"/>
+          <p:nvPr/>
+        </p:nvSpPr>
+        <p:spPr>
+          <a:xfrm>
+            <a:off x="7149574" y="6017679"/>
+            <a:ext cx="3199883" cy="477054"/>
           </a:xfrm>
           <a:prstGeom prst="rect">
             <a:avLst/>
           </a:prstGeom>
           <a:noFill/>
-          <a:extLst>
-            <a:ext uri="{909E8E84-426E-40DD-AFC4-6F175D3DCCD1}">
-              <a14:hiddenFill xmlns:a14="http://schemas.microsoft.com/office/drawing/2010/main">
-                <a:solidFill>
-                  <a:srgbClr val="FFFFFF"/>
-                </a:solidFill>
-              </a14:hiddenFill>
-            </a:ext>
-          </a:extLst>
-        </p:spPr>
-      </p:pic>
+        </p:spPr>
+        <p:txBody>
+          <a:bodyPr wrap="square" rtlCol="0">
+            <a:spAutoFit/>
+          </a:bodyPr>
+          <a:lstStyle/>
+          <a:p>
+            <a:pPr algn="ctr"/>
+            <a:r>
+              <a:rPr lang="ru-RU" sz="2500" dirty="0"/>
+              <a:t>Подключаемый</a:t>
+            </a:r>
+          </a:p>
+        </p:txBody>
+      </p:sp>
+      <p:sp>
+        <p:nvSpPr>
+          <p:cNvPr id="21" name="TextBox 20">
+            <a:extLst>
+              <a:ext uri="{FF2B5EF4-FFF2-40B4-BE49-F238E27FC236}">
+                <a16:creationId xmlns:a16="http://schemas.microsoft.com/office/drawing/2014/main" id="{719FC6C9-6C43-C554-3443-8FCF090AE376}"/>
+              </a:ext>
+            </a:extLst>
+          </p:cNvPr>
+          <p:cNvSpPr txBox="1"/>
+          <p:nvPr/>
+        </p:nvSpPr>
+        <p:spPr>
+          <a:xfrm>
+            <a:off x="9851241" y="2455416"/>
+            <a:ext cx="1664870" cy="477054"/>
+          </a:xfrm>
+          <a:prstGeom prst="rect">
+            <a:avLst/>
+          </a:prstGeom>
+          <a:noFill/>
+        </p:spPr>
+        <p:txBody>
+          <a:bodyPr wrap="square" rtlCol="0">
+            <a:spAutoFit/>
+          </a:bodyPr>
+          <a:lstStyle/>
+          <a:p>
+            <a:pPr algn="ctr"/>
+            <a:r>
+              <a:rPr lang="ru-RU" sz="2500" dirty="0"/>
+              <a:t>Муфта</a:t>
+            </a:r>
+          </a:p>
+        </p:txBody>
+      </p:sp>
     </p:spTree>
     <p:extLst>
       <p:ext uri="{BB962C8B-B14F-4D97-AF65-F5344CB8AC3E}">
-        <p14:creationId xmlns:p14="http://schemas.microsoft.com/office/powerpoint/2010/main" val="3264796436"/>
+        <p14:creationId xmlns:p14="http://schemas.microsoft.com/office/powerpoint/2010/main" val="2316345544"/>
       </p:ext>
     </p:extLst>
   </p:cSld>
@@ -5676,7 +5499,7 @@
         <p:cNvPr id="1" name="">
           <a:extLst>
             <a:ext uri="{FF2B5EF4-FFF2-40B4-BE49-F238E27FC236}">
-              <a16:creationId xmlns:a16="http://schemas.microsoft.com/office/drawing/2014/main" id="{3981F3CF-A6B6-8734-29B3-EED9C256C907}"/>
+              <a16:creationId xmlns:a16="http://schemas.microsoft.com/office/drawing/2014/main" id="{B74EDB3D-3BE3-4E7F-9ACF-FE6257CE1E49}"/>
             </a:ext>
           </a:extLst>
         </p:cNvPr>
@@ -5691,12 +5514,42 @@
           <a:chExt cx="0" cy="0"/>
         </a:xfrm>
       </p:grpSpPr>
-      <p:sp>
-        <p:nvSpPr>
-          <p:cNvPr id="8" name="Прямоугольник 7">
-            <a:extLst>
-              <a:ext uri="{FF2B5EF4-FFF2-40B4-BE49-F238E27FC236}">
-                <a16:creationId xmlns:a16="http://schemas.microsoft.com/office/drawing/2014/main" id="{8D8F582C-DF9E-1AC4-FD81-1DB6A59A664C}"/>
+      <p:pic>
+        <p:nvPicPr>
+          <p:cNvPr id="7" name="Рисунок 6">
+            <a:extLst>
+              <a:ext uri="{FF2B5EF4-FFF2-40B4-BE49-F238E27FC236}">
+                <a16:creationId xmlns:a16="http://schemas.microsoft.com/office/drawing/2014/main" id="{5516FC6D-0B93-C5AC-F505-B5A2AF1BD293}"/>
+              </a:ext>
+            </a:extLst>
+          </p:cNvPr>
+          <p:cNvPicPr>
+            <a:picLocks noChangeAspect="1"/>
+          </p:cNvPicPr>
+          <p:nvPr/>
+        </p:nvPicPr>
+        <p:blipFill>
+          <a:blip r:embed="rId2"/>
+          <a:stretch>
+            <a:fillRect/>
+          </a:stretch>
+        </p:blipFill>
+        <p:spPr>
+          <a:xfrm>
+            <a:off x="0" y="2324417"/>
+            <a:ext cx="4327521" cy="3787706"/>
+          </a:xfrm>
+          <a:prstGeom prst="rect">
+            <a:avLst/>
+          </a:prstGeom>
+        </p:spPr>
+      </p:pic>
+      <p:sp>
+        <p:nvSpPr>
+          <p:cNvPr id="4" name="Прямоугольник 3">
+            <a:extLst>
+              <a:ext uri="{FF2B5EF4-FFF2-40B4-BE49-F238E27FC236}">
+                <a16:creationId xmlns:a16="http://schemas.microsoft.com/office/drawing/2014/main" id="{63E21A3E-8917-AB01-6965-6C882CE75F95}"/>
               </a:ext>
             </a:extLst>
           </p:cNvPr>
@@ -5706,7 +5559,7 @@
         <p:spPr>
           <a:xfrm>
             <a:off x="0" y="1"/>
-            <a:ext cx="12192000" cy="1500188"/>
+            <a:ext cx="12192000" cy="1240970"/>
           </a:xfrm>
           <a:prstGeom prst="rect">
             <a:avLst/>
@@ -5748,7 +5601,7 @@
           <p:cNvPr id="3" name="Заголовок 2">
             <a:extLst>
               <a:ext uri="{FF2B5EF4-FFF2-40B4-BE49-F238E27FC236}">
-                <a16:creationId xmlns:a16="http://schemas.microsoft.com/office/drawing/2014/main" id="{22E7A5E8-F173-7C38-7879-957038A0782D}"/>
+                <a16:creationId xmlns:a16="http://schemas.microsoft.com/office/drawing/2014/main" id="{1EF7F770-BD59-513B-F6E8-98F24E95DD2E}"/>
               </a:ext>
             </a:extLst>
           </p:cNvPr>
@@ -5761,88 +5614,43 @@
         </p:nvSpPr>
         <p:spPr>
           <a:xfrm>
-            <a:off x="527050" y="587887"/>
-            <a:ext cx="11512550" cy="912302"/>
-          </a:xfrm>
-        </p:spPr>
-        <p:txBody>
-          <a:bodyPr>
+            <a:off x="519477" y="380263"/>
+            <a:ext cx="10515600" cy="1424696"/>
+          </a:xfrm>
+        </p:spPr>
+        <p:txBody>
+          <a:bodyPr anchor="t">
             <a:noAutofit/>
           </a:bodyPr>
           <a:lstStyle/>
           <a:p>
-            <a:br>
-              <a:rPr lang="ru-RU" dirty="0">
+            <a:pPr>
+              <a:lnSpc>
+                <a:spcPct val="100000"/>
+              </a:lnSpc>
+            </a:pPr>
+            <a:r>
+              <a:rPr lang="ru-RU" sz="5000" dirty="0">
                 <a:solidFill>
                   <a:schemeClr val="bg1"/>
                 </a:solidFill>
               </a:rPr>
-            </a:br>
-            <a:br>
-              <a:rPr lang="ru-RU" dirty="0">
-                <a:solidFill>
-                  <a:schemeClr val="accent5">
-                    <a:lumMod val="20000"/>
-                    <a:lumOff val="80000"/>
-                  </a:schemeClr>
-                </a:solidFill>
-              </a:rPr>
-            </a:br>
-            <a:r>
-              <a:rPr lang="ru-RU" dirty="0">
-                <a:solidFill>
-                  <a:schemeClr val="bg1"/>
-                </a:solidFill>
-              </a:rPr>
-              <a:t>Монтаж с трафаретом</a:t>
-            </a:r>
-            <a:r>
-              <a:rPr lang="en-US" dirty="0">
-                <a:solidFill>
-                  <a:schemeClr val="bg1"/>
-                </a:solidFill>
-              </a:rPr>
-              <a:t> </a:t>
-            </a:r>
-            <a:r>
-              <a:rPr lang="ru-RU" dirty="0">
-                <a:solidFill>
-                  <a:schemeClr val="bg1"/>
-                </a:solidFill>
-                <a:latin typeface="+mn-lt"/>
-              </a:rPr>
-              <a:t>(для </a:t>
-            </a:r>
-            <a:r>
-              <a:rPr lang="en-US" dirty="0">
-                <a:solidFill>
-                  <a:schemeClr val="bg1"/>
-                </a:solidFill>
-                <a:latin typeface="+mn-lt"/>
-              </a:rPr>
-              <a:t>SMD</a:t>
-            </a:r>
-            <a:r>
-              <a:rPr lang="ru-RU" dirty="0">
-                <a:solidFill>
-                  <a:schemeClr val="bg1"/>
-                </a:solidFill>
-                <a:latin typeface="+mn-lt"/>
-              </a:rPr>
-              <a:t>)</a:t>
-            </a:r>
-            <a:endParaRPr lang="ru-RU" dirty="0">
-              <a:latin typeface="+mn-lt"/>
+              <a:t>Конструкция главной передачи</a:t>
+            </a:r>
+            <a:endParaRPr lang="ru-RU" sz="5000" dirty="0">
+              <a:solidFill>
+                <a:srgbClr val="006CDC"/>
+              </a:solidFill>
             </a:endParaRPr>
           </a:p>
         </p:txBody>
       </p:sp>
       <p:sp>
         <p:nvSpPr>
-          <p:cNvPr id="10" name="TextBox 9">
-            <a:extLst>
-              <a:ext uri="{FF2B5EF4-FFF2-40B4-BE49-F238E27FC236}">
-                <a16:creationId xmlns:a16="http://schemas.microsoft.com/office/drawing/2014/main" id="{D3F63A1E-6EB5-C1B6-67EC-B32F7CDAF93A}"/>
+          <p:cNvPr id="9" name="TextBox 8">
+            <a:extLst>
+              <a:ext uri="{FF2B5EF4-FFF2-40B4-BE49-F238E27FC236}">
+                <a16:creationId xmlns:a16="http://schemas.microsoft.com/office/drawing/2014/main" id="{3A53C055-17B0-0E0E-926C-602262E1FEEB}"/>
               </a:ext>
             </a:extLst>
           </p:cNvPr>
@@ -5851,8 +5659,8 @@
         </p:nvSpPr>
         <p:spPr>
           <a:xfrm>
-            <a:off x="527050" y="1931303"/>
-            <a:ext cx="8668592" cy="4524315"/>
+            <a:off x="5143098" y="3412156"/>
+            <a:ext cx="5039713" cy="1246495"/>
           </a:xfrm>
           <a:prstGeom prst="rect">
             <a:avLst/>
@@ -5865,123 +5673,32 @@
           </a:bodyPr>
           <a:lstStyle/>
           <a:p>
-            <a:pPr marL="342900" indent="-342900">
-              <a:lnSpc>
-                <a:spcPct val="150000"/>
-              </a:lnSpc>
-              <a:buBlip>
-                <a:blip>
-                  <a:extLst>
-                    <a:ext uri="{96DAC541-7B7A-43D3-8B79-37D633B846F1}">
-                      <asvg:svgBlip xmlns:asvg="http://schemas.microsoft.com/office/drawing/2016/SVG/main" r:embed="rId2"/>
-                    </a:ext>
-                  </a:extLst>
-                </a:blip>
-              </a:buBlip>
-            </a:pPr>
-            <a:r>
-              <a:rPr lang="ru-RU" sz="2400" dirty="0"/>
-              <a:t>Нанесение припоя (по трафарету) </a:t>
-            </a:r>
-          </a:p>
-          <a:p>
-            <a:pPr marL="342900" indent="-342900">
-              <a:lnSpc>
-                <a:spcPct val="150000"/>
-              </a:lnSpc>
-              <a:buBlip>
-                <a:blip>
-                  <a:extLst>
-                    <a:ext uri="{96DAC541-7B7A-43D3-8B79-37D633B846F1}">
-                      <asvg:svgBlip xmlns:asvg="http://schemas.microsoft.com/office/drawing/2016/SVG/main" r:embed="rId2"/>
-                    </a:ext>
-                  </a:extLst>
-                </a:blip>
-              </a:buBlip>
-            </a:pPr>
-            <a:r>
-              <a:rPr lang="ru-RU" sz="2400" dirty="0"/>
-              <a:t>Сплавление соединения (в печи)</a:t>
-            </a:r>
-          </a:p>
-          <a:p>
-            <a:endParaRPr lang="ru-RU" sz="2400" dirty="0"/>
-          </a:p>
-          <a:p>
-            <a:endParaRPr lang="ru-RU" sz="2400" dirty="0"/>
-          </a:p>
-          <a:p>
-            <a:r>
-              <a:rPr lang="ru-RU" sz="2400" dirty="0"/>
-              <a:t>Набор инструментов:</a:t>
-            </a:r>
-          </a:p>
-          <a:p>
-            <a:r>
-              <a:rPr lang="ru-RU" sz="2400" dirty="0"/>
-              <a:t>трафарет, паяльная станция, паяльная паста</a:t>
-            </a:r>
-          </a:p>
-          <a:p>
-            <a:endParaRPr lang="ru-RU" sz="2400" dirty="0"/>
-          </a:p>
-          <a:p>
-            <a:r>
-              <a:rPr lang="ru-RU" sz="2400" dirty="0"/>
-              <a:t>Время работы заметно ниже, чем при ручной пайке</a:t>
-            </a:r>
-          </a:p>
-          <a:p>
-            <a:r>
-              <a:rPr lang="ru-RU" sz="2400" dirty="0"/>
-              <a:t>Качество уже приемлемое для мелкого производства</a:t>
-            </a:r>
-          </a:p>
-          <a:p>
-            <a:endParaRPr lang="ru-RU" sz="2400" dirty="0"/>
-          </a:p>
-          <a:p>
-            <a:r>
-              <a:rPr lang="ru-RU" sz="2400" dirty="0"/>
-              <a:t>Применение: от мелкого до крупносерийного производства</a:t>
-            </a:r>
-          </a:p>
-        </p:txBody>
-      </p:sp>
-      <p:pic>
-        <p:nvPicPr>
-          <p:cNvPr id="4" name="Рисунок 3">
-            <a:extLst>
-              <a:ext uri="{FF2B5EF4-FFF2-40B4-BE49-F238E27FC236}">
-                <a16:creationId xmlns:a16="http://schemas.microsoft.com/office/drawing/2014/main" id="{5FB31573-D9E6-0846-85E7-F313D108F20F}"/>
-              </a:ext>
-            </a:extLst>
-          </p:cNvPr>
-          <p:cNvPicPr>
-            <a:picLocks noChangeAspect="1"/>
-          </p:cNvPicPr>
-          <p:nvPr/>
-        </p:nvPicPr>
-        <p:blipFill>
-          <a:blip r:embed="rId3"/>
-          <a:stretch>
-            <a:fillRect/>
-          </a:stretch>
-        </p:blipFill>
-        <p:spPr>
-          <a:xfrm>
-            <a:off x="7674429" y="2088075"/>
-            <a:ext cx="3892550" cy="2605053"/>
-          </a:xfrm>
-          <a:prstGeom prst="rect">
-            <a:avLst/>
-          </a:prstGeom>
-        </p:spPr>
-      </p:pic>
+            <a:pPr algn="ctr"/>
+            <a:r>
+              <a:rPr lang="ru-RU" sz="2500" dirty="0"/>
+              <a:t>Цилиндрическое зубчатое звено</a:t>
+            </a:r>
+          </a:p>
+          <a:p>
+            <a:pPr algn="ctr"/>
+            <a:r>
+              <a:rPr lang="ru-RU" sz="2500" dirty="0"/>
+              <a:t>с открытым дифференциалом</a:t>
+            </a:r>
+          </a:p>
+          <a:p>
+            <a:pPr algn="ctr"/>
+            <a:r>
+              <a:rPr lang="ru-RU" sz="2500" dirty="0"/>
+              <a:t>и коническими сателлитами</a:t>
+            </a:r>
+          </a:p>
+        </p:txBody>
+      </p:sp>
     </p:spTree>
     <p:extLst>
       <p:ext uri="{BB962C8B-B14F-4D97-AF65-F5344CB8AC3E}">
-        <p14:creationId xmlns:p14="http://schemas.microsoft.com/office/powerpoint/2010/main" val="2786064158"/>
+        <p14:creationId xmlns:p14="http://schemas.microsoft.com/office/powerpoint/2010/main" val="2395982969"/>
       </p:ext>
     </p:extLst>
   </p:cSld>
@@ -5999,7 +5716,7 @@
         <p:cNvPr id="1" name="">
           <a:extLst>
             <a:ext uri="{FF2B5EF4-FFF2-40B4-BE49-F238E27FC236}">
-              <a16:creationId xmlns:a16="http://schemas.microsoft.com/office/drawing/2014/main" id="{B9C1E24F-8F9A-6614-6A0C-9E359C5B3AB8}"/>
+              <a16:creationId xmlns:a16="http://schemas.microsoft.com/office/drawing/2014/main" id="{45D70A3A-0C29-2D69-8B7A-56337484AD8E}"/>
             </a:ext>
           </a:extLst>
         </p:cNvPr>
@@ -6016,10 +5733,10 @@
       </p:grpSpPr>
       <p:sp>
         <p:nvSpPr>
-          <p:cNvPr id="8" name="Прямоугольник 7">
-            <a:extLst>
-              <a:ext uri="{FF2B5EF4-FFF2-40B4-BE49-F238E27FC236}">
-                <a16:creationId xmlns:a16="http://schemas.microsoft.com/office/drawing/2014/main" id="{6529F356-8709-8A75-3088-3F17725DE172}"/>
+          <p:cNvPr id="4" name="Прямоугольник 3">
+            <a:extLst>
+              <a:ext uri="{FF2B5EF4-FFF2-40B4-BE49-F238E27FC236}">
+                <a16:creationId xmlns:a16="http://schemas.microsoft.com/office/drawing/2014/main" id="{D0A02C2D-2151-2E0A-B1D3-87C6E4622043}"/>
               </a:ext>
             </a:extLst>
           </p:cNvPr>
@@ -6029,7 +5746,7 @@
         <p:spPr>
           <a:xfrm>
             <a:off x="0" y="1"/>
-            <a:ext cx="12191999" cy="1500188"/>
+            <a:ext cx="12192000" cy="1240970"/>
           </a:xfrm>
           <a:prstGeom prst="rect">
             <a:avLst/>
@@ -6071,7 +5788,7 @@
           <p:cNvPr id="3" name="Заголовок 2">
             <a:extLst>
               <a:ext uri="{FF2B5EF4-FFF2-40B4-BE49-F238E27FC236}">
-                <a16:creationId xmlns:a16="http://schemas.microsoft.com/office/drawing/2014/main" id="{52CF35E0-B117-B14C-DF19-AAC4077428AF}"/>
+                <a16:creationId xmlns:a16="http://schemas.microsoft.com/office/drawing/2014/main" id="{1F1D9DA3-E650-EA96-70F3-D80BF1E8AAD6}"/>
               </a:ext>
             </a:extLst>
           </p:cNvPr>
@@ -6084,71 +5801,43 @@
         </p:nvSpPr>
         <p:spPr>
           <a:xfrm>
-            <a:off x="527050" y="587887"/>
-            <a:ext cx="10515600" cy="912302"/>
-          </a:xfrm>
-        </p:spPr>
-        <p:txBody>
-          <a:bodyPr>
+            <a:off x="519477" y="380263"/>
+            <a:ext cx="10515600" cy="1424696"/>
+          </a:xfrm>
+        </p:spPr>
+        <p:txBody>
+          <a:bodyPr anchor="t">
             <a:noAutofit/>
           </a:bodyPr>
           <a:lstStyle/>
           <a:p>
-            <a:r>
-              <a:rPr lang="ru-RU" dirty="0">
+            <a:pPr>
+              <a:lnSpc>
+                <a:spcPct val="100000"/>
+              </a:lnSpc>
+            </a:pPr>
+            <a:r>
+              <a:rPr lang="ru-RU" sz="5000" dirty="0">
                 <a:solidFill>
                   <a:schemeClr val="bg1"/>
                 </a:solidFill>
               </a:rPr>
-              <a:t>Волновая пайка</a:t>
-            </a:r>
-            <a:r>
-              <a:rPr lang="en-US" dirty="0">
-                <a:solidFill>
-                  <a:schemeClr val="bg1"/>
-                </a:solidFill>
-              </a:rPr>
-              <a:t> </a:t>
-            </a:r>
-            <a:r>
-              <a:rPr lang="ru-RU" dirty="0">
-                <a:solidFill>
-                  <a:schemeClr val="bg1"/>
-                </a:solidFill>
-                <a:latin typeface="+mn-lt"/>
-              </a:rPr>
-              <a:t>(для </a:t>
-            </a:r>
-            <a:r>
-              <a:rPr lang="en-US" dirty="0">
-                <a:solidFill>
-                  <a:schemeClr val="bg1"/>
-                </a:solidFill>
-                <a:latin typeface="+mn-lt"/>
-              </a:rPr>
-              <a:t>THT</a:t>
-            </a:r>
-            <a:r>
-              <a:rPr lang="ru-RU" dirty="0">
-                <a:solidFill>
-                  <a:schemeClr val="bg1"/>
-                </a:solidFill>
-                <a:latin typeface="+mn-lt"/>
-              </a:rPr>
-              <a:t>)</a:t>
-            </a:r>
-            <a:endParaRPr lang="ru-RU" dirty="0">
-              <a:latin typeface="+mn-lt"/>
+              <a:t>Реверс с существующей трансмиссии</a:t>
+            </a:r>
+            <a:endParaRPr lang="ru-RU" sz="5000" dirty="0">
+              <a:solidFill>
+                <a:srgbClr val="006CDC"/>
+              </a:solidFill>
             </a:endParaRPr>
           </a:p>
         </p:txBody>
       </p:sp>
       <p:sp>
         <p:nvSpPr>
-          <p:cNvPr id="10" name="TextBox 9">
-            <a:extLst>
-              <a:ext uri="{FF2B5EF4-FFF2-40B4-BE49-F238E27FC236}">
-                <a16:creationId xmlns:a16="http://schemas.microsoft.com/office/drawing/2014/main" id="{2F09AE00-2714-7314-1557-D9DA8D3EB5BE}"/>
+          <p:cNvPr id="9" name="TextBox 8">
+            <a:extLst>
+              <a:ext uri="{FF2B5EF4-FFF2-40B4-BE49-F238E27FC236}">
+                <a16:creationId xmlns:a16="http://schemas.microsoft.com/office/drawing/2014/main" id="{BBE229D2-7291-D365-2356-4DBEFE32A080}"/>
               </a:ext>
             </a:extLst>
           </p:cNvPr>
@@ -6157,8 +5846,8 @@
         </p:nvSpPr>
         <p:spPr>
           <a:xfrm>
-            <a:off x="527050" y="2088075"/>
-            <a:ext cx="8668592" cy="3970318"/>
+            <a:off x="1136455" y="6031500"/>
+            <a:ext cx="4802725" cy="477054"/>
           </a:xfrm>
           <a:prstGeom prst="rect">
             <a:avLst/>
@@ -6171,120 +5860,617 @@
           </a:bodyPr>
           <a:lstStyle/>
           <a:p>
-            <a:pPr marL="342900" indent="-342900">
-              <a:lnSpc>
-                <a:spcPct val="150000"/>
-              </a:lnSpc>
-              <a:buBlip>
-                <a:blip>
-                  <a:extLst>
-                    <a:ext uri="{96DAC541-7B7A-43D3-8B79-37D633B846F1}">
-                      <asvg:svgBlip xmlns:asvg="http://schemas.microsoft.com/office/drawing/2016/SVG/main" r:embed="rId3"/>
-                    </a:ext>
-                  </a:extLst>
-                </a:blip>
-              </a:buBlip>
-            </a:pPr>
-            <a:r>
-              <a:rPr lang="ru-RU" sz="2400" dirty="0"/>
-              <a:t>Сплавление соединения (в ванне)</a:t>
-            </a:r>
-          </a:p>
-          <a:p>
-            <a:endParaRPr lang="ru-RU" sz="2400" dirty="0"/>
-          </a:p>
-          <a:p>
-            <a:r>
-              <a:rPr lang="ru-RU" sz="2400" dirty="0"/>
-              <a:t>Набор инструментов:</a:t>
-            </a:r>
-          </a:p>
-          <a:p>
-            <a:r>
-              <a:rPr lang="ru-RU" sz="2400" dirty="0"/>
-              <a:t>паяльная ванна, припой, флюс</a:t>
-            </a:r>
-          </a:p>
-          <a:p>
-            <a:endParaRPr lang="ru-RU" sz="2400" dirty="0"/>
-          </a:p>
-          <a:p>
-            <a:r>
-              <a:rPr lang="ru-RU" sz="2400" dirty="0"/>
-              <a:t>Время работы низкое</a:t>
-            </a:r>
-          </a:p>
-          <a:p>
-            <a:r>
-              <a:rPr lang="ru-RU" sz="2400" dirty="0"/>
-              <a:t>Качество стабильно высокое</a:t>
-            </a:r>
-          </a:p>
-          <a:p>
-            <a:endParaRPr lang="ru-RU" sz="2400" dirty="0"/>
-          </a:p>
-          <a:p>
-            <a:endParaRPr lang="ru-RU" sz="2400" dirty="0"/>
-          </a:p>
-          <a:p>
-            <a:r>
-              <a:rPr lang="ru-RU" sz="2400" dirty="0"/>
-              <a:t>Применение: от мелкого до крупносерийного производства</a:t>
-            </a:r>
-          </a:p>
-        </p:txBody>
-      </p:sp>
-      <p:pic>
-        <p:nvPicPr>
-          <p:cNvPr id="5122" name="Picture 2" descr="Picture background">
-            <a:extLst>
-              <a:ext uri="{FF2B5EF4-FFF2-40B4-BE49-F238E27FC236}">
-                <a16:creationId xmlns:a16="http://schemas.microsoft.com/office/drawing/2014/main" id="{1504BBB7-60F0-6003-F925-29939AD77276}"/>
-              </a:ext>
-            </a:extLst>
-          </p:cNvPr>
-          <p:cNvPicPr>
-            <a:picLocks noChangeAspect="1" noChangeArrowheads="1"/>
-          </p:cNvPicPr>
+            <a:pPr algn="ctr"/>
+            <a:r>
+              <a:rPr lang="ru-RU" sz="2500" dirty="0"/>
+              <a:t>Схема вариатора </a:t>
+            </a:r>
+            <a:r>
+              <a:rPr lang="en-US" sz="2500" dirty="0" err="1"/>
+              <a:t>Jatco</a:t>
+            </a:r>
+            <a:r>
+              <a:rPr lang="en-US" sz="2500" dirty="0"/>
+              <a:t> JF009e</a:t>
+            </a:r>
+            <a:endParaRPr lang="ru-RU" sz="2500" dirty="0"/>
+          </a:p>
+        </p:txBody>
+      </p:sp>
+      <p:grpSp>
+        <p:nvGrpSpPr>
+          <p:cNvPr id="13" name="Группа 12">
+            <a:extLst>
+              <a:ext uri="{FF2B5EF4-FFF2-40B4-BE49-F238E27FC236}">
+                <a16:creationId xmlns:a16="http://schemas.microsoft.com/office/drawing/2014/main" id="{8D2D2432-5ACD-CC91-42B1-345ED2BEC1D8}"/>
+              </a:ext>
+            </a:extLst>
+          </p:cNvPr>
+          <p:cNvGrpSpPr/>
           <p:nvPr/>
-        </p:nvPicPr>
-        <p:blipFill rotWithShape="1">
-          <a:blip r:embed="rId4">
-            <a:extLst>
-              <a:ext uri="{28A0092B-C50C-407E-A947-70E740481C1C}">
-                <a14:useLocalDpi xmlns:a14="http://schemas.microsoft.com/office/drawing/2010/main" val="0"/>
-              </a:ext>
-            </a:extLst>
-          </a:blip>
-          <a:srcRect l="7182" t="11153" r="10990" b="11193"/>
-          <a:stretch>
-            <a:fillRect/>
-          </a:stretch>
-        </p:blipFill>
-        <p:spPr bwMode="auto">
-          <a:xfrm>
-            <a:off x="6634812" y="1972353"/>
-            <a:ext cx="5121660" cy="3241903"/>
+        </p:nvGrpSpPr>
+        <p:grpSpPr>
+          <a:xfrm>
+            <a:off x="259138" y="1982178"/>
+            <a:ext cx="6668642" cy="3872102"/>
+            <a:chOff x="417957" y="1461898"/>
+            <a:chExt cx="7714673" cy="4274798"/>
+          </a:xfrm>
+        </p:grpSpPr>
+        <p:pic>
+          <p:nvPicPr>
+            <p:cNvPr id="5" name="Рисунок 4">
+              <a:extLst>
+                <a:ext uri="{FF2B5EF4-FFF2-40B4-BE49-F238E27FC236}">
+                  <a16:creationId xmlns:a16="http://schemas.microsoft.com/office/drawing/2014/main" id="{CB0CEC7B-5D31-E590-04C1-5C77F983F15D}"/>
+                </a:ext>
+              </a:extLst>
+            </p:cNvPr>
+            <p:cNvPicPr>
+              <a:picLocks noChangeAspect="1"/>
+            </p:cNvPicPr>
+            <p:nvPr/>
+          </p:nvPicPr>
+          <p:blipFill>
+            <a:blip r:embed="rId2"/>
+            <a:stretch>
+              <a:fillRect/>
+            </a:stretch>
+          </p:blipFill>
+          <p:spPr>
+            <a:xfrm>
+              <a:off x="417957" y="1461898"/>
+              <a:ext cx="7714673" cy="4274798"/>
+            </a:xfrm>
+            <a:prstGeom prst="rect">
+              <a:avLst/>
+            </a:prstGeom>
+          </p:spPr>
+        </p:pic>
+        <p:sp>
+          <p:nvSpPr>
+            <p:cNvPr id="8" name="Прямоугольник 7">
+              <a:extLst>
+                <a:ext uri="{FF2B5EF4-FFF2-40B4-BE49-F238E27FC236}">
+                  <a16:creationId xmlns:a16="http://schemas.microsoft.com/office/drawing/2014/main" id="{648E00B2-CFAE-CF9B-EC67-1E01A40A1138}"/>
+                </a:ext>
+              </a:extLst>
+            </p:cNvPr>
+            <p:cNvSpPr/>
+            <p:nvPr/>
+          </p:nvSpPr>
+          <p:spPr>
+            <a:xfrm>
+              <a:off x="3814234" y="2472267"/>
+              <a:ext cx="2048934" cy="313266"/>
+            </a:xfrm>
+            <a:prstGeom prst="rect">
+              <a:avLst/>
+            </a:prstGeom>
+            <a:noFill/>
+            <a:ln w="38100">
+              <a:solidFill>
+                <a:srgbClr val="006CDC"/>
+              </a:solidFill>
+            </a:ln>
+          </p:spPr>
+          <p:style>
+            <a:lnRef idx="2">
+              <a:schemeClr val="accent1">
+                <a:shade val="15000"/>
+              </a:schemeClr>
+            </a:lnRef>
+            <a:fillRef idx="1">
+              <a:schemeClr val="accent1"/>
+            </a:fillRef>
+            <a:effectRef idx="0">
+              <a:schemeClr val="accent1"/>
+            </a:effectRef>
+            <a:fontRef idx="minor">
+              <a:schemeClr val="lt1"/>
+            </a:fontRef>
+          </p:style>
+          <p:txBody>
+            <a:bodyPr rtlCol="0" anchor="ctr"/>
+            <a:lstStyle/>
+            <a:p>
+              <a:pPr algn="ctr"/>
+              <a:endParaRPr lang="ru-RU"/>
+            </a:p>
+          </p:txBody>
+        </p:sp>
+        <p:sp>
+          <p:nvSpPr>
+            <p:cNvPr id="10" name="Прямоугольник 9">
+              <a:extLst>
+                <a:ext uri="{FF2B5EF4-FFF2-40B4-BE49-F238E27FC236}">
+                  <a16:creationId xmlns:a16="http://schemas.microsoft.com/office/drawing/2014/main" id="{3A1A9315-8624-AE45-1149-AA5CB76E97B7}"/>
+                </a:ext>
+              </a:extLst>
+            </p:cNvPr>
+            <p:cNvSpPr/>
+            <p:nvPr/>
+          </p:nvSpPr>
+          <p:spPr>
+            <a:xfrm>
+              <a:off x="4919133" y="2785533"/>
+              <a:ext cx="2857499" cy="423334"/>
+            </a:xfrm>
+            <a:prstGeom prst="rect">
+              <a:avLst/>
+            </a:prstGeom>
+            <a:noFill/>
+            <a:ln w="38100">
+              <a:solidFill>
+                <a:srgbClr val="006CDC"/>
+              </a:solidFill>
+            </a:ln>
+          </p:spPr>
+          <p:style>
+            <a:lnRef idx="2">
+              <a:schemeClr val="accent1">
+                <a:shade val="15000"/>
+              </a:schemeClr>
+            </a:lnRef>
+            <a:fillRef idx="1">
+              <a:schemeClr val="accent1"/>
+            </a:fillRef>
+            <a:effectRef idx="0">
+              <a:schemeClr val="accent1"/>
+            </a:effectRef>
+            <a:fontRef idx="minor">
+              <a:schemeClr val="lt1"/>
+            </a:fontRef>
+          </p:style>
+          <p:txBody>
+            <a:bodyPr rtlCol="0" anchor="ctr"/>
+            <a:lstStyle/>
+            <a:p>
+              <a:pPr algn="ctr"/>
+              <a:endParaRPr lang="ru-RU"/>
+            </a:p>
+          </p:txBody>
+        </p:sp>
+      </p:grpSp>
+      <p:sp>
+        <p:nvSpPr>
+          <p:cNvPr id="14" name="Стрелка: вправо 13">
+            <a:extLst>
+              <a:ext uri="{FF2B5EF4-FFF2-40B4-BE49-F238E27FC236}">
+                <a16:creationId xmlns:a16="http://schemas.microsoft.com/office/drawing/2014/main" id="{9699ABFA-CF29-D647-6C60-8FF89A7416C5}"/>
+              </a:ext>
+            </a:extLst>
+          </p:cNvPr>
+          <p:cNvSpPr/>
+          <p:nvPr/>
+        </p:nvSpPr>
+        <p:spPr>
+          <a:xfrm>
+            <a:off x="7184899" y="3065302"/>
+            <a:ext cx="723754" cy="383455"/>
+          </a:xfrm>
+          <a:prstGeom prst="rightArrow">
+            <a:avLst>
+              <a:gd name="adj1" fmla="val 35175"/>
+              <a:gd name="adj2" fmla="val 106937"/>
+            </a:avLst>
+          </a:prstGeom>
+          <a:solidFill>
+            <a:srgbClr val="006CDC"/>
+          </a:solidFill>
+          <a:ln>
+            <a:noFill/>
+          </a:ln>
+        </p:spPr>
+        <p:style>
+          <a:lnRef idx="2">
+            <a:schemeClr val="accent1">
+              <a:shade val="15000"/>
+            </a:schemeClr>
+          </a:lnRef>
+          <a:fillRef idx="1">
+            <a:schemeClr val="accent1"/>
+          </a:fillRef>
+          <a:effectRef idx="0">
+            <a:schemeClr val="accent1"/>
+          </a:effectRef>
+          <a:fontRef idx="minor">
+            <a:schemeClr val="lt1"/>
+          </a:fontRef>
+        </p:style>
+        <p:txBody>
+          <a:bodyPr rtlCol="0" anchor="ctr"/>
+          <a:lstStyle/>
+          <a:p>
+            <a:pPr algn="ctr"/>
+            <a:endParaRPr lang="ru-RU"/>
+          </a:p>
+        </p:txBody>
+      </p:sp>
+      <p:sp>
+        <p:nvSpPr>
+          <p:cNvPr id="15" name="TextBox 14">
+            <a:extLst>
+              <a:ext uri="{FF2B5EF4-FFF2-40B4-BE49-F238E27FC236}">
+                <a16:creationId xmlns:a16="http://schemas.microsoft.com/office/drawing/2014/main" id="{A148F3F3-69BF-7D9C-91AA-6F2F54AB9B1E}"/>
+              </a:ext>
+            </a:extLst>
+          </p:cNvPr>
+          <p:cNvSpPr txBox="1"/>
+          <p:nvPr/>
+        </p:nvSpPr>
+        <p:spPr>
+          <a:xfrm>
+            <a:off x="8157064" y="2671734"/>
+            <a:ext cx="3764171" cy="1246495"/>
           </a:xfrm>
           <a:prstGeom prst="rect">
             <a:avLst/>
           </a:prstGeom>
           <a:noFill/>
-          <a:extLst>
-            <a:ext uri="{909E8E84-426E-40DD-AFC4-6F175D3DCCD1}">
-              <a14:hiddenFill xmlns:a14="http://schemas.microsoft.com/office/drawing/2010/main">
-                <a:solidFill>
-                  <a:srgbClr val="FFFFFF"/>
-                </a:solidFill>
-              </a14:hiddenFill>
-            </a:ext>
-          </a:extLst>
-        </p:spPr>
-      </p:pic>
+        </p:spPr>
+        <p:txBody>
+          <a:bodyPr wrap="none" rtlCol="0">
+            <a:spAutoFit/>
+          </a:bodyPr>
+          <a:lstStyle/>
+          <a:p>
+            <a:pPr algn="ctr"/>
+            <a:r>
+              <a:rPr lang="en-US" sz="2500" dirty="0"/>
+              <a:t>z1/z2 = 1</a:t>
+            </a:r>
+            <a:r>
+              <a:rPr lang="ru-RU" sz="2500" dirty="0"/>
+              <a:t>.</a:t>
+            </a:r>
+            <a:r>
+              <a:rPr lang="en-US" sz="2500" dirty="0"/>
+              <a:t>5</a:t>
+            </a:r>
+            <a:r>
+              <a:rPr lang="ru-RU" sz="2500" dirty="0"/>
+              <a:t>, </a:t>
+            </a:r>
+            <a:r>
+              <a:rPr lang="en-US" sz="2500" dirty="0"/>
+              <a:t>z3/z4 = 3</a:t>
+            </a:r>
+            <a:r>
+              <a:rPr lang="ru-RU" sz="2500" dirty="0"/>
+              <a:t>.</a:t>
+            </a:r>
+            <a:r>
+              <a:rPr lang="en-US" sz="2500" dirty="0"/>
+              <a:t>6</a:t>
+            </a:r>
+          </a:p>
+          <a:p>
+            <a:pPr algn="ctr"/>
+            <a:r>
+              <a:rPr lang="en-US" sz="2500" dirty="0"/>
+              <a:t>b1 = 23</a:t>
+            </a:r>
+            <a:r>
+              <a:rPr lang="ru-RU" sz="2500" dirty="0"/>
+              <a:t> мм</a:t>
+            </a:r>
+            <a:r>
+              <a:rPr lang="en-US" sz="2500" dirty="0"/>
+              <a:t>, a1 = 91</a:t>
+            </a:r>
+            <a:r>
+              <a:rPr lang="ru-RU" sz="2500" dirty="0"/>
+              <a:t> мм</a:t>
+            </a:r>
+            <a:endParaRPr lang="en-US" sz="2500" dirty="0"/>
+          </a:p>
+          <a:p>
+            <a:pPr algn="ctr"/>
+            <a:r>
+              <a:rPr lang="en-US" sz="2500" dirty="0"/>
+              <a:t>b2 = 35</a:t>
+            </a:r>
+            <a:r>
+              <a:rPr lang="ru-RU" sz="2500" dirty="0"/>
+              <a:t> мм</a:t>
+            </a:r>
+            <a:r>
+              <a:rPr lang="en-US" sz="2500" dirty="0"/>
+              <a:t>, a2 = 129</a:t>
+            </a:r>
+            <a:r>
+              <a:rPr lang="ru-RU" sz="2500" dirty="0"/>
+              <a:t> мм</a:t>
+            </a:r>
+          </a:p>
+        </p:txBody>
+      </p:sp>
+      <p:sp>
+        <p:nvSpPr>
+          <p:cNvPr id="17" name="TextBox 16">
+            <a:extLst>
+              <a:ext uri="{FF2B5EF4-FFF2-40B4-BE49-F238E27FC236}">
+                <a16:creationId xmlns:a16="http://schemas.microsoft.com/office/drawing/2014/main" id="{46BB431D-1368-4C63-CE6C-EF3B0FC8E82B}"/>
+              </a:ext>
+            </a:extLst>
+          </p:cNvPr>
+          <p:cNvSpPr txBox="1"/>
+          <p:nvPr/>
+        </p:nvSpPr>
+        <p:spPr>
+          <a:xfrm>
+            <a:off x="6422196" y="2029912"/>
+            <a:ext cx="1659555" cy="477054"/>
+          </a:xfrm>
+          <a:prstGeom prst="rect">
+            <a:avLst/>
+          </a:prstGeom>
+          <a:noFill/>
+        </p:spPr>
+        <p:txBody>
+          <a:bodyPr wrap="square">
+            <a:spAutoFit/>
+          </a:bodyPr>
+          <a:lstStyle/>
+          <a:p>
+            <a:r>
+              <a:rPr lang="ru-RU" sz="2500" dirty="0"/>
+              <a:t>SKF6208</a:t>
+            </a:r>
+          </a:p>
+        </p:txBody>
+      </p:sp>
+      <p:sp>
+        <p:nvSpPr>
+          <p:cNvPr id="19" name="TextBox 18">
+            <a:extLst>
+              <a:ext uri="{FF2B5EF4-FFF2-40B4-BE49-F238E27FC236}">
+                <a16:creationId xmlns:a16="http://schemas.microsoft.com/office/drawing/2014/main" id="{046BF963-EEEF-4DF9-9C61-BEC992654A27}"/>
+              </a:ext>
+            </a:extLst>
+          </p:cNvPr>
+          <p:cNvSpPr txBox="1"/>
+          <p:nvPr/>
+        </p:nvSpPr>
+        <p:spPr>
+          <a:xfrm>
+            <a:off x="3537817" y="1621233"/>
+            <a:ext cx="1764185" cy="477054"/>
+          </a:xfrm>
+          <a:prstGeom prst="rect">
+            <a:avLst/>
+          </a:prstGeom>
+          <a:noFill/>
+        </p:spPr>
+        <p:txBody>
+          <a:bodyPr wrap="square">
+            <a:spAutoFit/>
+          </a:bodyPr>
+          <a:lstStyle/>
+          <a:p>
+            <a:r>
+              <a:rPr lang="ru-RU" sz="2500" dirty="0"/>
+              <a:t>SKF30206</a:t>
+            </a:r>
+          </a:p>
+        </p:txBody>
+      </p:sp>
+      <p:sp>
+        <p:nvSpPr>
+          <p:cNvPr id="20" name="TextBox 19">
+            <a:extLst>
+              <a:ext uri="{FF2B5EF4-FFF2-40B4-BE49-F238E27FC236}">
+                <a16:creationId xmlns:a16="http://schemas.microsoft.com/office/drawing/2014/main" id="{D553DFAC-2D67-5DBF-9A92-D825922DAB99}"/>
+              </a:ext>
+            </a:extLst>
+          </p:cNvPr>
+          <p:cNvSpPr txBox="1"/>
+          <p:nvPr/>
+        </p:nvSpPr>
+        <p:spPr>
+          <a:xfrm>
+            <a:off x="6241229" y="4470902"/>
+            <a:ext cx="2021487" cy="477054"/>
+          </a:xfrm>
+          <a:prstGeom prst="rect">
+            <a:avLst/>
+          </a:prstGeom>
+          <a:noFill/>
+        </p:spPr>
+        <p:txBody>
+          <a:bodyPr wrap="square">
+            <a:spAutoFit/>
+          </a:bodyPr>
+          <a:lstStyle/>
+          <a:p>
+            <a:r>
+              <a:rPr lang="ru-RU" sz="2500" dirty="0"/>
+              <a:t>SKF32006 </a:t>
+            </a:r>
+          </a:p>
+        </p:txBody>
+      </p:sp>
+      <p:cxnSp>
+        <p:nvCxnSpPr>
+          <p:cNvPr id="22" name="Прямая соединительная линия 21">
+            <a:extLst>
+              <a:ext uri="{FF2B5EF4-FFF2-40B4-BE49-F238E27FC236}">
+                <a16:creationId xmlns:a16="http://schemas.microsoft.com/office/drawing/2014/main" id="{DF54F826-A8DB-55DD-9E8F-AEACECB97774}"/>
+              </a:ext>
+            </a:extLst>
+          </p:cNvPr>
+          <p:cNvCxnSpPr>
+            <a:cxnSpLocks/>
+            <a:stCxn id="19" idx="2"/>
+          </p:cNvCxnSpPr>
+          <p:nvPr/>
+        </p:nvCxnSpPr>
+        <p:spPr>
+          <a:xfrm>
+            <a:off x="4419910" y="2098287"/>
+            <a:ext cx="0" cy="683013"/>
+          </a:xfrm>
+          <a:prstGeom prst="line">
+            <a:avLst/>
+          </a:prstGeom>
+          <a:ln w="38100">
+            <a:solidFill>
+              <a:schemeClr val="accent2"/>
+            </a:solidFill>
+          </a:ln>
+        </p:spPr>
+        <p:style>
+          <a:lnRef idx="1">
+            <a:schemeClr val="accent1"/>
+          </a:lnRef>
+          <a:fillRef idx="0">
+            <a:schemeClr val="accent1"/>
+          </a:fillRef>
+          <a:effectRef idx="0">
+            <a:schemeClr val="accent1"/>
+          </a:effectRef>
+          <a:fontRef idx="minor">
+            <a:schemeClr val="tx1"/>
+          </a:fontRef>
+        </p:style>
+      </p:cxnSp>
+      <p:cxnSp>
+        <p:nvCxnSpPr>
+          <p:cNvPr id="26" name="Прямая соединительная линия 25">
+            <a:extLst>
+              <a:ext uri="{FF2B5EF4-FFF2-40B4-BE49-F238E27FC236}">
+                <a16:creationId xmlns:a16="http://schemas.microsoft.com/office/drawing/2014/main" id="{EDA2BBF7-53A0-1E75-9BDC-EF2AD538376D}"/>
+              </a:ext>
+            </a:extLst>
+          </p:cNvPr>
+          <p:cNvCxnSpPr>
+            <a:cxnSpLocks/>
+            <a:stCxn id="20" idx="1"/>
+          </p:cNvCxnSpPr>
+          <p:nvPr/>
+        </p:nvCxnSpPr>
+        <p:spPr>
+          <a:xfrm flipH="1" flipV="1">
+            <a:off x="4419909" y="3750733"/>
+            <a:ext cx="1821320" cy="958696"/>
+          </a:xfrm>
+          <a:prstGeom prst="line">
+            <a:avLst/>
+          </a:prstGeom>
+          <a:ln w="38100">
+            <a:solidFill>
+              <a:schemeClr val="accent2"/>
+            </a:solidFill>
+          </a:ln>
+        </p:spPr>
+        <p:style>
+          <a:lnRef idx="1">
+            <a:schemeClr val="accent1"/>
+          </a:lnRef>
+          <a:fillRef idx="0">
+            <a:schemeClr val="accent1"/>
+          </a:fillRef>
+          <a:effectRef idx="0">
+            <a:schemeClr val="accent1"/>
+          </a:effectRef>
+          <a:fontRef idx="minor">
+            <a:schemeClr val="tx1"/>
+          </a:fontRef>
+        </p:style>
+      </p:cxnSp>
+      <p:cxnSp>
+        <p:nvCxnSpPr>
+          <p:cNvPr id="29" name="Прямая соединительная линия 28">
+            <a:extLst>
+              <a:ext uri="{FF2B5EF4-FFF2-40B4-BE49-F238E27FC236}">
+                <a16:creationId xmlns:a16="http://schemas.microsoft.com/office/drawing/2014/main" id="{E800A783-0D59-1AA5-061D-4041BD2B42A2}"/>
+              </a:ext>
+            </a:extLst>
+          </p:cNvPr>
+          <p:cNvCxnSpPr>
+            <a:cxnSpLocks/>
+            <a:stCxn id="17" idx="2"/>
+          </p:cNvCxnSpPr>
+          <p:nvPr/>
+        </p:nvCxnSpPr>
+        <p:spPr>
+          <a:xfrm flipH="1">
+            <a:off x="6086227" y="2506966"/>
+            <a:ext cx="1165747" cy="68633"/>
+          </a:xfrm>
+          <a:prstGeom prst="line">
+            <a:avLst/>
+          </a:prstGeom>
+          <a:ln w="38100">
+            <a:solidFill>
+              <a:schemeClr val="accent2"/>
+            </a:solidFill>
+          </a:ln>
+        </p:spPr>
+        <p:style>
+          <a:lnRef idx="1">
+            <a:schemeClr val="accent1"/>
+          </a:lnRef>
+          <a:fillRef idx="0">
+            <a:schemeClr val="accent1"/>
+          </a:fillRef>
+          <a:effectRef idx="0">
+            <a:schemeClr val="accent1"/>
+          </a:effectRef>
+          <a:fontRef idx="minor">
+            <a:schemeClr val="tx1"/>
+          </a:fontRef>
+        </p:style>
+      </p:cxnSp>
+      <p:cxnSp>
+        <p:nvCxnSpPr>
+          <p:cNvPr id="32" name="Прямая соединительная линия 31">
+            <a:extLst>
+              <a:ext uri="{FF2B5EF4-FFF2-40B4-BE49-F238E27FC236}">
+                <a16:creationId xmlns:a16="http://schemas.microsoft.com/office/drawing/2014/main" id="{EC87CD1A-310E-CECA-F160-BE00333BE66A}"/>
+              </a:ext>
+            </a:extLst>
+          </p:cNvPr>
+          <p:cNvCxnSpPr>
+            <a:cxnSpLocks/>
+            <a:stCxn id="17" idx="2"/>
+          </p:cNvCxnSpPr>
+          <p:nvPr/>
+        </p:nvCxnSpPr>
+        <p:spPr>
+          <a:xfrm flipH="1">
+            <a:off x="6028994" y="2506966"/>
+            <a:ext cx="1222980" cy="1261929"/>
+          </a:xfrm>
+          <a:prstGeom prst="line">
+            <a:avLst/>
+          </a:prstGeom>
+          <a:ln w="38100">
+            <a:solidFill>
+              <a:schemeClr val="accent2"/>
+            </a:solidFill>
+          </a:ln>
+        </p:spPr>
+        <p:style>
+          <a:lnRef idx="1">
+            <a:schemeClr val="accent1"/>
+          </a:lnRef>
+          <a:fillRef idx="0">
+            <a:schemeClr val="accent1"/>
+          </a:fillRef>
+          <a:effectRef idx="0">
+            <a:schemeClr val="accent1"/>
+          </a:effectRef>
+          <a:fontRef idx="minor">
+            <a:schemeClr val="tx1"/>
+          </a:fontRef>
+        </p:style>
+      </p:cxnSp>
     </p:spTree>
     <p:extLst>
       <p:ext uri="{BB962C8B-B14F-4D97-AF65-F5344CB8AC3E}">
-        <p14:creationId xmlns:p14="http://schemas.microsoft.com/office/powerpoint/2010/main" val="941143015"/>
+        <p14:creationId xmlns:p14="http://schemas.microsoft.com/office/powerpoint/2010/main" val="682173457"/>
       </p:ext>
     </p:extLst>
   </p:cSld>
@@ -6302,7 +6488,7 @@
         <p:cNvPr id="1" name="">
           <a:extLst>
             <a:ext uri="{FF2B5EF4-FFF2-40B4-BE49-F238E27FC236}">
-              <a16:creationId xmlns:a16="http://schemas.microsoft.com/office/drawing/2014/main" id="{99037F4C-32C0-5D76-9FC1-5825A527C1D9}"/>
+              <a16:creationId xmlns:a16="http://schemas.microsoft.com/office/drawing/2014/main" id="{A686C089-87C7-4D94-105A-406615DFC443}"/>
             </a:ext>
           </a:extLst>
         </p:cNvPr>
@@ -6319,10 +6505,10 @@
       </p:grpSpPr>
       <p:sp>
         <p:nvSpPr>
-          <p:cNvPr id="8" name="Прямоугольник 7">
-            <a:extLst>
-              <a:ext uri="{FF2B5EF4-FFF2-40B4-BE49-F238E27FC236}">
-                <a16:creationId xmlns:a16="http://schemas.microsoft.com/office/drawing/2014/main" id="{559BC5F6-CFB5-1C1D-8A49-03D32486F587}"/>
+          <p:cNvPr id="4" name="Прямоугольник 3">
+            <a:extLst>
+              <a:ext uri="{FF2B5EF4-FFF2-40B4-BE49-F238E27FC236}">
+                <a16:creationId xmlns:a16="http://schemas.microsoft.com/office/drawing/2014/main" id="{F1C6FA25-5D16-88B2-776E-547A78802176}"/>
               </a:ext>
             </a:extLst>
           </p:cNvPr>
@@ -6332,7 +6518,7 @@
         <p:spPr>
           <a:xfrm>
             <a:off x="0" y="1"/>
-            <a:ext cx="12191999" cy="1500188"/>
+            <a:ext cx="12192000" cy="1240970"/>
           </a:xfrm>
           <a:prstGeom prst="rect">
             <a:avLst/>
@@ -6374,7 +6560,7 @@
           <p:cNvPr id="3" name="Заголовок 2">
             <a:extLst>
               <a:ext uri="{FF2B5EF4-FFF2-40B4-BE49-F238E27FC236}">
-                <a16:creationId xmlns:a16="http://schemas.microsoft.com/office/drawing/2014/main" id="{0E8197C9-9249-7C3B-90D2-4912A9EE35FF}"/>
+                <a16:creationId xmlns:a16="http://schemas.microsoft.com/office/drawing/2014/main" id="{DD5291C6-E08B-20DD-F3C3-654DA885D4D2}"/>
               </a:ext>
             </a:extLst>
           </p:cNvPr>
@@ -6387,89 +6573,103 @@
         </p:nvSpPr>
         <p:spPr>
           <a:xfrm>
-            <a:off x="527050" y="587887"/>
-            <a:ext cx="10515600" cy="912302"/>
-          </a:xfrm>
-        </p:spPr>
-        <p:txBody>
-          <a:bodyPr>
+            <a:off x="519477" y="380263"/>
+            <a:ext cx="11095580" cy="1424696"/>
+          </a:xfrm>
+        </p:spPr>
+        <p:txBody>
+          <a:bodyPr anchor="t">
             <a:noAutofit/>
           </a:bodyPr>
           <a:lstStyle/>
           <a:p>
-            <a:r>
-              <a:rPr lang="ru-RU" dirty="0">
+            <a:pPr>
+              <a:lnSpc>
+                <a:spcPct val="100000"/>
+              </a:lnSpc>
+            </a:pPr>
+            <a:r>
+              <a:rPr lang="ru-RU" sz="5000" dirty="0">
                 <a:solidFill>
                   <a:schemeClr val="bg1"/>
                 </a:solidFill>
               </a:rPr>
-              <a:t>Селективная пайка</a:t>
-            </a:r>
-            <a:r>
-              <a:rPr lang="en-US" dirty="0">
-                <a:solidFill>
-                  <a:schemeClr val="bg1"/>
-                </a:solidFill>
-              </a:rPr>
-              <a:t> </a:t>
-            </a:r>
-            <a:r>
-              <a:rPr lang="ru-RU" dirty="0">
-                <a:solidFill>
-                  <a:schemeClr val="bg1"/>
-                </a:solidFill>
-                <a:latin typeface="+mn-lt"/>
-              </a:rPr>
-              <a:t>(</a:t>
-            </a:r>
-            <a:r>
-              <a:rPr lang="en-US" dirty="0">
-                <a:solidFill>
-                  <a:schemeClr val="bg1"/>
-                </a:solidFill>
-                <a:latin typeface="+mn-lt"/>
-              </a:rPr>
-              <a:t>THT</a:t>
-            </a:r>
-            <a:r>
-              <a:rPr lang="ru-RU" dirty="0">
-                <a:solidFill>
-                  <a:schemeClr val="bg1"/>
-                </a:solidFill>
-                <a:latin typeface="+mn-lt"/>
-              </a:rPr>
-              <a:t>/</a:t>
-            </a:r>
-            <a:r>
-              <a:rPr lang="en-US" dirty="0">
-                <a:solidFill>
-                  <a:schemeClr val="bg1"/>
-                </a:solidFill>
-                <a:latin typeface="+mn-lt"/>
-              </a:rPr>
-              <a:t>SMD</a:t>
-            </a:r>
-            <a:r>
-              <a:rPr lang="ru-RU" dirty="0">
-                <a:solidFill>
-                  <a:schemeClr val="bg1"/>
-                </a:solidFill>
-                <a:latin typeface="+mn-lt"/>
-              </a:rPr>
-              <a:t>)</a:t>
-            </a:r>
-            <a:endParaRPr lang="ru-RU" dirty="0">
-              <a:latin typeface="+mn-lt"/>
+              <a:t>Подбор параметров зубчатой передачи</a:t>
+            </a:r>
+            <a:endParaRPr lang="ru-RU" sz="5000" dirty="0">
+              <a:solidFill>
+                <a:srgbClr val="006CDC"/>
+              </a:solidFill>
             </a:endParaRPr>
           </a:p>
         </p:txBody>
       </p:sp>
-      <p:sp>
-        <p:nvSpPr>
-          <p:cNvPr id="2" name="TextBox 1">
-            <a:extLst>
-              <a:ext uri="{FF2B5EF4-FFF2-40B4-BE49-F238E27FC236}">
-                <a16:creationId xmlns:a16="http://schemas.microsoft.com/office/drawing/2014/main" id="{04D86AA3-897B-099E-D5AB-86E122DF02C9}"/>
+      <p:pic>
+        <p:nvPicPr>
+          <p:cNvPr id="11" name="Рисунок 10">
+            <a:extLst>
+              <a:ext uri="{FF2B5EF4-FFF2-40B4-BE49-F238E27FC236}">
+                <a16:creationId xmlns:a16="http://schemas.microsoft.com/office/drawing/2014/main" id="{13DB00FB-96DF-8319-9B2A-AC0D5FE844F6}"/>
+              </a:ext>
+            </a:extLst>
+          </p:cNvPr>
+          <p:cNvPicPr>
+            <a:picLocks noChangeAspect="1"/>
+          </p:cNvPicPr>
+          <p:nvPr/>
+        </p:nvPicPr>
+        <p:blipFill>
+          <a:blip r:embed="rId2"/>
+          <a:stretch>
+            <a:fillRect/>
+          </a:stretch>
+        </p:blipFill>
+        <p:spPr>
+          <a:xfrm>
+            <a:off x="5787840" y="2086952"/>
+            <a:ext cx="6284447" cy="2684095"/>
+          </a:xfrm>
+          <a:prstGeom prst="rect">
+            <a:avLst/>
+          </a:prstGeom>
+        </p:spPr>
+      </p:pic>
+      <p:pic>
+        <p:nvPicPr>
+          <p:cNvPr id="6" name="Рисунок 5">
+            <a:extLst>
+              <a:ext uri="{FF2B5EF4-FFF2-40B4-BE49-F238E27FC236}">
+                <a16:creationId xmlns:a16="http://schemas.microsoft.com/office/drawing/2014/main" id="{3D93E6F7-B979-8364-B943-81E1C0EDE2EA}"/>
+              </a:ext>
+            </a:extLst>
+          </p:cNvPr>
+          <p:cNvPicPr>
+            <a:picLocks noChangeAspect="1"/>
+          </p:cNvPicPr>
+          <p:nvPr/>
+        </p:nvPicPr>
+        <p:blipFill>
+          <a:blip r:embed="rId3"/>
+          <a:stretch>
+            <a:fillRect/>
+          </a:stretch>
+        </p:blipFill>
+        <p:spPr>
+          <a:xfrm>
+            <a:off x="97941" y="2478802"/>
+            <a:ext cx="6153907" cy="2684095"/>
+          </a:xfrm>
+          <a:prstGeom prst="rect">
+            <a:avLst/>
+          </a:prstGeom>
+        </p:spPr>
+      </p:pic>
+      <p:sp>
+        <p:nvSpPr>
+          <p:cNvPr id="12" name="TextBox 11">
+            <a:extLst>
+              <a:ext uri="{FF2B5EF4-FFF2-40B4-BE49-F238E27FC236}">
+                <a16:creationId xmlns:a16="http://schemas.microsoft.com/office/drawing/2014/main" id="{C56CDC37-F2B9-4FB1-947A-AC906C968E1E}"/>
               </a:ext>
             </a:extLst>
           </p:cNvPr>
@@ -6478,8 +6678,8 @@
         </p:nvSpPr>
         <p:spPr>
           <a:xfrm>
-            <a:off x="527050" y="1979218"/>
-            <a:ext cx="6262292" cy="4455835"/>
+            <a:off x="1447434" y="5405853"/>
+            <a:ext cx="3454920" cy="861774"/>
           </a:xfrm>
           <a:prstGeom prst="rect">
             <a:avLst/>
@@ -6492,157 +6692,68 @@
           </a:bodyPr>
           <a:lstStyle/>
           <a:p>
-            <a:pPr marL="342900" indent="-342900">
-              <a:lnSpc>
-                <a:spcPct val="150000"/>
-              </a:lnSpc>
-              <a:buBlip>
-                <a:blip>
-                  <a:extLst>
-                    <a:ext uri="{96DAC541-7B7A-43D3-8B79-37D633B846F1}">
-                      <asvg:svgBlip xmlns:asvg="http://schemas.microsoft.com/office/drawing/2016/SVG/main" r:embed="rId2"/>
-                    </a:ext>
-                  </a:extLst>
-                </a:blip>
-              </a:buBlip>
-            </a:pPr>
-            <a:r>
-              <a:rPr lang="ru-RU" sz="2400" dirty="0"/>
-              <a:t>Сплавление соединения (в мини ванне)</a:t>
-            </a:r>
-          </a:p>
-          <a:p>
-            <a:pPr>
-              <a:lnSpc>
-                <a:spcPct val="150000"/>
-              </a:lnSpc>
-            </a:pPr>
-            <a:endParaRPr lang="ru-RU" sz="2400" dirty="0"/>
-          </a:p>
-          <a:p>
-            <a:pPr>
-              <a:lnSpc>
-                <a:spcPct val="150000"/>
-              </a:lnSpc>
-            </a:pPr>
-            <a:r>
-              <a:rPr lang="ru-RU" sz="2400" dirty="0"/>
-              <a:t>Применяется при нежелательности</a:t>
-            </a:r>
-          </a:p>
-          <a:p>
-            <a:pPr>
-              <a:lnSpc>
-                <a:spcPct val="150000"/>
-              </a:lnSpc>
-            </a:pPr>
-            <a:r>
-              <a:rPr lang="ru-RU" sz="2400" dirty="0"/>
-              <a:t>погружения платы</a:t>
-            </a:r>
-          </a:p>
-          <a:p>
-            <a:pPr>
-              <a:lnSpc>
-                <a:spcPct val="150000"/>
-              </a:lnSpc>
-            </a:pPr>
-            <a:r>
-              <a:rPr lang="ru-RU" sz="2400" dirty="0"/>
-              <a:t>в паяльную ванну целиком</a:t>
-            </a:r>
-          </a:p>
-          <a:p>
-            <a:pPr>
-              <a:lnSpc>
-                <a:spcPct val="150000"/>
-              </a:lnSpc>
-            </a:pPr>
-            <a:endParaRPr lang="ru-RU" sz="2400" dirty="0"/>
-          </a:p>
-          <a:p>
-            <a:pPr>
-              <a:lnSpc>
-                <a:spcPct val="150000"/>
-              </a:lnSpc>
-            </a:pPr>
-            <a:r>
-              <a:rPr lang="ru-RU" sz="2400" dirty="0"/>
-              <a:t>Например, при наличии</a:t>
-            </a:r>
-          </a:p>
-          <a:p>
-            <a:pPr>
-              <a:lnSpc>
-                <a:spcPct val="150000"/>
-              </a:lnSpc>
-            </a:pPr>
-            <a:r>
-              <a:rPr lang="ru-RU" sz="2400" dirty="0"/>
-              <a:t>на плате </a:t>
-            </a:r>
-            <a:r>
-              <a:rPr lang="en-US" sz="2400" dirty="0"/>
-              <a:t>SMD</a:t>
-            </a:r>
-            <a:r>
-              <a:rPr lang="ru-RU" sz="2400" dirty="0"/>
-              <a:t>-компонентов</a:t>
-            </a:r>
-          </a:p>
-        </p:txBody>
-      </p:sp>
-      <p:pic>
-        <p:nvPicPr>
-          <p:cNvPr id="7170" name="Picture 2" descr="Picture background">
-            <a:extLst>
-              <a:ext uri="{FF2B5EF4-FFF2-40B4-BE49-F238E27FC236}">
-                <a16:creationId xmlns:a16="http://schemas.microsoft.com/office/drawing/2014/main" id="{ADFB9E91-1B76-938C-0E99-28076D414721}"/>
-              </a:ext>
-            </a:extLst>
-          </p:cNvPr>
-          <p:cNvPicPr>
-            <a:picLocks noChangeAspect="1" noChangeArrowheads="1"/>
-          </p:cNvPicPr>
+            <a:pPr algn="ctr"/>
+            <a:r>
+              <a:rPr lang="ru-RU" sz="2500" dirty="0"/>
+              <a:t>Расчет первого</a:t>
+            </a:r>
+          </a:p>
+          <a:p>
+            <a:pPr algn="ctr"/>
+            <a:r>
+              <a:rPr lang="ru-RU" sz="2500" dirty="0"/>
+              <a:t>зубчатого зацепления</a:t>
+            </a:r>
+          </a:p>
+        </p:txBody>
+      </p:sp>
+      <p:sp>
+        <p:nvSpPr>
+          <p:cNvPr id="16" name="TextBox 15">
+            <a:extLst>
+              <a:ext uri="{FF2B5EF4-FFF2-40B4-BE49-F238E27FC236}">
+                <a16:creationId xmlns:a16="http://schemas.microsoft.com/office/drawing/2014/main" id="{28A79708-87CD-7A15-7E95-B8D297DF8681}"/>
+              </a:ext>
+            </a:extLst>
+          </p:cNvPr>
+          <p:cNvSpPr txBox="1"/>
           <p:nvPr/>
-        </p:nvPicPr>
-        <p:blipFill>
-          <a:blip r:embed="rId3">
-            <a:extLst>
-              <a:ext uri="{28A0092B-C50C-407E-A947-70E740481C1C}">
-                <a14:useLocalDpi xmlns:a14="http://schemas.microsoft.com/office/drawing/2010/main" val="0"/>
-              </a:ext>
-            </a:extLst>
-          </a:blip>
-          <a:srcRect/>
-          <a:stretch>
-            <a:fillRect/>
-          </a:stretch>
-        </p:blipFill>
-        <p:spPr bwMode="auto">
-          <a:xfrm>
-            <a:off x="6288377" y="3012333"/>
-            <a:ext cx="5481864" cy="3086289"/>
+        </p:nvSpPr>
+        <p:spPr>
+          <a:xfrm>
+            <a:off x="7202603" y="5053040"/>
+            <a:ext cx="3454920" cy="861774"/>
           </a:xfrm>
           <a:prstGeom prst="rect">
             <a:avLst/>
           </a:prstGeom>
           <a:noFill/>
-          <a:extLst>
-            <a:ext uri="{909E8E84-426E-40DD-AFC4-6F175D3DCCD1}">
-              <a14:hiddenFill xmlns:a14="http://schemas.microsoft.com/office/drawing/2010/main">
-                <a:solidFill>
-                  <a:srgbClr val="FFFFFF"/>
-                </a:solidFill>
-              </a14:hiddenFill>
-            </a:ext>
-          </a:extLst>
-        </p:spPr>
-      </p:pic>
+        </p:spPr>
+        <p:txBody>
+          <a:bodyPr wrap="none" rtlCol="0">
+            <a:spAutoFit/>
+          </a:bodyPr>
+          <a:lstStyle/>
+          <a:p>
+            <a:pPr algn="ctr"/>
+            <a:r>
+              <a:rPr lang="ru-RU" sz="2500" dirty="0"/>
+              <a:t>Расчет второго</a:t>
+            </a:r>
+          </a:p>
+          <a:p>
+            <a:pPr algn="ctr"/>
+            <a:r>
+              <a:rPr lang="ru-RU" sz="2500" dirty="0"/>
+              <a:t>зубчатого зацепления</a:t>
+            </a:r>
+          </a:p>
+        </p:txBody>
+      </p:sp>
     </p:spTree>
     <p:extLst>
       <p:ext uri="{BB962C8B-B14F-4D97-AF65-F5344CB8AC3E}">
-        <p14:creationId xmlns:p14="http://schemas.microsoft.com/office/powerpoint/2010/main" val="3829991518"/>
+        <p14:creationId xmlns:p14="http://schemas.microsoft.com/office/powerpoint/2010/main" val="3529672497"/>
       </p:ext>
     </p:extLst>
   </p:cSld>
@@ -6660,7 +6771,7 @@
         <p:cNvPr id="1" name="">
           <a:extLst>
             <a:ext uri="{FF2B5EF4-FFF2-40B4-BE49-F238E27FC236}">
-              <a16:creationId xmlns:a16="http://schemas.microsoft.com/office/drawing/2014/main" id="{B515F50E-DA64-0F95-A59B-970E0E23A8F2}"/>
+              <a16:creationId xmlns:a16="http://schemas.microsoft.com/office/drawing/2014/main" id="{1C07BCD2-6685-F997-7372-46C5F2752D14}"/>
             </a:ext>
           </a:extLst>
         </p:cNvPr>
@@ -6677,10 +6788,10 @@
       </p:grpSpPr>
       <p:sp>
         <p:nvSpPr>
-          <p:cNvPr id="8" name="Прямоугольник 7">
-            <a:extLst>
-              <a:ext uri="{FF2B5EF4-FFF2-40B4-BE49-F238E27FC236}">
-                <a16:creationId xmlns:a16="http://schemas.microsoft.com/office/drawing/2014/main" id="{BC8EBB15-D735-FA6D-0941-08E6AFADB126}"/>
+          <p:cNvPr id="4" name="Прямоугольник 3">
+            <a:extLst>
+              <a:ext uri="{FF2B5EF4-FFF2-40B4-BE49-F238E27FC236}">
+                <a16:creationId xmlns:a16="http://schemas.microsoft.com/office/drawing/2014/main" id="{3FFDB5DF-8668-1262-2634-6E40DA19EBC8}"/>
               </a:ext>
             </a:extLst>
           </p:cNvPr>
@@ -6690,7 +6801,7 @@
         <p:spPr>
           <a:xfrm>
             <a:off x="0" y="1"/>
-            <a:ext cx="12191999" cy="1500188"/>
+            <a:ext cx="12192000" cy="1240970"/>
           </a:xfrm>
           <a:prstGeom prst="rect">
             <a:avLst/>
@@ -6732,7 +6843,7 @@
           <p:cNvPr id="3" name="Заголовок 2">
             <a:extLst>
               <a:ext uri="{FF2B5EF4-FFF2-40B4-BE49-F238E27FC236}">
-                <a16:creationId xmlns:a16="http://schemas.microsoft.com/office/drawing/2014/main" id="{C7A77925-252C-E11C-BE9F-238DCE9270E2}"/>
+                <a16:creationId xmlns:a16="http://schemas.microsoft.com/office/drawing/2014/main" id="{61381B34-302F-4070-C2A9-A8D6B327BC89}"/>
               </a:ext>
             </a:extLst>
           </p:cNvPr>
@@ -6745,34 +6856,43 @@
         </p:nvSpPr>
         <p:spPr>
           <a:xfrm>
-            <a:off x="527050" y="587887"/>
-            <a:ext cx="10515600" cy="912302"/>
-          </a:xfrm>
-        </p:spPr>
-        <p:txBody>
-          <a:bodyPr>
+            <a:off x="519477" y="380263"/>
+            <a:ext cx="11095580" cy="1424696"/>
+          </a:xfrm>
+        </p:spPr>
+        <p:txBody>
+          <a:bodyPr anchor="t">
             <a:noAutofit/>
           </a:bodyPr>
           <a:lstStyle/>
           <a:p>
-            <a:r>
-              <a:rPr lang="ru-RU" dirty="0">
+            <a:pPr>
+              <a:lnSpc>
+                <a:spcPct val="100000"/>
+              </a:lnSpc>
+            </a:pPr>
+            <a:r>
+              <a:rPr lang="ru-RU" sz="5000" dirty="0">
                 <a:solidFill>
                   <a:schemeClr val="bg1"/>
                 </a:solidFill>
               </a:rPr>
-              <a:t>Автоматический монтаж</a:t>
-            </a:r>
-            <a:endParaRPr lang="ru-RU" dirty="0"/>
-          </a:p>
-        </p:txBody>
-      </p:sp>
-      <p:sp>
-        <p:nvSpPr>
-          <p:cNvPr id="10" name="TextBox 9">
-            <a:extLst>
-              <a:ext uri="{FF2B5EF4-FFF2-40B4-BE49-F238E27FC236}">
-                <a16:creationId xmlns:a16="http://schemas.microsoft.com/office/drawing/2014/main" id="{5B0600C2-97D6-1A4A-C085-E1E08F59118B}"/>
+              <a:t>Составление спектра нагружений</a:t>
+            </a:r>
+            <a:endParaRPr lang="ru-RU" sz="5000" dirty="0">
+              <a:solidFill>
+                <a:srgbClr val="006CDC"/>
+              </a:solidFill>
+            </a:endParaRPr>
+          </a:p>
+        </p:txBody>
+      </p:sp>
+      <p:sp>
+        <p:nvSpPr>
+          <p:cNvPr id="12" name="TextBox 11">
+            <a:extLst>
+              <a:ext uri="{FF2B5EF4-FFF2-40B4-BE49-F238E27FC236}">
+                <a16:creationId xmlns:a16="http://schemas.microsoft.com/office/drawing/2014/main" id="{2B4A01DD-7072-3E7D-2836-A05FA285FF80}"/>
               </a:ext>
             </a:extLst>
           </p:cNvPr>
@@ -6781,8 +6901,8 @@
         </p:nvSpPr>
         <p:spPr>
           <a:xfrm>
-            <a:off x="527050" y="1794161"/>
-            <a:ext cx="8765092" cy="4708981"/>
+            <a:off x="613002" y="5344591"/>
+            <a:ext cx="5402761" cy="861774"/>
           </a:xfrm>
           <a:prstGeom prst="rect">
             <a:avLst/>
@@ -6795,118 +6915,128 @@
           </a:bodyPr>
           <a:lstStyle/>
           <a:p>
-            <a:pPr marL="342900" indent="-342900">
-              <a:lnSpc>
-                <a:spcPct val="150000"/>
-              </a:lnSpc>
-              <a:buBlip>
-                <a:blip>
-                  <a:extLst>
-                    <a:ext uri="{96DAC541-7B7A-43D3-8B79-37D633B846F1}">
-                      <asvg:svgBlip xmlns:asvg="http://schemas.microsoft.com/office/drawing/2016/SVG/main" r:embed="rId2"/>
-                    </a:ext>
-                  </a:extLst>
-                </a:blip>
-              </a:buBlip>
-            </a:pPr>
-            <a:r>
-              <a:rPr lang="ru-RU" sz="2400" dirty="0"/>
-              <a:t>Нанесение припоя (по трафарету)</a:t>
-            </a:r>
-          </a:p>
-          <a:p>
-            <a:pPr marL="342900" indent="-342900">
-              <a:lnSpc>
-                <a:spcPct val="150000"/>
-              </a:lnSpc>
-              <a:buBlip>
-                <a:blip>
-                  <a:extLst>
-                    <a:ext uri="{96DAC541-7B7A-43D3-8B79-37D633B846F1}">
-                      <asvg:svgBlip xmlns:asvg="http://schemas.microsoft.com/office/drawing/2016/SVG/main" r:embed="rId2"/>
-                    </a:ext>
-                  </a:extLst>
-                </a:blip>
-              </a:buBlip>
-            </a:pPr>
-            <a:r>
-              <a:rPr lang="ru-RU" sz="2400" dirty="0"/>
-              <a:t>Установка компонентов</a:t>
-            </a:r>
-            <a:r>
-              <a:rPr lang="en-US" sz="2400" dirty="0"/>
-              <a:t> </a:t>
-            </a:r>
-            <a:r>
-              <a:rPr lang="ru-RU" sz="2400" dirty="0"/>
-              <a:t>(робот)</a:t>
-            </a:r>
-          </a:p>
-          <a:p>
-            <a:pPr marL="342900" indent="-342900">
-              <a:lnSpc>
-                <a:spcPct val="150000"/>
-              </a:lnSpc>
-              <a:buBlip>
-                <a:blip>
-                  <a:extLst>
-                    <a:ext uri="{96DAC541-7B7A-43D3-8B79-37D633B846F1}">
-                      <asvg:svgBlip xmlns:asvg="http://schemas.microsoft.com/office/drawing/2016/SVG/main" r:embed="rId2"/>
-                    </a:ext>
-                  </a:extLst>
-                </a:blip>
-              </a:buBlip>
-            </a:pPr>
-            <a:r>
-              <a:rPr lang="ru-RU" sz="2400" dirty="0"/>
-              <a:t>Сплавление соединения (в печи)</a:t>
-            </a:r>
-          </a:p>
-          <a:p>
-            <a:endParaRPr lang="ru-RU" sz="2400" dirty="0"/>
-          </a:p>
-          <a:p>
-            <a:r>
-              <a:rPr lang="ru-RU" sz="2400" dirty="0"/>
-              <a:t>Инструменты:</a:t>
-            </a:r>
-          </a:p>
-          <a:p>
-            <a:r>
-              <a:rPr lang="ru-RU" sz="2400" dirty="0"/>
-              <a:t>Вплоть до целого предприятия. Это настоящий конвейер</a:t>
-            </a:r>
-          </a:p>
-          <a:p>
-            <a:endParaRPr lang="ru-RU" sz="2400" dirty="0"/>
-          </a:p>
-          <a:p>
-            <a:r>
-              <a:rPr lang="ru-RU" sz="2400" dirty="0"/>
-              <a:t>Время работы самое низкое</a:t>
-            </a:r>
-          </a:p>
-          <a:p>
-            <a:r>
-              <a:rPr lang="ru-RU" sz="2400" dirty="0"/>
-              <a:t>Качество стабильно высокое</a:t>
-            </a:r>
-          </a:p>
-          <a:p>
-            <a:endParaRPr lang="ru-RU" sz="2400" dirty="0"/>
-          </a:p>
-          <a:p>
-            <a:r>
-              <a:rPr lang="ru-RU" sz="2400" dirty="0"/>
-              <a:t>Применение: от среднего до крупносерийного производства</a:t>
-            </a:r>
-          </a:p>
-        </p:txBody>
-      </p:sp>
+            <a:pPr algn="ctr"/>
+            <a:r>
+              <a:rPr lang="ru-RU" sz="2500" dirty="0"/>
+              <a:t>Нормальный закон распределения</a:t>
+            </a:r>
+          </a:p>
+          <a:p>
+            <a:pPr algn="ctr"/>
+            <a:r>
+              <a:rPr lang="ru-RU" sz="2500" dirty="0"/>
+              <a:t>скоростей с делением на участки</a:t>
+            </a:r>
+          </a:p>
+        </p:txBody>
+      </p:sp>
+      <p:sp>
+        <p:nvSpPr>
+          <p:cNvPr id="16" name="TextBox 15">
+            <a:extLst>
+              <a:ext uri="{FF2B5EF4-FFF2-40B4-BE49-F238E27FC236}">
+                <a16:creationId xmlns:a16="http://schemas.microsoft.com/office/drawing/2014/main" id="{08C8F4DB-8167-F11A-013B-E215F21F0F17}"/>
+              </a:ext>
+            </a:extLst>
+          </p:cNvPr>
+          <p:cNvSpPr txBox="1"/>
+          <p:nvPr/>
+        </p:nvSpPr>
+        <p:spPr>
+          <a:xfrm>
+            <a:off x="7296913" y="5344591"/>
+            <a:ext cx="3373616" cy="861774"/>
+          </a:xfrm>
+          <a:prstGeom prst="rect">
+            <a:avLst/>
+          </a:prstGeom>
+          <a:noFill/>
+        </p:spPr>
+        <p:txBody>
+          <a:bodyPr wrap="none" rtlCol="0">
+            <a:spAutoFit/>
+          </a:bodyPr>
+          <a:lstStyle/>
+          <a:p>
+            <a:pPr algn="ctr"/>
+            <a:r>
+              <a:rPr lang="ru-RU" sz="2500" dirty="0"/>
+              <a:t>Значение мощностей</a:t>
+            </a:r>
+          </a:p>
+          <a:p>
+            <a:pPr algn="ctr"/>
+            <a:r>
+              <a:rPr lang="ru-RU" sz="2500" dirty="0"/>
+              <a:t>по участкам</a:t>
+            </a:r>
+          </a:p>
+        </p:txBody>
+      </p:sp>
+      <p:pic>
+        <p:nvPicPr>
+          <p:cNvPr id="5" name="Рисунок 4">
+            <a:extLst>
+              <a:ext uri="{FF2B5EF4-FFF2-40B4-BE49-F238E27FC236}">
+                <a16:creationId xmlns:a16="http://schemas.microsoft.com/office/drawing/2014/main" id="{A87CD8E5-B08B-2AE3-F062-7F9C7EB10714}"/>
+              </a:ext>
+            </a:extLst>
+          </p:cNvPr>
+          <p:cNvPicPr>
+            <a:picLocks noChangeAspect="1"/>
+          </p:cNvPicPr>
+          <p:nvPr/>
+        </p:nvPicPr>
+        <p:blipFill>
+          <a:blip r:embed="rId2"/>
+          <a:stretch>
+            <a:fillRect/>
+          </a:stretch>
+        </p:blipFill>
+        <p:spPr>
+          <a:xfrm>
+            <a:off x="443277" y="1513409"/>
+            <a:ext cx="5742212" cy="3647453"/>
+          </a:xfrm>
+          <a:prstGeom prst="rect">
+            <a:avLst/>
+          </a:prstGeom>
+        </p:spPr>
+      </p:pic>
+      <p:pic>
+        <p:nvPicPr>
+          <p:cNvPr id="8" name="Рисунок 7">
+            <a:extLst>
+              <a:ext uri="{FF2B5EF4-FFF2-40B4-BE49-F238E27FC236}">
+                <a16:creationId xmlns:a16="http://schemas.microsoft.com/office/drawing/2014/main" id="{7C41784F-A727-7C8C-A26D-E7D027853316}"/>
+              </a:ext>
+            </a:extLst>
+          </p:cNvPr>
+          <p:cNvPicPr>
+            <a:picLocks noChangeAspect="1"/>
+          </p:cNvPicPr>
+          <p:nvPr/>
+        </p:nvPicPr>
+        <p:blipFill>
+          <a:blip r:embed="rId3"/>
+          <a:stretch>
+            <a:fillRect/>
+          </a:stretch>
+        </p:blipFill>
+        <p:spPr>
+          <a:xfrm>
+            <a:off x="6352386" y="1621233"/>
+            <a:ext cx="5262671" cy="3431807"/>
+          </a:xfrm>
+          <a:prstGeom prst="rect">
+            <a:avLst/>
+          </a:prstGeom>
+        </p:spPr>
+      </p:pic>
     </p:spTree>
     <p:extLst>
       <p:ext uri="{BB962C8B-B14F-4D97-AF65-F5344CB8AC3E}">
-        <p14:creationId xmlns:p14="http://schemas.microsoft.com/office/powerpoint/2010/main" val="2272132519"/>
+        <p14:creationId xmlns:p14="http://schemas.microsoft.com/office/powerpoint/2010/main" val="351143347"/>
       </p:ext>
     </p:extLst>
   </p:cSld>
@@ -6924,7 +7054,7 @@
         <p:cNvPr id="1" name="">
           <a:extLst>
             <a:ext uri="{FF2B5EF4-FFF2-40B4-BE49-F238E27FC236}">
-              <a16:creationId xmlns:a16="http://schemas.microsoft.com/office/drawing/2014/main" id="{99AD5A47-8C8A-5250-19BB-8530336FCF83}"/>
+              <a16:creationId xmlns:a16="http://schemas.microsoft.com/office/drawing/2014/main" id="{74FEA7E0-BB50-6ECD-0979-1C86031C87A2}"/>
             </a:ext>
           </a:extLst>
         </p:cNvPr>
@@ -6941,10 +7071,10 @@
       </p:grpSpPr>
       <p:sp>
         <p:nvSpPr>
-          <p:cNvPr id="8" name="Прямоугольник 7">
-            <a:extLst>
-              <a:ext uri="{FF2B5EF4-FFF2-40B4-BE49-F238E27FC236}">
-                <a16:creationId xmlns:a16="http://schemas.microsoft.com/office/drawing/2014/main" id="{6A733D79-4EF8-0C9F-6F37-083C58ACED43}"/>
+          <p:cNvPr id="4" name="Прямоугольник 3">
+            <a:extLst>
+              <a:ext uri="{FF2B5EF4-FFF2-40B4-BE49-F238E27FC236}">
+                <a16:creationId xmlns:a16="http://schemas.microsoft.com/office/drawing/2014/main" id="{8CF7B96A-C774-01BB-8F44-CA4BE7A93150}"/>
               </a:ext>
             </a:extLst>
           </p:cNvPr>
@@ -6954,7 +7084,7 @@
         <p:spPr>
           <a:xfrm>
             <a:off x="0" y="1"/>
-            <a:ext cx="12191999" cy="1500188"/>
+            <a:ext cx="12192000" cy="1240970"/>
           </a:xfrm>
           <a:prstGeom prst="rect">
             <a:avLst/>
@@ -6996,7 +7126,7 @@
           <p:cNvPr id="3" name="Заголовок 2">
             <a:extLst>
               <a:ext uri="{FF2B5EF4-FFF2-40B4-BE49-F238E27FC236}">
-                <a16:creationId xmlns:a16="http://schemas.microsoft.com/office/drawing/2014/main" id="{5CCF58B3-FDA2-7BC7-78F2-CA12358503E6}"/>
+                <a16:creationId xmlns:a16="http://schemas.microsoft.com/office/drawing/2014/main" id="{1D4782FC-111F-B655-C913-C75C6DB161C9}"/>
               </a:ext>
             </a:extLst>
           </p:cNvPr>
@@ -7009,44 +7139,43 @@
         </p:nvSpPr>
         <p:spPr>
           <a:xfrm>
-            <a:off x="527050" y="478972"/>
-            <a:ext cx="10515600" cy="1824662"/>
-          </a:xfrm>
-        </p:spPr>
-        <p:txBody>
-          <a:bodyPr>
+            <a:off x="519477" y="380263"/>
+            <a:ext cx="11095580" cy="1424696"/>
+          </a:xfrm>
+        </p:spPr>
+        <p:txBody>
+          <a:bodyPr anchor="t">
             <a:noAutofit/>
           </a:bodyPr>
           <a:lstStyle/>
           <a:p>
-            <a:r>
-              <a:rPr lang="ru-RU" dirty="0">
+            <a:pPr>
+              <a:lnSpc>
+                <a:spcPct val="100000"/>
+              </a:lnSpc>
+            </a:pPr>
+            <a:r>
+              <a:rPr lang="ru-RU" sz="5000" dirty="0">
                 <a:solidFill>
                   <a:schemeClr val="bg1"/>
                 </a:solidFill>
               </a:rPr>
-              <a:t>Автоматический монтаж</a:t>
-            </a:r>
-            <a:br>
-              <a:rPr lang="ru-RU" dirty="0">
-                <a:solidFill>
-                  <a:schemeClr val="bg1"/>
-                </a:solidFill>
-              </a:rPr>
-            </a:br>
-            <a:r>
-              <a:rPr lang="ru-RU" dirty="0"/>
-              <a:t>робот-установщик</a:t>
-            </a:r>
-          </a:p>
-        </p:txBody>
-      </p:sp>
-      <p:sp>
-        <p:nvSpPr>
-          <p:cNvPr id="10" name="TextBox 9">
-            <a:extLst>
-              <a:ext uri="{FF2B5EF4-FFF2-40B4-BE49-F238E27FC236}">
-                <a16:creationId xmlns:a16="http://schemas.microsoft.com/office/drawing/2014/main" id="{CFA0F0D5-A523-FEB7-E371-E68B3D6A7706}"/>
+              <a:t>Расчет пары подшипников на ресурс</a:t>
+            </a:r>
+            <a:endParaRPr lang="ru-RU" sz="5000" dirty="0">
+              <a:solidFill>
+                <a:srgbClr val="006CDC"/>
+              </a:solidFill>
+            </a:endParaRPr>
+          </a:p>
+        </p:txBody>
+      </p:sp>
+      <p:sp>
+        <p:nvSpPr>
+          <p:cNvPr id="16" name="TextBox 15">
+            <a:extLst>
+              <a:ext uri="{FF2B5EF4-FFF2-40B4-BE49-F238E27FC236}">
+                <a16:creationId xmlns:a16="http://schemas.microsoft.com/office/drawing/2014/main" id="{E482C7A0-DEC3-CE6F-EBE7-AC931F5FDD2B}"/>
               </a:ext>
             </a:extLst>
           </p:cNvPr>
@@ -7055,8 +7184,8 @@
         </p:nvSpPr>
         <p:spPr>
           <a:xfrm>
-            <a:off x="527050" y="2477191"/>
-            <a:ext cx="7578806" cy="3901837"/>
+            <a:off x="519477" y="5615963"/>
+            <a:ext cx="3665939" cy="861774"/>
           </a:xfrm>
           <a:prstGeom prst="rect">
             <a:avLst/>
@@ -7069,144 +7198,151 @@
           </a:bodyPr>
           <a:lstStyle/>
           <a:p>
-            <a:pPr>
-              <a:lnSpc>
-                <a:spcPct val="150000"/>
-              </a:lnSpc>
-            </a:pPr>
-            <a:r>
-              <a:rPr lang="ru-RU" sz="2400" dirty="0"/>
-              <a:t>В робот загружаются кассеты с компонентами.</a:t>
-            </a:r>
-          </a:p>
-          <a:p>
-            <a:pPr>
-              <a:lnSpc>
-                <a:spcPct val="150000"/>
-              </a:lnSpc>
-            </a:pPr>
-            <a:r>
-              <a:rPr lang="ru-RU" sz="2400" dirty="0"/>
-              <a:t>Установка происходит по программе,</a:t>
-            </a:r>
-          </a:p>
-          <a:p>
-            <a:pPr>
-              <a:lnSpc>
-                <a:spcPct val="150000"/>
-              </a:lnSpc>
-            </a:pPr>
-            <a:r>
-              <a:rPr lang="ru-RU" sz="2400" dirty="0"/>
-              <a:t>настроенной перед запуском</a:t>
-            </a:r>
-          </a:p>
-          <a:p>
-            <a:pPr>
-              <a:lnSpc>
-                <a:spcPct val="150000"/>
-              </a:lnSpc>
-            </a:pPr>
-            <a:endParaRPr lang="ru-RU" sz="2400" dirty="0"/>
-          </a:p>
-          <a:p>
-            <a:pPr>
-              <a:lnSpc>
-                <a:spcPct val="150000"/>
-              </a:lnSpc>
-            </a:pPr>
-            <a:r>
-              <a:rPr lang="ru-RU" sz="2400" dirty="0"/>
-              <a:t>Захват осуществляется вакуумной присоской.</a:t>
-            </a:r>
-          </a:p>
-          <a:p>
-            <a:pPr>
-              <a:lnSpc>
-                <a:spcPct val="150000"/>
-              </a:lnSpc>
-            </a:pPr>
-            <a:r>
-              <a:rPr lang="ru-RU" sz="2400" dirty="0"/>
-              <a:t>Наиболее распространены </a:t>
-            </a:r>
-            <a:r>
-              <a:rPr lang="en-US" sz="2400" dirty="0"/>
-              <a:t>SMD-</a:t>
-            </a:r>
-            <a:r>
-              <a:rPr lang="ru-RU" sz="2400" dirty="0"/>
-              <a:t>установщики</a:t>
-            </a:r>
-            <a:br>
-              <a:rPr lang="ru-RU" sz="2400" dirty="0"/>
-            </a:br>
-            <a:r>
-              <a:rPr lang="ru-RU" sz="2400" dirty="0"/>
-              <a:t>(</a:t>
-            </a:r>
-            <a:r>
-              <a:rPr lang="en-US" sz="2400" dirty="0"/>
-              <a:t>THT</a:t>
-            </a:r>
-            <a:r>
-              <a:rPr lang="ru-RU" sz="2400" dirty="0"/>
-              <a:t>-компоненты слишком тяжелые для присосок)</a:t>
+            <a:pPr algn="ctr"/>
+            <a:r>
+              <a:rPr lang="ru-RU" sz="2500" dirty="0"/>
+              <a:t>Схема промежуточного</a:t>
+            </a:r>
+          </a:p>
+          <a:p>
+            <a:pPr algn="ctr"/>
+            <a:r>
+              <a:rPr lang="ru-RU" sz="2500" dirty="0"/>
+              <a:t>вала редуктора</a:t>
             </a:r>
           </a:p>
         </p:txBody>
       </p:sp>
       <p:pic>
         <p:nvPicPr>
-          <p:cNvPr id="9218" name="Picture 2" descr="Picture background">
-            <a:extLst>
-              <a:ext uri="{FF2B5EF4-FFF2-40B4-BE49-F238E27FC236}">
-                <a16:creationId xmlns:a16="http://schemas.microsoft.com/office/drawing/2014/main" id="{DE53B4EF-4A22-A040-0B26-C6E5053685DC}"/>
+          <p:cNvPr id="6" name="Рисунок 5">
+            <a:extLst>
+              <a:ext uri="{FF2B5EF4-FFF2-40B4-BE49-F238E27FC236}">
+                <a16:creationId xmlns:a16="http://schemas.microsoft.com/office/drawing/2014/main" id="{6CE7B35F-93A7-1E65-23F8-3C39303C6C95}"/>
               </a:ext>
             </a:extLst>
           </p:cNvPr>
           <p:cNvPicPr>
-            <a:picLocks noChangeAspect="1" noChangeArrowheads="1"/>
+            <a:picLocks noChangeAspect="1"/>
           </p:cNvPicPr>
           <p:nvPr/>
         </p:nvPicPr>
-        <p:blipFill rotWithShape="1">
-          <a:blip r:embed="rId2">
-            <a:extLst>
-              <a:ext uri="{28A0092B-C50C-407E-A947-70E740481C1C}">
-                <a14:useLocalDpi xmlns:a14="http://schemas.microsoft.com/office/drawing/2010/main" val="0"/>
-              </a:ext>
-            </a:extLst>
-          </a:blip>
-          <a:srcRect l="14973" t="5666" r="13327" b="18959"/>
+        <p:blipFill>
+          <a:blip r:embed="rId2"/>
           <a:stretch>
             <a:fillRect/>
           </a:stretch>
         </p:blipFill>
-        <p:spPr bwMode="auto">
-          <a:xfrm>
-            <a:off x="7761514" y="2939143"/>
-            <a:ext cx="4005431" cy="2368529"/>
+        <p:spPr>
+          <a:xfrm>
+            <a:off x="200028" y="1584302"/>
+            <a:ext cx="4191585" cy="3915321"/>
+          </a:xfrm>
+          <a:prstGeom prst="rect">
+            <a:avLst/>
+          </a:prstGeom>
+        </p:spPr>
+      </p:pic>
+      <p:pic>
+        <p:nvPicPr>
+          <p:cNvPr id="9" name="Рисунок 8">
+            <a:extLst>
+              <a:ext uri="{FF2B5EF4-FFF2-40B4-BE49-F238E27FC236}">
+                <a16:creationId xmlns:a16="http://schemas.microsoft.com/office/drawing/2014/main" id="{FE98A4D0-50A9-998E-8DD3-CF9FEE45679F}"/>
+              </a:ext>
+            </a:extLst>
+          </p:cNvPr>
+          <p:cNvPicPr>
+            <a:picLocks noChangeAspect="1"/>
+          </p:cNvPicPr>
+          <p:nvPr/>
+        </p:nvPicPr>
+        <p:blipFill>
+          <a:blip r:embed="rId3"/>
+          <a:stretch>
+            <a:fillRect/>
+          </a:stretch>
+        </p:blipFill>
+        <p:spPr>
+          <a:xfrm>
+            <a:off x="8244922" y="2185221"/>
+            <a:ext cx="3747050" cy="3121254"/>
+          </a:xfrm>
+          <a:prstGeom prst="rect">
+            <a:avLst/>
+          </a:prstGeom>
+        </p:spPr>
+      </p:pic>
+      <p:pic>
+        <p:nvPicPr>
+          <p:cNvPr id="11" name="Рисунок 10">
+            <a:extLst>
+              <a:ext uri="{FF2B5EF4-FFF2-40B4-BE49-F238E27FC236}">
+                <a16:creationId xmlns:a16="http://schemas.microsoft.com/office/drawing/2014/main" id="{FA639684-D792-9F98-0785-678DDFBFC6B0}"/>
+              </a:ext>
+            </a:extLst>
+          </p:cNvPr>
+          <p:cNvPicPr>
+            <a:picLocks noChangeAspect="1"/>
+          </p:cNvPicPr>
+          <p:nvPr/>
+        </p:nvPicPr>
+        <p:blipFill>
+          <a:blip r:embed="rId4"/>
+          <a:stretch>
+            <a:fillRect/>
+          </a:stretch>
+        </p:blipFill>
+        <p:spPr>
+          <a:xfrm>
+            <a:off x="4448238" y="2185221"/>
+            <a:ext cx="3731599" cy="3121254"/>
+          </a:xfrm>
+          <a:prstGeom prst="rect">
+            <a:avLst/>
+          </a:prstGeom>
+        </p:spPr>
+      </p:pic>
+      <p:sp>
+        <p:nvSpPr>
+          <p:cNvPr id="13" name="TextBox 12">
+            <a:extLst>
+              <a:ext uri="{FF2B5EF4-FFF2-40B4-BE49-F238E27FC236}">
+                <a16:creationId xmlns:a16="http://schemas.microsoft.com/office/drawing/2014/main" id="{C6A80FC2-AADC-0A53-C267-F2C7C9A1A699}"/>
+              </a:ext>
+            </a:extLst>
+          </p:cNvPr>
+          <p:cNvSpPr txBox="1"/>
+          <p:nvPr/>
+        </p:nvSpPr>
+        <p:spPr>
+          <a:xfrm>
+            <a:off x="5946410" y="5615963"/>
+            <a:ext cx="4401205" cy="477054"/>
           </a:xfrm>
           <a:prstGeom prst="rect">
             <a:avLst/>
           </a:prstGeom>
           <a:noFill/>
-          <a:extLst>
-            <a:ext uri="{909E8E84-426E-40DD-AFC4-6F175D3DCCD1}">
-              <a14:hiddenFill xmlns:a14="http://schemas.microsoft.com/office/drawing/2010/main">
-                <a:solidFill>
-                  <a:srgbClr val="FFFFFF"/>
-                </a:solidFill>
-              </a14:hiddenFill>
-            </a:ext>
-          </a:extLst>
-        </p:spPr>
-      </p:pic>
+        </p:spPr>
+        <p:txBody>
+          <a:bodyPr wrap="none" rtlCol="0">
+            <a:spAutoFit/>
+          </a:bodyPr>
+          <a:lstStyle/>
+          <a:p>
+            <a:pPr algn="ctr"/>
+            <a:r>
+              <a:rPr lang="ru-RU" sz="2500" dirty="0"/>
+              <a:t>Установка усилий для колес</a:t>
+            </a:r>
+          </a:p>
+        </p:txBody>
+      </p:sp>
     </p:spTree>
     <p:extLst>
       <p:ext uri="{BB962C8B-B14F-4D97-AF65-F5344CB8AC3E}">
-        <p14:creationId xmlns:p14="http://schemas.microsoft.com/office/powerpoint/2010/main" val="3598630514"/>
+        <p14:creationId xmlns:p14="http://schemas.microsoft.com/office/powerpoint/2010/main" val="2144606391"/>
       </p:ext>
     </p:extLst>
   </p:cSld>

--- a/МРиПЭ/Защита.pptx
+++ b/МРиПЭ/Защита.pptx
@@ -5,7 +5,7 @@
     <p:sldMasterId id="2147483648" r:id="rId1"/>
   </p:sldMasterIdLst>
   <p:notesMasterIdLst>
-    <p:notesMasterId r:id="rId13"/>
+    <p:notesMasterId r:id="rId14"/>
   </p:notesMasterIdLst>
   <p:sldIdLst>
     <p:sldId id="256" r:id="rId2"/>
@@ -17,8 +17,9 @@
     <p:sldId id="264" r:id="rId8"/>
     <p:sldId id="265" r:id="rId9"/>
     <p:sldId id="266" r:id="rId10"/>
-    <p:sldId id="267" r:id="rId11"/>
-    <p:sldId id="268" r:id="rId12"/>
+    <p:sldId id="269" r:id="rId11"/>
+    <p:sldId id="267" r:id="rId12"/>
+    <p:sldId id="268" r:id="rId13"/>
   </p:sldIdLst>
   <p:sldSz cx="12192000" cy="6858000"/>
   <p:notesSz cx="6858000" cy="9144000"/>
@@ -207,7 +208,7 @@
           <a:p>
             <a:fld id="{1CDB33AD-5C05-4723-B389-E1E81ABFFAD3}" type="datetimeFigureOut">
               <a:rPr lang="ru-RU" smtClean="0"/>
-              <a:t>05.05.2026</a:t>
+              <a:t>06.05.2026</a:t>
             </a:fld>
             <a:endParaRPr lang="ru-RU"/>
           </a:p>
@@ -621,7 +622,7 @@
           <a:p>
             <a:fld id="{EE7FD824-9642-443D-A094-80DC1BD911E3}" type="datetimeFigureOut">
               <a:rPr lang="ru-RU" smtClean="0"/>
-              <a:t>05.05.2026</a:t>
+              <a:t>06.05.2026</a:t>
             </a:fld>
             <a:endParaRPr lang="ru-RU"/>
           </a:p>
@@ -819,7 +820,7 @@
           <a:p>
             <a:fld id="{EE7FD824-9642-443D-A094-80DC1BD911E3}" type="datetimeFigureOut">
               <a:rPr lang="ru-RU" smtClean="0"/>
-              <a:t>05.05.2026</a:t>
+              <a:t>06.05.2026</a:t>
             </a:fld>
             <a:endParaRPr lang="ru-RU"/>
           </a:p>
@@ -1027,7 +1028,7 @@
           <a:p>
             <a:fld id="{EE7FD824-9642-443D-A094-80DC1BD911E3}" type="datetimeFigureOut">
               <a:rPr lang="ru-RU" smtClean="0"/>
-              <a:t>05.05.2026</a:t>
+              <a:t>06.05.2026</a:t>
             </a:fld>
             <a:endParaRPr lang="ru-RU"/>
           </a:p>
@@ -1225,7 +1226,7 @@
           <a:p>
             <a:fld id="{EE7FD824-9642-443D-A094-80DC1BD911E3}" type="datetimeFigureOut">
               <a:rPr lang="ru-RU" smtClean="0"/>
-              <a:t>05.05.2026</a:t>
+              <a:t>06.05.2026</a:t>
             </a:fld>
             <a:endParaRPr lang="ru-RU"/>
           </a:p>
@@ -1500,7 +1501,7 @@
           <a:p>
             <a:fld id="{EE7FD824-9642-443D-A094-80DC1BD911E3}" type="datetimeFigureOut">
               <a:rPr lang="ru-RU" smtClean="0"/>
-              <a:t>05.05.2026</a:t>
+              <a:t>06.05.2026</a:t>
             </a:fld>
             <a:endParaRPr lang="ru-RU"/>
           </a:p>
@@ -1765,7 +1766,7 @@
           <a:p>
             <a:fld id="{EE7FD824-9642-443D-A094-80DC1BD911E3}" type="datetimeFigureOut">
               <a:rPr lang="ru-RU" smtClean="0"/>
-              <a:t>05.05.2026</a:t>
+              <a:t>06.05.2026</a:t>
             </a:fld>
             <a:endParaRPr lang="ru-RU"/>
           </a:p>
@@ -2177,7 +2178,7 @@
           <a:p>
             <a:fld id="{EE7FD824-9642-443D-A094-80DC1BD911E3}" type="datetimeFigureOut">
               <a:rPr lang="ru-RU" smtClean="0"/>
-              <a:t>05.05.2026</a:t>
+              <a:t>06.05.2026</a:t>
             </a:fld>
             <a:endParaRPr lang="ru-RU"/>
           </a:p>
@@ -2318,7 +2319,7 @@
           <a:p>
             <a:fld id="{EE7FD824-9642-443D-A094-80DC1BD911E3}" type="datetimeFigureOut">
               <a:rPr lang="ru-RU" smtClean="0"/>
-              <a:t>05.05.2026</a:t>
+              <a:t>06.05.2026</a:t>
             </a:fld>
             <a:endParaRPr lang="ru-RU"/>
           </a:p>
@@ -2431,7 +2432,7 @@
           <a:p>
             <a:fld id="{EE7FD824-9642-443D-A094-80DC1BD911E3}" type="datetimeFigureOut">
               <a:rPr lang="ru-RU" smtClean="0"/>
-              <a:t>05.05.2026</a:t>
+              <a:t>06.05.2026</a:t>
             </a:fld>
             <a:endParaRPr lang="ru-RU"/>
           </a:p>
@@ -2742,7 +2743,7 @@
           <a:p>
             <a:fld id="{EE7FD824-9642-443D-A094-80DC1BD911E3}" type="datetimeFigureOut">
               <a:rPr lang="ru-RU" smtClean="0"/>
-              <a:t>05.05.2026</a:t>
+              <a:t>06.05.2026</a:t>
             </a:fld>
             <a:endParaRPr lang="ru-RU"/>
           </a:p>
@@ -3030,7 +3031,7 @@
           <a:p>
             <a:fld id="{EE7FD824-9642-443D-A094-80DC1BD911E3}" type="datetimeFigureOut">
               <a:rPr lang="ru-RU" smtClean="0"/>
-              <a:t>05.05.2026</a:t>
+              <a:t>06.05.2026</a:t>
             </a:fld>
             <a:endParaRPr lang="ru-RU"/>
           </a:p>
@@ -3271,7 +3272,7 @@
           <a:p>
             <a:fld id="{EE7FD824-9642-443D-A094-80DC1BD911E3}" type="datetimeFigureOut">
               <a:rPr lang="ru-RU" smtClean="0"/>
-              <a:t>05.05.2026</a:t>
+              <a:t>06.05.2026</a:t>
             </a:fld>
             <a:endParaRPr lang="ru-RU"/>
           </a:p>
@@ -3994,7 +3995,7 @@
         <p:cNvPr id="1" name="">
           <a:extLst>
             <a:ext uri="{FF2B5EF4-FFF2-40B4-BE49-F238E27FC236}">
-              <a16:creationId xmlns:a16="http://schemas.microsoft.com/office/drawing/2014/main" id="{F542707A-3312-7252-1714-6B46CABFE3F7}"/>
+              <a16:creationId xmlns:a16="http://schemas.microsoft.com/office/drawing/2014/main" id="{C1BE3DF4-5532-83D9-07FA-0422734B713C}"/>
             </a:ext>
           </a:extLst>
         </p:cNvPr>
@@ -4009,42 +4010,12 @@
           <a:chExt cx="0" cy="0"/>
         </a:xfrm>
       </p:grpSpPr>
-      <p:pic>
-        <p:nvPicPr>
-          <p:cNvPr id="8" name="Рисунок 7">
-            <a:extLst>
-              <a:ext uri="{FF2B5EF4-FFF2-40B4-BE49-F238E27FC236}">
-                <a16:creationId xmlns:a16="http://schemas.microsoft.com/office/drawing/2014/main" id="{86587F1B-2651-4077-B380-C4DB707D6329}"/>
-              </a:ext>
-            </a:extLst>
-          </p:cNvPr>
-          <p:cNvPicPr>
-            <a:picLocks noChangeAspect="1"/>
-          </p:cNvPicPr>
-          <p:nvPr/>
-        </p:nvPicPr>
-        <p:blipFill>
-          <a:blip r:embed="rId2"/>
-          <a:stretch>
-            <a:fillRect/>
-          </a:stretch>
-        </p:blipFill>
-        <p:spPr>
-          <a:xfrm>
-            <a:off x="4722861" y="2072849"/>
-            <a:ext cx="7344800" cy="3467584"/>
-          </a:xfrm>
-          <a:prstGeom prst="rect">
-            <a:avLst/>
-          </a:prstGeom>
-        </p:spPr>
-      </p:pic>
       <p:sp>
         <p:nvSpPr>
           <p:cNvPr id="4" name="Прямоугольник 3">
             <a:extLst>
               <a:ext uri="{FF2B5EF4-FFF2-40B4-BE49-F238E27FC236}">
-                <a16:creationId xmlns:a16="http://schemas.microsoft.com/office/drawing/2014/main" id="{979E901E-2944-00C6-6256-CEDCD8AB07C2}"/>
+                <a16:creationId xmlns:a16="http://schemas.microsoft.com/office/drawing/2014/main" id="{1BF01EE6-26CC-C041-4F25-4402000D28A0}"/>
               </a:ext>
             </a:extLst>
           </p:cNvPr>
@@ -4096,7 +4067,7 @@
           <p:cNvPr id="3" name="Заголовок 2">
             <a:extLst>
               <a:ext uri="{FF2B5EF4-FFF2-40B4-BE49-F238E27FC236}">
-                <a16:creationId xmlns:a16="http://schemas.microsoft.com/office/drawing/2014/main" id="{6F9B8EF3-D646-261B-A4A3-EC93686A3138}"/>
+                <a16:creationId xmlns:a16="http://schemas.microsoft.com/office/drawing/2014/main" id="{7B16E372-43A8-14DE-D4E1-02C5E2ADA26B}"/>
               </a:ext>
             </a:extLst>
           </p:cNvPr>
@@ -4145,7 +4116,7 @@
           <p:cNvPr id="16" name="TextBox 15">
             <a:extLst>
               <a:ext uri="{FF2B5EF4-FFF2-40B4-BE49-F238E27FC236}">
-                <a16:creationId xmlns:a16="http://schemas.microsoft.com/office/drawing/2014/main" id="{1DE7BF54-D02F-E398-D290-2F92529C90E2}"/>
+                <a16:creationId xmlns:a16="http://schemas.microsoft.com/office/drawing/2014/main" id="{51EB1C9C-8F43-F1E7-4809-E02083BF0F69}"/>
               </a:ext>
             </a:extLst>
           </p:cNvPr>
@@ -4154,7 +4125,7 @@
         </p:nvSpPr>
         <p:spPr>
           <a:xfrm>
-            <a:off x="874039" y="5615963"/>
+            <a:off x="1032731" y="5334502"/>
             <a:ext cx="3052439" cy="861774"/>
           </a:xfrm>
           <a:prstGeom prst="rect">
@@ -4188,7 +4159,7 @@
           <p:cNvPr id="13" name="TextBox 12">
             <a:extLst>
               <a:ext uri="{FF2B5EF4-FFF2-40B4-BE49-F238E27FC236}">
-                <a16:creationId xmlns:a16="http://schemas.microsoft.com/office/drawing/2014/main" id="{9B7044CA-8B25-FCE5-1898-8FFE6CB06337}"/>
+                <a16:creationId xmlns:a16="http://schemas.microsoft.com/office/drawing/2014/main" id="{A15E2FDB-D7F1-6E7E-C4ED-17FBE49ACC84}"/>
               </a:ext>
             </a:extLst>
           </p:cNvPr>
@@ -4197,8 +4168,8 @@
         </p:nvSpPr>
         <p:spPr>
           <a:xfrm>
-            <a:off x="5566476" y="5808323"/>
-            <a:ext cx="5418086" cy="477054"/>
+            <a:off x="5183524" y="5521562"/>
+            <a:ext cx="3975768" cy="477054"/>
           </a:xfrm>
           <a:prstGeom prst="rect">
             <a:avLst/>
@@ -4214,7 +4185,7 @@
             <a:pPr algn="ctr"/>
             <a:r>
               <a:rPr lang="ru-RU" sz="2500" dirty="0"/>
-              <a:t>Эпюры напряжений и деформации</a:t>
+              <a:t>Вектор приложения силы</a:t>
             </a:r>
           </a:p>
         </p:txBody>
@@ -4224,7 +4195,38 @@
           <p:cNvPr id="5" name="Рисунок 4">
             <a:extLst>
               <a:ext uri="{FF2B5EF4-FFF2-40B4-BE49-F238E27FC236}">
-                <a16:creationId xmlns:a16="http://schemas.microsoft.com/office/drawing/2014/main" id="{F25D1F3E-4041-1662-FB58-F49661A7E799}"/>
+                <a16:creationId xmlns:a16="http://schemas.microsoft.com/office/drawing/2014/main" id="{3CD57F29-E31E-0920-F549-1DDB29107351}"/>
+              </a:ext>
+            </a:extLst>
+          </p:cNvPr>
+          <p:cNvPicPr>
+            <a:picLocks noChangeAspect="1"/>
+          </p:cNvPicPr>
+          <p:nvPr/>
+        </p:nvPicPr>
+        <p:blipFill>
+          <a:blip r:embed="rId2"/>
+          <a:srcRect r="2032"/>
+          <a:stretch>
+            <a:fillRect/>
+          </a:stretch>
+        </p:blipFill>
+        <p:spPr>
+          <a:xfrm>
+            <a:off x="402772" y="1899438"/>
+            <a:ext cx="4312358" cy="3059124"/>
+          </a:xfrm>
+          <a:prstGeom prst="rect">
+            <a:avLst/>
+          </a:prstGeom>
+        </p:spPr>
+      </p:pic>
+      <p:pic>
+        <p:nvPicPr>
+          <p:cNvPr id="6" name="Рисунок 5">
+            <a:extLst>
+              <a:ext uri="{FF2B5EF4-FFF2-40B4-BE49-F238E27FC236}">
+                <a16:creationId xmlns:a16="http://schemas.microsoft.com/office/drawing/2014/main" id="{DC52973A-EC8E-971B-F19C-16744D1E4AD0}"/>
               </a:ext>
             </a:extLst>
           </p:cNvPr>
@@ -4235,15 +4237,285 @@
         </p:nvPicPr>
         <p:blipFill>
           <a:blip r:embed="rId3"/>
-          <a:srcRect r="2032"/>
           <a:stretch>
             <a:fillRect/>
           </a:stretch>
         </p:blipFill>
         <p:spPr>
           <a:xfrm>
-            <a:off x="244080" y="2180899"/>
-            <a:ext cx="4312358" cy="3059124"/>
+            <a:off x="5215392" y="2527638"/>
+            <a:ext cx="3943900" cy="2762636"/>
+          </a:xfrm>
+          <a:prstGeom prst="rect">
+            <a:avLst/>
+          </a:prstGeom>
+        </p:spPr>
+      </p:pic>
+      <p:pic>
+        <p:nvPicPr>
+          <p:cNvPr id="7" name="Рисунок 6">
+            <a:extLst>
+              <a:ext uri="{FF2B5EF4-FFF2-40B4-BE49-F238E27FC236}">
+                <a16:creationId xmlns:a16="http://schemas.microsoft.com/office/drawing/2014/main" id="{8FA09670-9D7C-0331-724A-676B62CE2BE7}"/>
+              </a:ext>
+            </a:extLst>
+          </p:cNvPr>
+          <p:cNvPicPr>
+            <a:picLocks noChangeAspect="1"/>
+          </p:cNvPicPr>
+          <p:nvPr/>
+        </p:nvPicPr>
+        <p:blipFill>
+          <a:blip r:embed="rId4"/>
+          <a:stretch>
+            <a:fillRect/>
+          </a:stretch>
+        </p:blipFill>
+        <p:spPr>
+          <a:xfrm>
+            <a:off x="9464400" y="3418616"/>
+            <a:ext cx="2324828" cy="1269478"/>
+          </a:xfrm>
+          <a:prstGeom prst="rect">
+            <a:avLst/>
+          </a:prstGeom>
+        </p:spPr>
+      </p:pic>
+    </p:spTree>
+    <p:extLst>
+      <p:ext uri="{BB962C8B-B14F-4D97-AF65-F5344CB8AC3E}">
+        <p14:creationId xmlns:p14="http://schemas.microsoft.com/office/powerpoint/2010/main" val="3028080132"/>
+      </p:ext>
+    </p:extLst>
+  </p:cSld>
+  <p:clrMapOvr>
+    <a:masterClrMapping/>
+  </p:clrMapOvr>
+</p:sld>
+</file>
+
+<file path=ppt/slides/slide11.xml><?xml version="1.0" encoding="utf-8"?>
+<p:sld xmlns:a="http://schemas.openxmlformats.org/drawingml/2006/main" xmlns:r="http://schemas.openxmlformats.org/officeDocument/2006/relationships" xmlns:p="http://schemas.openxmlformats.org/presentationml/2006/main">
+  <p:cSld>
+    <p:spTree>
+      <p:nvGrpSpPr>
+        <p:cNvPr id="1" name="">
+          <a:extLst>
+            <a:ext uri="{FF2B5EF4-FFF2-40B4-BE49-F238E27FC236}">
+              <a16:creationId xmlns:a16="http://schemas.microsoft.com/office/drawing/2014/main" id="{F542707A-3312-7252-1714-6B46CABFE3F7}"/>
+            </a:ext>
+          </a:extLst>
+        </p:cNvPr>
+        <p:cNvGrpSpPr/>
+        <p:nvPr/>
+      </p:nvGrpSpPr>
+      <p:grpSpPr>
+        <a:xfrm>
+          <a:off x="0" y="0"/>
+          <a:ext cx="0" cy="0"/>
+          <a:chOff x="0" y="0"/>
+          <a:chExt cx="0" cy="0"/>
+        </a:xfrm>
+      </p:grpSpPr>
+      <p:sp>
+        <p:nvSpPr>
+          <p:cNvPr id="4" name="Прямоугольник 3">
+            <a:extLst>
+              <a:ext uri="{FF2B5EF4-FFF2-40B4-BE49-F238E27FC236}">
+                <a16:creationId xmlns:a16="http://schemas.microsoft.com/office/drawing/2014/main" id="{979E901E-2944-00C6-6256-CEDCD8AB07C2}"/>
+              </a:ext>
+            </a:extLst>
+          </p:cNvPr>
+          <p:cNvSpPr/>
+          <p:nvPr/>
+        </p:nvSpPr>
+        <p:spPr>
+          <a:xfrm>
+            <a:off x="0" y="1"/>
+            <a:ext cx="12192000" cy="1240970"/>
+          </a:xfrm>
+          <a:prstGeom prst="rect">
+            <a:avLst/>
+          </a:prstGeom>
+          <a:solidFill>
+            <a:srgbClr val="006CDC"/>
+          </a:solidFill>
+          <a:ln>
+            <a:noFill/>
+          </a:ln>
+        </p:spPr>
+        <p:style>
+          <a:lnRef idx="2">
+            <a:schemeClr val="accent1">
+              <a:shade val="15000"/>
+            </a:schemeClr>
+          </a:lnRef>
+          <a:fillRef idx="1">
+            <a:schemeClr val="accent1"/>
+          </a:fillRef>
+          <a:effectRef idx="0">
+            <a:schemeClr val="accent1"/>
+          </a:effectRef>
+          <a:fontRef idx="minor">
+            <a:schemeClr val="lt1"/>
+          </a:fontRef>
+        </p:style>
+        <p:txBody>
+          <a:bodyPr rtlCol="0" anchor="ctr"/>
+          <a:lstStyle/>
+          <a:p>
+            <a:pPr algn="ctr"/>
+            <a:endParaRPr lang="ru-RU"/>
+          </a:p>
+        </p:txBody>
+      </p:sp>
+      <p:sp>
+        <p:nvSpPr>
+          <p:cNvPr id="3" name="Заголовок 2">
+            <a:extLst>
+              <a:ext uri="{FF2B5EF4-FFF2-40B4-BE49-F238E27FC236}">
+                <a16:creationId xmlns:a16="http://schemas.microsoft.com/office/drawing/2014/main" id="{6F9B8EF3-D646-261B-A4A3-EC93686A3138}"/>
+              </a:ext>
+            </a:extLst>
+          </p:cNvPr>
+          <p:cNvSpPr>
+            <a:spLocks noGrp="1"/>
+          </p:cNvSpPr>
+          <p:nvPr>
+            <p:ph type="title"/>
+          </p:nvPr>
+        </p:nvSpPr>
+        <p:spPr>
+          <a:xfrm>
+            <a:off x="519477" y="380263"/>
+            <a:ext cx="11095580" cy="1424696"/>
+          </a:xfrm>
+        </p:spPr>
+        <p:txBody>
+          <a:bodyPr anchor="t">
+            <a:noAutofit/>
+          </a:bodyPr>
+          <a:lstStyle/>
+          <a:p>
+            <a:pPr>
+              <a:lnSpc>
+                <a:spcPct val="100000"/>
+              </a:lnSpc>
+            </a:pPr>
+            <a:r>
+              <a:rPr lang="ru-RU" sz="5000" dirty="0">
+                <a:solidFill>
+                  <a:schemeClr val="bg1"/>
+                </a:solidFill>
+              </a:rPr>
+              <a:t>Расчет МКЭ корпуса дифференциала</a:t>
+            </a:r>
+            <a:endParaRPr lang="ru-RU" sz="5000" dirty="0">
+              <a:solidFill>
+                <a:srgbClr val="006CDC"/>
+              </a:solidFill>
+            </a:endParaRPr>
+          </a:p>
+        </p:txBody>
+      </p:sp>
+      <p:sp>
+        <p:nvSpPr>
+          <p:cNvPr id="13" name="TextBox 12">
+            <a:extLst>
+              <a:ext uri="{FF2B5EF4-FFF2-40B4-BE49-F238E27FC236}">
+                <a16:creationId xmlns:a16="http://schemas.microsoft.com/office/drawing/2014/main" id="{9B7044CA-8B25-FCE5-1898-8FFE6CB06337}"/>
+              </a:ext>
+            </a:extLst>
+          </p:cNvPr>
+          <p:cNvSpPr txBox="1"/>
+          <p:nvPr/>
+        </p:nvSpPr>
+        <p:spPr>
+          <a:xfrm>
+            <a:off x="1072226" y="6000683"/>
+            <a:ext cx="5418086" cy="477054"/>
+          </a:xfrm>
+          <a:prstGeom prst="rect">
+            <a:avLst/>
+          </a:prstGeom>
+          <a:noFill/>
+        </p:spPr>
+        <p:txBody>
+          <a:bodyPr wrap="none" rtlCol="0">
+            <a:spAutoFit/>
+          </a:bodyPr>
+          <a:lstStyle/>
+          <a:p>
+            <a:pPr algn="ctr"/>
+            <a:r>
+              <a:rPr lang="ru-RU" sz="2500" dirty="0"/>
+              <a:t>Эпюры деформации</a:t>
+            </a:r>
+            <a:r>
+              <a:rPr lang="en-US" sz="2500" dirty="0"/>
+              <a:t> </a:t>
+            </a:r>
+            <a:r>
+              <a:rPr lang="ru-RU" sz="2500" dirty="0"/>
+              <a:t>и напряжений</a:t>
+            </a:r>
+          </a:p>
+        </p:txBody>
+      </p:sp>
+      <p:pic>
+        <p:nvPicPr>
+          <p:cNvPr id="9" name="Рисунок 8">
+            <a:extLst>
+              <a:ext uri="{FF2B5EF4-FFF2-40B4-BE49-F238E27FC236}">
+                <a16:creationId xmlns:a16="http://schemas.microsoft.com/office/drawing/2014/main" id="{C1EA1242-A505-E409-1D2B-32AB8E525A2E}"/>
+              </a:ext>
+            </a:extLst>
+          </p:cNvPr>
+          <p:cNvPicPr>
+            <a:picLocks noChangeAspect="1"/>
+          </p:cNvPicPr>
+          <p:nvPr/>
+        </p:nvPicPr>
+        <p:blipFill>
+          <a:blip r:embed="rId2"/>
+          <a:stretch>
+            <a:fillRect/>
+          </a:stretch>
+        </p:blipFill>
+        <p:spPr>
+          <a:xfrm>
+            <a:off x="284820" y="1621233"/>
+            <a:ext cx="7899446" cy="4350419"/>
+          </a:xfrm>
+          <a:prstGeom prst="rect">
+            <a:avLst/>
+          </a:prstGeom>
+        </p:spPr>
+      </p:pic>
+      <p:pic>
+        <p:nvPicPr>
+          <p:cNvPr id="11" name="Рисунок 10">
+            <a:extLst>
+              <a:ext uri="{FF2B5EF4-FFF2-40B4-BE49-F238E27FC236}">
+                <a16:creationId xmlns:a16="http://schemas.microsoft.com/office/drawing/2014/main" id="{AFBB3C5E-CD9D-7349-BCAE-129FBF464174}"/>
+              </a:ext>
+            </a:extLst>
+          </p:cNvPr>
+          <p:cNvPicPr>
+            <a:picLocks noChangeAspect="1"/>
+          </p:cNvPicPr>
+          <p:nvPr/>
+        </p:nvPicPr>
+        <p:blipFill>
+          <a:blip r:embed="rId3"/>
+          <a:stretch>
+            <a:fillRect/>
+          </a:stretch>
+        </p:blipFill>
+        <p:spPr>
+          <a:xfrm>
+            <a:off x="7628251" y="1945735"/>
+            <a:ext cx="4278929" cy="1635743"/>
           </a:xfrm>
           <a:prstGeom prst="rect">
             <a:avLst/>
@@ -4263,7 +4535,7 @@
 </p:sld>
 </file>
 
-<file path=ppt/slides/slide11.xml><?xml version="1.0" encoding="utf-8"?>
+<file path=ppt/slides/slide12.xml><?xml version="1.0" encoding="utf-8"?>
 <p:sld xmlns:a="http://schemas.openxmlformats.org/drawingml/2006/main" xmlns:r="http://schemas.openxmlformats.org/officeDocument/2006/relationships" xmlns:p="http://schemas.openxmlformats.org/presentationml/2006/main">
   <p:cSld>
     <p:bg>
